--- a/docs/presentation/IPI_Head_Separation_PoC_4th [26-09-XX].pptx
+++ b/docs/presentation/IPI_Head_Separation_PoC_4th [26-09-XX].pptx
@@ -12878,7 +12878,40 @@
                 <a:ea typeface="Malgun Gothic"/>
                 <a:cs typeface="Malgun Gothic"/>
               </a:rPr>
-              <a:t>4개 suite held-out 후보 풀 전부 사용</a:t>
+              <a:t>banking/slack/travel은 held-out 풀 전수</a:t>
+            </a:r>
+            <a:r>
+              <a:rPr sz="1350" b="0">
+                <a:solidFill>
+                  <a:srgbClr val="565C66"/>
+                </a:solidFill>
+                <a:latin typeface="Malgun Gothic"/>
+                <a:ea typeface="Malgun Gothic"/>
+                <a:cs typeface="Malgun Gothic"/>
+              </a:rPr>
+              <a:t>, workspace만 풀 392쌍 중 45로 캡(</a:t>
+            </a:r>
+            <a:r>
+              <a:rPr sz="1100" b="0">
+                <a:solidFill>
+                  <a:srgbClr val="565C66"/>
+                </a:solidFill>
+                <a:latin typeface="Consolas"/>
+                <a:ea typeface="Consolas"/>
+                <a:cs typeface="Consolas"/>
+              </a:rPr>
+              <a:t>--limit_pairs 45</a:t>
+            </a:r>
+            <a:r>
+              <a:rPr sz="1350" b="0">
+                <a:solidFill>
+                  <a:srgbClr val="565C66"/>
+                </a:solidFill>
+                <a:latin typeface="Malgun Gothic"/>
+                <a:ea typeface="Malgun Gothic"/>
+                <a:cs typeface="Malgun Gothic"/>
+              </a:rPr>
+              <a:t>)</a:t>
             </a:r>
           </a:p>
         </p:txBody>
@@ -13022,7 +13055,7 @@
                 <a:ea typeface="Malgun Gothic"/>
                 <a:cs typeface="Malgun Gothic"/>
               </a:rPr>
-              <a:t>Qwen2.5-32B 4-suite 전수 확대 (n=148)</a:t>
+              <a:t>Qwen2.5-32B 4-suite held-out 풀 확대 (n=148)</a:t>
             </a:r>
           </a:p>
         </p:txBody>
@@ -13037,7 +13070,7 @@
         </p:nvGraphicFramePr>
         <p:xfrm>
           <a:off x="640080" y="1691640"/>
-          <a:ext cx="10908787" cy="2359152"/>
+          <a:ext cx="10908788" cy="2359152"/>
         </p:xfrm>
         <a:graphic>
           <a:graphicData uri="http://schemas.openxmlformats.org/drawingml/2006/table">
@@ -13046,13 +13079,13 @@
                 <a:tableStyleId>{5C22544A-7EE6-4342-B048-85BDC9FD1C3A}</a:tableStyleId>
               </a:tblPr>
               <a:tblGrid>
-                <a:gridCol w="1939340"/>
-                <a:gridCol w="727252"/>
-                <a:gridCol w="1648439"/>
-                <a:gridCol w="1648439"/>
-                <a:gridCol w="1648439"/>
-                <a:gridCol w="1648439"/>
-                <a:gridCol w="1648439"/>
+                <a:gridCol w="1571605"/>
+                <a:gridCol w="2126289"/>
+                <a:gridCol w="1432934"/>
+                <a:gridCol w="1432934"/>
+                <a:gridCol w="1432934"/>
+                <a:gridCol w="1432934"/>
+                <a:gridCol w="1479158"/>
               </a:tblGrid>
               <a:tr h="347472">
                 <a:tc>
@@ -13089,13 +13122,13 @@
                     <a:bodyPr wrap="square"/>
                     <a:lstStyle/>
                     <a:p>
-                      <a:pPr algn="ctr">
+                      <a:pPr algn="l">
                         <a:lnSpc>
                           <a:spcPct val="100000"/>
                         </a:lnSpc>
                       </a:pPr>
                       <a:r>
-                        <a:rPr sz="1050" b="1">
+                        <a:rPr sz="950" b="1">
                           <a:solidFill>
                             <a:srgbClr val="8B9099"/>
                           </a:solidFill>
@@ -13103,7 +13136,7 @@
                           <a:ea typeface="Malgun Gothic"/>
                           <a:cs typeface="Malgun Gothic"/>
                         </a:rPr>
-                        <a:t>n</a:t>
+                        <a:t>n / held-out 풀</a:t>
                       </a:r>
                     </a:p>
                   </a:txBody>
@@ -13294,13 +13327,13 @@
                     <a:bodyPr wrap="square"/>
                     <a:lstStyle/>
                     <a:p>
-                      <a:pPr algn="ctr">
-                        <a:lnSpc>
-                          <a:spcPct val="115000"/>
-                        </a:lnSpc>
-                      </a:pPr>
-                      <a:r>
-                        <a:rPr sz="1050" b="0">
+                      <a:pPr algn="l">
+                        <a:lnSpc>
+                          <a:spcPct val="115000"/>
+                        </a:lnSpc>
+                      </a:pPr>
+                      <a:r>
+                        <a:rPr sz="950" b="0">
                           <a:solidFill>
                             <a:srgbClr val="565C66"/>
                           </a:solidFill>
@@ -13308,7 +13341,7 @@
                           <a:ea typeface="Malgun Gothic"/>
                           <a:cs typeface="Malgun Gothic"/>
                         </a:rPr>
-                        <a:t>45</a:t>
+                        <a:t>45 / 45  전수</a:t>
                       </a:r>
                     </a:p>
                   </a:txBody>
@@ -13499,13 +13532,13 @@
                     <a:bodyPr wrap="square"/>
                     <a:lstStyle/>
                     <a:p>
-                      <a:pPr algn="ctr">
-                        <a:lnSpc>
-                          <a:spcPct val="115000"/>
-                        </a:lnSpc>
-                      </a:pPr>
-                      <a:r>
-                        <a:rPr sz="1050" b="0">
+                      <a:pPr algn="l">
+                        <a:lnSpc>
+                          <a:spcPct val="115000"/>
+                        </a:lnSpc>
+                      </a:pPr>
+                      <a:r>
+                        <a:rPr sz="950" b="0">
                           <a:solidFill>
                             <a:srgbClr val="565C66"/>
                           </a:solidFill>
@@ -13513,7 +13546,7 @@
                           <a:ea typeface="Malgun Gothic"/>
                           <a:cs typeface="Malgun Gothic"/>
                         </a:rPr>
-                        <a:t>35</a:t>
+                        <a:t>35 / 35  전수</a:t>
                       </a:r>
                     </a:p>
                   </a:txBody>
@@ -13704,13 +13737,13 @@
                     <a:bodyPr wrap="square"/>
                     <a:lstStyle/>
                     <a:p>
-                      <a:pPr algn="ctr">
-                        <a:lnSpc>
-                          <a:spcPct val="115000"/>
-                        </a:lnSpc>
-                      </a:pPr>
-                      <a:r>
-                        <a:rPr sz="1050" b="0">
+                      <a:pPr algn="l">
+                        <a:lnSpc>
+                          <a:spcPct val="115000"/>
+                        </a:lnSpc>
+                      </a:pPr>
+                      <a:r>
+                        <a:rPr sz="950" b="0">
                           <a:solidFill>
                             <a:srgbClr val="565C66"/>
                           </a:solidFill>
@@ -13718,7 +13751,7 @@
                           <a:ea typeface="Malgun Gothic"/>
                           <a:cs typeface="Malgun Gothic"/>
                         </a:rPr>
-                        <a:t>28</a:t>
+                        <a:t>28 / 28  전수</a:t>
                       </a:r>
                     </a:p>
                   </a:txBody>
@@ -13909,13 +13942,24 @@
                     <a:bodyPr wrap="square"/>
                     <a:lstStyle/>
                     <a:p>
-                      <a:pPr algn="ctr">
-                        <a:lnSpc>
-                          <a:spcPct val="115000"/>
-                        </a:lnSpc>
-                      </a:pPr>
-                      <a:r>
-                        <a:rPr sz="1050" b="0">
+                      <a:pPr algn="l">
+                        <a:lnSpc>
+                          <a:spcPct val="115000"/>
+                        </a:lnSpc>
+                      </a:pPr>
+                      <a:r>
+                        <a:rPr sz="950" b="1">
+                          <a:solidFill>
+                            <a:srgbClr val="C1442A"/>
+                          </a:solidFill>
+                          <a:latin typeface="Malgun Gothic"/>
+                          <a:ea typeface="Malgun Gothic"/>
+                          <a:cs typeface="Malgun Gothic"/>
+                        </a:rPr>
+                        <a:t>40 / 392</a:t>
+                      </a:r>
+                      <a:r>
+                        <a:rPr sz="950" b="0">
                           <a:solidFill>
                             <a:srgbClr val="565C66"/>
                           </a:solidFill>
@@ -13923,7 +13967,7 @@
                           <a:ea typeface="Malgun Gothic"/>
                           <a:cs typeface="Malgun Gothic"/>
                         </a:rPr>
-                        <a:t>40</a:t>
+                        <a:t>  (45 샘플)</a:t>
                       </a:r>
                     </a:p>
                   </a:txBody>
@@ -14114,13 +14158,13 @@
                     <a:bodyPr wrap="square"/>
                     <a:lstStyle/>
                     <a:p>
-                      <a:pPr algn="ctr">
-                        <a:lnSpc>
-                          <a:spcPct val="115000"/>
-                        </a:lnSpc>
-                      </a:pPr>
-                      <a:r>
-                        <a:rPr sz="1050" b="1">
+                      <a:pPr algn="l">
+                        <a:lnSpc>
+                          <a:spcPct val="115000"/>
+                        </a:lnSpc>
+                      </a:pPr>
+                      <a:r>
+                        <a:rPr sz="950" b="1">
                           <a:solidFill>
                             <a:srgbClr val="16181D"/>
                           </a:solidFill>
@@ -14296,8 +14340,8 @@
         </p:nvSpPr>
         <p:spPr>
           <a:xfrm>
-            <a:off x="640080" y="4617720"/>
-            <a:ext cx="10908792" cy="1463040"/>
+            <a:off x="640080" y="4224528"/>
+            <a:ext cx="10908792" cy="1874519"/>
           </a:xfrm>
           <a:prstGeom prst="roundRect">
             <a:avLst>
@@ -14340,8 +14384,8 @@
         </p:nvSpPr>
         <p:spPr>
           <a:xfrm>
-            <a:off x="914400" y="4782312"/>
-            <a:ext cx="10360152" cy="1188720"/>
+            <a:off x="914400" y="4389120"/>
+            <a:ext cx="10360152" cy="1600200"/>
           </a:xfrm>
           <a:prstGeom prst="rect">
             <a:avLst/>
@@ -14412,6 +14456,27 @@
                 <a:cs typeface="Malgun Gothic"/>
               </a:rPr>
               <a:t> — held-out 35쌍 전수 기준 성공한 공격 8건 중 5건을 knockout이 못 막음(억제 3, persist 5). banking/travel/workspace는 완벽 억제(0%).</a:t>
+            </a:r>
+          </a:p>
+          <a:p>
+            <a:pPr algn="l">
+              <a:lnSpc>
+                <a:spcPct val="125000"/>
+              </a:lnSpc>
+              <a:spcBef>
+                <a:spcPts val="600"/>
+              </a:spcBef>
+            </a:pPr>
+            <a:r>
+              <a:rPr sz="1050" b="0">
+                <a:solidFill>
+                  <a:srgbClr val="8B9099"/>
+                </a:solidFill>
+                <a:latin typeface="Malgun Gothic"/>
+                <a:ea typeface="Malgun Gothic"/>
+                <a:cs typeface="Malgun Gothic"/>
+              </a:rPr>
+              <a:t>banking·slack·travel은 held-out 풀 전수라 표본 논란 없음. workspace는 392쌍 중 40쌍만 봤지만 k0 ASR 자체가 0%라 결론에 영향 없음.</a:t>
             </a:r>
           </a:p>
         </p:txBody>

--- a/docs/presentation/IPI_Head_Separation_PoC_4th [26-09-XX].pptx
+++ b/docs/presentation/IPI_Head_Separation_PoC_4th [26-09-XX].pptx
@@ -5680,7 +5680,29 @@
                 <a:ea typeface="Malgun Gothic"/>
                 <a:cs typeface="Malgun Gothic"/>
               </a:rPr>
-              <a:t>두 nf4dq 실행이 교집합 136쌍 중 24쌍 불일치(18쌍이 baseline 차이) → </a:t>
+              <a:t>두 nf4dq 실행(둘 다 slack 풀 35쌍 전수) 비교 시 </a:t>
+            </a:r>
+            <a:r>
+              <a:rPr sz="1200" b="1">
+                <a:solidFill>
+                  <a:srgbClr val="C1442A"/>
+                </a:solidFill>
+                <a:latin typeface="Malgun Gothic"/>
+                <a:ea typeface="Malgun Gothic"/>
+                <a:cs typeface="Malgun Gothic"/>
+              </a:rPr>
+              <a:t>slack 12/35쌍(34%) 불일치, 그중 8쌍이 baseline 차이</a:t>
+            </a:r>
+            <a:r>
+              <a:rPr sz="1200" b="0">
+                <a:solidFill>
+                  <a:srgbClr val="565C66"/>
+                </a:solidFill>
+                <a:latin typeface="Malgun Gothic"/>
+                <a:ea typeface="Malgun Gothic"/>
+                <a:cs typeface="Malgun Gothic"/>
+              </a:rPr>
+              <a:t> (user_task_0·2가 k0 붕괴) → </a:t>
             </a:r>
             <a:r>
               <a:rPr sz="1200" b="1">

--- a/docs/presentation/IPI_Head_Separation_PoC_4th [26-09-XX].pptx
+++ b/docs/presentation/IPI_Head_Separation_PoC_4th [26-09-XX].pptx
@@ -17,9 +17,6 @@
     <p:sldId id="265" r:id="rId16"/>
     <p:sldId id="266" r:id="rId17"/>
     <p:sldId id="267" r:id="rId18"/>
-    <p:sldId id="268" r:id="rId19"/>
-    <p:sldId id="269" r:id="rId20"/>
-    <p:sldId id="270" r:id="rId21"/>
   </p:sldIdLst>
   <p:sldSz cx="12191695" cy="6858000" type="screen4x3"/>
   <p:notesSz cx="6858000" cy="9144000"/>
@@ -5870,7 +5867,7 @@
                 <a:ea typeface="Consolas"/>
                 <a:cs typeface="Consolas"/>
               </a:rPr>
-              <a:t>05 · 종합</a:t>
+              <a:t>05 · 마무리</a:t>
             </a:r>
           </a:p>
         </p:txBody>
@@ -5911,868 +5908,21 @@
                 <a:ea typeface="Malgun Gothic"/>
                 <a:cs typeface="Malgun Gothic"/>
               </a:rPr>
-              <a:t>종합 결론</a:t>
+              <a:t>결과 요약 &amp; 다음 단계</a:t>
             </a:r>
           </a:p>
         </p:txBody>
       </p:sp>
       <p:sp>
         <p:nvSpPr>
-          <p:cNvPr id="5" name="TextBox 4"/>
-          <p:cNvSpPr txBox="1"/>
-          <p:nvPr/>
-        </p:nvSpPr>
-        <p:spPr>
-          <a:xfrm>
-            <a:off x="640080" y="1828800"/>
-            <a:ext cx="10908792" cy="4206240"/>
-          </a:xfrm>
-          <a:prstGeom prst="rect">
-            <a:avLst/>
-          </a:prstGeom>
-          <a:noFill/>
-        </p:spPr>
-        <p:txBody>
-          <a:bodyPr wrap="square" lIns="0" rIns="0" tIns="0" bIns="0">
-            <a:spAutoFit/>
-          </a:bodyPr>
-          <a:lstStyle/>
-          <a:p>
-            <a:pPr algn="l">
-              <a:lnSpc>
-                <a:spcPct val="132000"/>
-              </a:lnSpc>
-            </a:pPr>
-            <a:r>
-              <a:rPr sz="1400" b="1">
-                <a:solidFill>
-                  <a:srgbClr val="C06A1F"/>
-                </a:solidFill>
-                <a:latin typeface="Malgun Gothic"/>
-                <a:ea typeface="Malgun Gothic"/>
-                <a:cs typeface="Malgun Gothic"/>
-              </a:rPr>
-              <a:t>1.  </a:t>
-            </a:r>
-            <a:r>
-              <a:rPr sz="1250" b="1">
-                <a:solidFill>
-                  <a:srgbClr val="2F6FCE"/>
-                </a:solidFill>
-                <a:latin typeface="Malgun Gothic"/>
-                <a:ea typeface="Malgun Gothic"/>
-                <a:cs typeface="Malgun Gothic"/>
-              </a:rPr>
-              <a:t>파서는 confound 아님</a:t>
-            </a:r>
-            <a:r>
-              <a:rPr sz="1250" b="0">
-                <a:solidFill>
-                  <a:srgbClr val="565C66"/>
-                </a:solidFill>
-                <a:latin typeface="Malgun Gothic"/>
-                <a:ea typeface="Malgun Gothic"/>
-                <a:cs typeface="Malgun Gothic"/>
-              </a:rPr>
-              <a:t> — banking/workspace 저조는 커스텀 파서 탓이 아니라 모델·suite 자체의 성질. agentdojo_default로 전환 완료.</a:t>
-            </a:r>
-          </a:p>
-          <a:p>
-            <a:pPr algn="l">
-              <a:lnSpc>
-                <a:spcPct val="132000"/>
-              </a:lnSpc>
-              <a:spcBef>
-                <a:spcPts val="1500"/>
-              </a:spcBef>
-            </a:pPr>
-            <a:r>
-              <a:rPr sz="1400" b="1">
-                <a:solidFill>
-                  <a:srgbClr val="C06A1F"/>
-                </a:solidFill>
-                <a:latin typeface="Malgun Gothic"/>
-                <a:ea typeface="Malgun Gothic"/>
-                <a:cs typeface="Malgun Gothic"/>
-              </a:rPr>
-              <a:t>2.  </a:t>
-            </a:r>
-            <a:r>
-              <a:rPr sz="1250" b="1">
-                <a:solidFill>
-                  <a:srgbClr val="2F6FCE"/>
-                </a:solidFill>
-                <a:latin typeface="Malgun Gothic"/>
-                <a:ea typeface="Malgun Gothic"/>
-                <a:cs typeface="Malgun Gothic"/>
-              </a:rPr>
-              <a:t>스케일업 반례 재확정 (n=148)</a:t>
-            </a:r>
-            <a:r>
-              <a:rPr sz="1250" b="0">
-                <a:solidFill>
-                  <a:srgbClr val="565C66"/>
-                </a:solidFill>
-                <a:latin typeface="Malgun Gothic"/>
-                <a:ea typeface="Malgun Gothic"/>
-                <a:cs typeface="Malgun Gothic"/>
-              </a:rPr>
-              <a:t> — 스케일을 키워도 전체 ASR은 안 오름(6.8%). 단 slack에서만 달성 가능한 공격 1/3/5 중 절반 이상 persist.</a:t>
-            </a:r>
-          </a:p>
-          <a:p>
-            <a:pPr algn="l">
-              <a:lnSpc>
-                <a:spcPct val="132000"/>
-              </a:lnSpc>
-              <a:spcBef>
-                <a:spcPts val="1500"/>
-              </a:spcBef>
-            </a:pPr>
-            <a:r>
-              <a:rPr sz="1400" b="1">
-                <a:solidFill>
-                  <a:srgbClr val="C06A1F"/>
-                </a:solidFill>
-                <a:latin typeface="Malgun Gothic"/>
-                <a:ea typeface="Malgun Gothic"/>
-                <a:cs typeface="Malgun Gothic"/>
-              </a:rPr>
-              <a:t>3.  </a:t>
-            </a:r>
-            <a:r>
-              <a:rPr sz="1250" b="1">
-                <a:solidFill>
-                  <a:srgbClr val="2F6FCE"/>
-                </a:solidFill>
-                <a:latin typeface="Malgun Gothic"/>
-                <a:ea typeface="Malgun Gothic"/>
-                <a:cs typeface="Malgun Gothic"/>
-              </a:rPr>
-              <a:t>원인 두 갈래로 분리 규명</a:t>
-            </a:r>
-            <a:r>
-              <a:rPr sz="1250" b="0">
-                <a:solidFill>
-                  <a:srgbClr val="565C66"/>
-                </a:solidFill>
-                <a:latin typeface="Malgun Gothic"/>
-                <a:ea typeface="Malgun Gothic"/>
-                <a:cs typeface="Malgun Gothic"/>
-              </a:rPr>
-              <a:t> — (a) fp4 4bit 양자화 아티팩트(확정, nf4+dq로 해소·기본값 교체)  (b) 32B 스케일 효과(약하게 확정, bf16 단독에서도 불완전 + backfire 1).</a:t>
-            </a:r>
-          </a:p>
-          <a:p>
-            <a:pPr algn="l">
-              <a:lnSpc>
-                <a:spcPct val="132000"/>
-              </a:lnSpc>
-              <a:spcBef>
-                <a:spcPts val="1500"/>
-              </a:spcBef>
-            </a:pPr>
-            <a:r>
-              <a:rPr sz="1400" b="1">
-                <a:solidFill>
-                  <a:srgbClr val="C06A1F"/>
-                </a:solidFill>
-                <a:latin typeface="Malgun Gothic"/>
-                <a:ea typeface="Malgun Gothic"/>
-                <a:cs typeface="Malgun Gothic"/>
-              </a:rPr>
-              <a:t>4.  </a:t>
-            </a:r>
-            <a:r>
-              <a:rPr sz="1250" b="1">
-                <a:solidFill>
-                  <a:srgbClr val="16181D"/>
-                </a:solidFill>
-                <a:latin typeface="Malgun Gothic"/>
-                <a:ea typeface="Malgun Gothic"/>
-                <a:cs typeface="Malgun Gothic"/>
-              </a:rPr>
-              <a:t>순효과는 여전히 방어적</a:t>
-            </a:r>
-            <a:r>
-              <a:rPr sz="1250" b="0">
-                <a:solidFill>
-                  <a:srgbClr val="565C66"/>
-                </a:solidFill>
-                <a:latin typeface="Malgun Gothic"/>
-                <a:ea typeface="Malgun Gothic"/>
-                <a:cs typeface="Malgun Gothic"/>
-              </a:rPr>
-              <a:t> (suppressed 5 &gt; backfire 1) — "못 막는다"가 아니라 "불완전 + 가끔 backfire".</a:t>
-            </a:r>
-          </a:p>
-        </p:txBody>
-      </p:sp>
-    </p:spTree>
-  </p:cSld>
-  <p:clrMapOvr>
-    <a:masterClrMapping/>
-  </p:clrMapOvr>
-</p:sld>
-</file>
-
-<file path=ppt/slides/slide13.xml><?xml version="1.0" encoding="utf-8"?>
-<p:sld xmlns:a="http://schemas.openxmlformats.org/drawingml/2006/main" xmlns:p="http://schemas.openxmlformats.org/presentationml/2006/main" xmlns:r="http://schemas.openxmlformats.org/officeDocument/2006/relationships">
-  <p:cSld>
-    <p:spTree>
-      <p:nvGrpSpPr>
-        <p:cNvPr id="1" name=""/>
-        <p:cNvGrpSpPr/>
-        <p:nvPr/>
-      </p:nvGrpSpPr>
-      <p:grpSpPr/>
-      <p:sp>
-        <p:nvSpPr>
-          <p:cNvPr id="2" name="Rectangle 1"/>
+          <p:cNvPr id="5" name="Rounded Rectangle 4"/>
           <p:cNvSpPr/>
           <p:nvPr/>
         </p:nvSpPr>
         <p:spPr>
           <a:xfrm>
-            <a:off x="0" y="0"/>
-            <a:ext cx="12188952" cy="6858000"/>
-          </a:xfrm>
-          <a:prstGeom prst="rect">
-            <a:avLst/>
-          </a:prstGeom>
-          <a:solidFill>
-            <a:srgbClr val="FFFFFF"/>
-          </a:solidFill>
-          <a:ln>
-            <a:noFill/>
-          </a:ln>
-          <a:effectLst/>
-        </p:spPr>
-        <p:style>
-          <a:lnRef idx="1">
-            <a:schemeClr val="accent1"/>
-          </a:lnRef>
-          <a:fillRef idx="3">
-            <a:schemeClr val="accent1"/>
-          </a:fillRef>
-          <a:effectRef idx="2">
-            <a:schemeClr val="accent1"/>
-          </a:effectRef>
-          <a:fontRef idx="minor">
-            <a:schemeClr val="lt1"/>
-          </a:fontRef>
-        </p:style>
-        <p:txBody>
-          <a:bodyPr rtlCol="0" anchor="ctr"/>
-          <a:lstStyle/>
-          <a:p>
-            <a:pPr algn="ctr"/>
-          </a:p>
-        </p:txBody>
-      </p:sp>
-      <p:sp>
-        <p:nvSpPr>
-          <p:cNvPr id="3" name="TextBox 2"/>
-          <p:cNvSpPr txBox="1"/>
-          <p:nvPr/>
-        </p:nvSpPr>
-        <p:spPr>
-          <a:xfrm>
-            <a:off x="640080" y="411480"/>
-            <a:ext cx="10908792" cy="365760"/>
-          </a:xfrm>
-          <a:prstGeom prst="rect">
-            <a:avLst/>
-          </a:prstGeom>
-          <a:noFill/>
-        </p:spPr>
-        <p:txBody>
-          <a:bodyPr wrap="square" lIns="0" rIns="0" tIns="0" bIns="0">
-            <a:spAutoFit/>
-          </a:bodyPr>
-          <a:lstStyle/>
-          <a:p>
-            <a:pPr algn="l">
-              <a:lnSpc>
-                <a:spcPct val="125000"/>
-              </a:lnSpc>
-            </a:pPr>
-            <a:r>
-              <a:rPr sz="1200" b="1">
-                <a:solidFill>
-                  <a:srgbClr val="C06A1F"/>
-                </a:solidFill>
-                <a:latin typeface="Consolas"/>
-                <a:ea typeface="Consolas"/>
-                <a:cs typeface="Consolas"/>
-              </a:rPr>
-              <a:t>06 · 대조 실험</a:t>
-            </a:r>
-          </a:p>
-        </p:txBody>
-      </p:sp>
-      <p:sp>
-        <p:nvSpPr>
-          <p:cNvPr id="4" name="TextBox 3"/>
-          <p:cNvSpPr txBox="1"/>
-          <p:nvPr/>
-        </p:nvSpPr>
-        <p:spPr>
-          <a:xfrm>
-            <a:off x="640080" y="777240"/>
-            <a:ext cx="10908792" cy="822960"/>
-          </a:xfrm>
-          <a:prstGeom prst="rect">
-            <a:avLst/>
-          </a:prstGeom>
-          <a:noFill/>
-        </p:spPr>
-        <p:txBody>
-          <a:bodyPr wrap="square" lIns="0" rIns="0" tIns="0" bIns="0">
-            <a:spAutoFit/>
-          </a:bodyPr>
-          <a:lstStyle/>
-          <a:p>
-            <a:pPr algn="l">
-              <a:lnSpc>
-                <a:spcPct val="110000"/>
-              </a:lnSpc>
-            </a:pPr>
-            <a:r>
-              <a:rPr sz="2600" b="1">
-                <a:solidFill>
-                  <a:srgbClr val="16181D"/>
-                </a:solidFill>
-                <a:latin typeface="Malgun Gothic"/>
-                <a:ea typeface="Malgun Gothic"/>
-                <a:cs typeface="Malgun Gothic"/>
-              </a:rPr>
-              <a:t>32B bf16 banking — "slack 특유" 확정</a:t>
-            </a:r>
-          </a:p>
-        </p:txBody>
-      </p:sp>
-      <p:sp>
-        <p:nvSpPr>
-          <p:cNvPr id="5" name="TextBox 4"/>
-          <p:cNvSpPr txBox="1"/>
-          <p:nvPr/>
-        </p:nvSpPr>
-        <p:spPr>
-          <a:xfrm>
-            <a:off x="640080" y="1645920"/>
-            <a:ext cx="10908792" cy="320040"/>
-          </a:xfrm>
-          <a:prstGeom prst="rect">
-            <a:avLst/>
-          </a:prstGeom>
-          <a:noFill/>
-        </p:spPr>
-        <p:txBody>
-          <a:bodyPr wrap="square" lIns="0" rIns="0" tIns="0" bIns="0">
-            <a:spAutoFit/>
-          </a:bodyPr>
-          <a:lstStyle/>
-          <a:p>
-            <a:pPr algn="l">
-              <a:lnSpc>
-                <a:spcPct val="125000"/>
-              </a:lnSpc>
-            </a:pPr>
-            <a:r>
-              <a:rPr sz="1100" b="0">
-                <a:solidFill>
-                  <a:srgbClr val="8B9099"/>
-                </a:solidFill>
-                <a:latin typeface="Malgun Gothic"/>
-                <a:ea typeface="Malgun Gothic"/>
-                <a:cs typeface="Malgun Gothic"/>
-              </a:rPr>
-              <a:t>같은 32B bf16 스택(동일 heads·설정)에서 --suite 만 slack → banking 으로 교체</a:t>
-            </a:r>
-          </a:p>
-        </p:txBody>
-      </p:sp>
-      <p:graphicFrame>
-        <p:nvGraphicFramePr>
-          <p:cNvPr id="6" name="Table 5"/>
-          <p:cNvGraphicFramePr>
-            <a:graphicFrameLocks noGrp="1"/>
-          </p:cNvGraphicFramePr>
-          <p:nvPr/>
-        </p:nvGraphicFramePr>
-        <p:xfrm>
-          <a:off x="640080" y="2057400"/>
-          <a:ext cx="10908792" cy="1371600"/>
-        </p:xfrm>
-        <a:graphic>
-          <a:graphicData uri="http://schemas.openxmlformats.org/drawingml/2006/table">
-            <a:tbl>
-              <a:tblPr bandRow="0">
-                <a:tableStyleId>{5C22544A-7EE6-4342-B048-85BDC9FD1C3A}</a:tableStyleId>
-              </a:tblPr>
-              <a:tblGrid>
-                <a:gridCol w="2377440"/>
-                <a:gridCol w="1371600"/>
-                <a:gridCol w="1371600"/>
-                <a:gridCol w="1371600"/>
-                <a:gridCol w="4416552"/>
-              </a:tblGrid>
-              <a:tr h="365760">
-                <a:tc>
-                  <a:txBody>
-                    <a:bodyPr wrap="square"/>
-                    <a:lstStyle/>
-                    <a:p>
-                      <a:pPr algn="l">
-                        <a:lnSpc>
-                          <a:spcPct val="100000"/>
-                        </a:lnSpc>
-                      </a:pPr>
-                      <a:r>
-                        <a:rPr sz="1100" b="1">
-                          <a:solidFill>
-                            <a:srgbClr val="8B9099"/>
-                          </a:solidFill>
-                          <a:latin typeface="Malgun Gothic"/>
-                          <a:ea typeface="Malgun Gothic"/>
-                          <a:cs typeface="Malgun Gothic"/>
-                        </a:rPr>
-                        <a:t>suite</a:t>
-                      </a:r>
-                    </a:p>
-                  </a:txBody>
-                  <a:tcPr marL="82296" marR="82296" marT="41148" marB="41148" anchor="ctr">
-                    <a:solidFill>
-                      <a:srgbClr val="E9EAED"/>
-                    </a:solidFill>
-                  </a:tcPr>
-                </a:tc>
-                <a:tc>
-                  <a:txBody>
-                    <a:bodyPr wrap="square"/>
-                    <a:lstStyle/>
-                    <a:p>
-                      <a:pPr algn="r">
-                        <a:lnSpc>
-                          <a:spcPct val="100000"/>
-                        </a:lnSpc>
-                      </a:pPr>
-                      <a:r>
-                        <a:rPr sz="1050" b="1">
-                          <a:solidFill>
-                            <a:srgbClr val="8B9099"/>
-                          </a:solidFill>
-                          <a:latin typeface="Malgun Gothic"/>
-                          <a:ea typeface="Malgun Gothic"/>
-                          <a:cs typeface="Malgun Gothic"/>
-                        </a:rPr>
-                        <a:t>k0 ASR</a:t>
-                      </a:r>
-                    </a:p>
-                  </a:txBody>
-                  <a:tcPr marL="82296" marR="82296" marT="41148" marB="41148" anchor="ctr">
-                    <a:solidFill>
-                      <a:srgbClr val="E9EAED"/>
-                    </a:solidFill>
-                  </a:tcPr>
-                </a:tc>
-                <a:tc>
-                  <a:txBody>
-                    <a:bodyPr wrap="square"/>
-                    <a:lstStyle/>
-                    <a:p>
-                      <a:pPr algn="r">
-                        <a:lnSpc>
-                          <a:spcPct val="100000"/>
-                        </a:lnSpc>
-                      </a:pPr>
-                      <a:r>
-                        <a:rPr sz="1050" b="1">
-                          <a:solidFill>
-                            <a:srgbClr val="8B9099"/>
-                          </a:solidFill>
-                          <a:latin typeface="Malgun Gothic"/>
-                          <a:ea typeface="Malgun Gothic"/>
-                          <a:cs typeface="Malgun Gothic"/>
-                        </a:rPr>
-                        <a:t>kN ASR</a:t>
-                      </a:r>
-                    </a:p>
-                  </a:txBody>
-                  <a:tcPr marL="82296" marR="82296" marT="41148" marB="41148" anchor="ctr">
-                    <a:solidFill>
-                      <a:srgbClr val="E9EAED"/>
-                    </a:solidFill>
-                  </a:tcPr>
-                </a:tc>
-                <a:tc>
-                  <a:txBody>
-                    <a:bodyPr wrap="square"/>
-                    <a:lstStyle/>
-                    <a:p>
-                      <a:pPr algn="ctr">
-                        <a:lnSpc>
-                          <a:spcPct val="100000"/>
-                        </a:lnSpc>
-                      </a:pPr>
-                      <a:r>
-                        <a:rPr sz="1050" b="1">
-                          <a:solidFill>
-                            <a:srgbClr val="8B9099"/>
-                          </a:solidFill>
-                          <a:latin typeface="Malgun Gothic"/>
-                          <a:ea typeface="Malgun Gothic"/>
-                          <a:cs typeface="Malgun Gothic"/>
-                        </a:rPr>
-                        <a:t>backfire</a:t>
-                      </a:r>
-                    </a:p>
-                  </a:txBody>
-                  <a:tcPr marL="82296" marR="82296" marT="41148" marB="41148" anchor="ctr">
-                    <a:solidFill>
-                      <a:srgbClr val="E9EAED"/>
-                    </a:solidFill>
-                  </a:tcPr>
-                </a:tc>
-                <a:tc>
-                  <a:txBody>
-                    <a:bodyPr wrap="square"/>
-                    <a:lstStyle/>
-                    <a:p>
-                      <a:pPr algn="l">
-                        <a:lnSpc>
-                          <a:spcPct val="100000"/>
-                        </a:lnSpc>
-                      </a:pPr>
-                      <a:r>
-                        <a:rPr sz="1050" b="1">
-                          <a:solidFill>
-                            <a:srgbClr val="8B9099"/>
-                          </a:solidFill>
-                          <a:latin typeface="Malgun Gothic"/>
-                          <a:ea typeface="Malgun Gothic"/>
-                          <a:cs typeface="Malgun Gothic"/>
-                        </a:rPr>
-                        <a:t>판정</a:t>
-                      </a:r>
-                    </a:p>
-                  </a:txBody>
-                  <a:tcPr marL="82296" marR="82296" marT="41148" marB="41148" anchor="ctr">
-                    <a:solidFill>
-                      <a:srgbClr val="E9EAED"/>
-                    </a:solidFill>
-                  </a:tcPr>
-                </a:tc>
-              </a:tr>
-              <a:tr h="502920">
-                <a:tc>
-                  <a:txBody>
-                    <a:bodyPr wrap="square"/>
-                    <a:lstStyle/>
-                    <a:p>
-                      <a:pPr algn="l">
-                        <a:lnSpc>
-                          <a:spcPct val="115000"/>
-                        </a:lnSpc>
-                      </a:pPr>
-                      <a:r>
-                        <a:rPr sz="1100" b="0">
-                          <a:solidFill>
-                            <a:srgbClr val="565C66"/>
-                          </a:solidFill>
-                          <a:latin typeface="Malgun Gothic"/>
-                          <a:ea typeface="Malgun Gothic"/>
-                          <a:cs typeface="Malgun Gothic"/>
-                        </a:rPr>
-                        <a:t>slack (S11 재인용)</a:t>
-                      </a:r>
-                    </a:p>
-                  </a:txBody>
-                  <a:tcPr marL="82296" marR="82296" marT="41148" marB="41148" anchor="ctr">
-                    <a:solidFill>
-                      <a:srgbClr val="FFFFFF"/>
-                    </a:solidFill>
-                  </a:tcPr>
-                </a:tc>
-                <a:tc>
-                  <a:txBody>
-                    <a:bodyPr wrap="square"/>
-                    <a:lstStyle/>
-                    <a:p>
-                      <a:pPr algn="r">
-                        <a:lnSpc>
-                          <a:spcPct val="115000"/>
-                        </a:lnSpc>
-                      </a:pPr>
-                      <a:r>
-                        <a:rPr sz="1050" b="0">
-                          <a:solidFill>
-                            <a:srgbClr val="565C66"/>
-                          </a:solidFill>
-                          <a:latin typeface="Malgun Gothic"/>
-                          <a:ea typeface="Malgun Gothic"/>
-                          <a:cs typeface="Malgun Gothic"/>
-                        </a:rPr>
-                        <a:t>0.257</a:t>
-                      </a:r>
-                    </a:p>
-                  </a:txBody>
-                  <a:tcPr marL="82296" marR="82296" marT="41148" marB="41148" anchor="ctr">
-                    <a:solidFill>
-                      <a:srgbClr val="FFFFFF"/>
-                    </a:solidFill>
-                  </a:tcPr>
-                </a:tc>
-                <a:tc>
-                  <a:txBody>
-                    <a:bodyPr wrap="square"/>
-                    <a:lstStyle/>
-                    <a:p>
-                      <a:pPr algn="r">
-                        <a:lnSpc>
-                          <a:spcPct val="115000"/>
-                        </a:lnSpc>
-                      </a:pPr>
-                      <a:r>
-                        <a:rPr sz="1050" b="0">
-                          <a:solidFill>
-                            <a:srgbClr val="565C66"/>
-                          </a:solidFill>
-                          <a:latin typeface="Malgun Gothic"/>
-                          <a:ea typeface="Malgun Gothic"/>
-                          <a:cs typeface="Malgun Gothic"/>
-                        </a:rPr>
-                        <a:t>0.143</a:t>
-                      </a:r>
-                    </a:p>
-                  </a:txBody>
-                  <a:tcPr marL="82296" marR="82296" marT="41148" marB="41148" anchor="ctr">
-                    <a:solidFill>
-                      <a:srgbClr val="FFFFFF"/>
-                    </a:solidFill>
-                  </a:tcPr>
-                </a:tc>
-                <a:tc>
-                  <a:txBody>
-                    <a:bodyPr wrap="square"/>
-                    <a:lstStyle/>
-                    <a:p>
-                      <a:pPr algn="ctr">
-                        <a:lnSpc>
-                          <a:spcPct val="115000"/>
-                        </a:lnSpc>
-                      </a:pPr>
-                      <a:r>
-                        <a:rPr sz="1050" b="1">
-                          <a:solidFill>
-                            <a:srgbClr val="C1442A"/>
-                          </a:solidFill>
-                          <a:latin typeface="Malgun Gothic"/>
-                          <a:ea typeface="Malgun Gothic"/>
-                          <a:cs typeface="Malgun Gothic"/>
-                        </a:rPr>
-                        <a:t>1 / 9</a:t>
-                      </a:r>
-                    </a:p>
-                  </a:txBody>
-                  <a:tcPr marL="82296" marR="82296" marT="41148" marB="41148" anchor="ctr">
-                    <a:solidFill>
-                      <a:srgbClr val="FFFFFF"/>
-                    </a:solidFill>
-                  </a:tcPr>
-                </a:tc>
-                <a:tc>
-                  <a:txBody>
-                    <a:bodyPr wrap="square"/>
-                    <a:lstStyle/>
-                    <a:p>
-                      <a:pPr algn="l">
-                        <a:lnSpc>
-                          <a:spcPct val="115000"/>
-                        </a:lnSpc>
-                      </a:pPr>
-                      <a:r>
-                        <a:rPr sz="1050" b="0">
-                          <a:solidFill>
-                            <a:srgbClr val="565C66"/>
-                          </a:solidFill>
-                          <a:latin typeface="Malgun Gothic"/>
-                          <a:ea typeface="Malgun Gothic"/>
-                          <a:cs typeface="Malgun Gothic"/>
-                        </a:rPr>
-                        <a:t>스케일 효과로 불완전 억제</a:t>
-                      </a:r>
-                    </a:p>
-                  </a:txBody>
-                  <a:tcPr marL="82296" marR="82296" marT="41148" marB="41148" anchor="ctr">
-                    <a:solidFill>
-                      <a:srgbClr val="FFFFFF"/>
-                    </a:solidFill>
-                  </a:tcPr>
-                </a:tc>
-              </a:tr>
-              <a:tr h="502920">
-                <a:tc>
-                  <a:txBody>
-                    <a:bodyPr wrap="square"/>
-                    <a:lstStyle/>
-                    <a:p>
-                      <a:pPr algn="l">
-                        <a:lnSpc>
-                          <a:spcPct val="115000"/>
-                        </a:lnSpc>
-                      </a:pPr>
-                      <a:r>
-                        <a:rPr sz="1100" b="0">
-                          <a:solidFill>
-                            <a:srgbClr val="565C66"/>
-                          </a:solidFill>
-                          <a:latin typeface="Malgun Gothic"/>
-                          <a:ea typeface="Malgun Gothic"/>
-                          <a:cs typeface="Malgun Gothic"/>
-                        </a:rPr>
-                        <a:t>banking</a:t>
-                      </a:r>
-                    </a:p>
-                  </a:txBody>
-                  <a:tcPr marL="82296" marR="82296" marT="41148" marB="41148" anchor="ctr">
-                    <a:solidFill>
-                      <a:srgbClr val="F7F7F9"/>
-                    </a:solidFill>
-                  </a:tcPr>
-                </a:tc>
-                <a:tc>
-                  <a:txBody>
-                    <a:bodyPr wrap="square"/>
-                    <a:lstStyle/>
-                    <a:p>
-                      <a:pPr algn="r">
-                        <a:lnSpc>
-                          <a:spcPct val="115000"/>
-                        </a:lnSpc>
-                      </a:pPr>
-                      <a:r>
-                        <a:rPr sz="1050" b="0">
-                          <a:solidFill>
-                            <a:srgbClr val="565C66"/>
-                          </a:solidFill>
-                          <a:latin typeface="Malgun Gothic"/>
-                          <a:ea typeface="Malgun Gothic"/>
-                          <a:cs typeface="Malgun Gothic"/>
-                        </a:rPr>
-                        <a:t>0.0</a:t>
-                      </a:r>
-                    </a:p>
-                  </a:txBody>
-                  <a:tcPr marL="82296" marR="82296" marT="41148" marB="41148" anchor="ctr">
-                    <a:solidFill>
-                      <a:srgbClr val="F7F7F9"/>
-                    </a:solidFill>
-                  </a:tcPr>
-                </a:tc>
-                <a:tc>
-                  <a:txBody>
-                    <a:bodyPr wrap="square"/>
-                    <a:lstStyle/>
-                    <a:p>
-                      <a:pPr algn="r">
-                        <a:lnSpc>
-                          <a:spcPct val="115000"/>
-                        </a:lnSpc>
-                      </a:pPr>
-                      <a:r>
-                        <a:rPr sz="1050" b="0">
-                          <a:solidFill>
-                            <a:srgbClr val="565C66"/>
-                          </a:solidFill>
-                          <a:latin typeface="Malgun Gothic"/>
-                          <a:ea typeface="Malgun Gothic"/>
-                          <a:cs typeface="Malgun Gothic"/>
-                        </a:rPr>
-                        <a:t>0.0</a:t>
-                      </a:r>
-                    </a:p>
-                  </a:txBody>
-                  <a:tcPr marL="82296" marR="82296" marT="41148" marB="41148" anchor="ctr">
-                    <a:solidFill>
-                      <a:srgbClr val="F7F7F9"/>
-                    </a:solidFill>
-                  </a:tcPr>
-                </a:tc>
-                <a:tc>
-                  <a:txBody>
-                    <a:bodyPr wrap="square"/>
-                    <a:lstStyle/>
-                    <a:p>
-                      <a:pPr algn="ctr">
-                        <a:lnSpc>
-                          <a:spcPct val="115000"/>
-                        </a:lnSpc>
-                      </a:pPr>
-                      <a:r>
-                        <a:rPr sz="1050" b="1">
-                          <a:solidFill>
-                            <a:srgbClr val="2F6FCE"/>
-                          </a:solidFill>
-                          <a:latin typeface="Malgun Gothic"/>
-                          <a:ea typeface="Malgun Gothic"/>
-                          <a:cs typeface="Malgun Gothic"/>
-                        </a:rPr>
-                        <a:t>0 / 42</a:t>
-                      </a:r>
-                    </a:p>
-                  </a:txBody>
-                  <a:tcPr marL="82296" marR="82296" marT="41148" marB="41148" anchor="ctr">
-                    <a:solidFill>
-                      <a:srgbClr val="F7F7F9"/>
-                    </a:solidFill>
-                  </a:tcPr>
-                </a:tc>
-                <a:tc>
-                  <a:txBody>
-                    <a:bodyPr wrap="square"/>
-                    <a:lstStyle/>
-                    <a:p>
-                      <a:pPr algn="l">
-                        <a:lnSpc>
-                          <a:spcPct val="115000"/>
-                        </a:lnSpc>
-                      </a:pPr>
-                      <a:r>
-                        <a:rPr sz="1050" b="0">
-                          <a:solidFill>
-                            <a:srgbClr val="565C66"/>
-                          </a:solidFill>
-                          <a:latin typeface="Malgun Gothic"/>
-                          <a:ea typeface="Malgun Gothic"/>
-                          <a:cs typeface="Malgun Gothic"/>
-                        </a:rPr>
-                        <a:t>baseline부터 공격 실패, knockout도 새 leak 없음</a:t>
-                      </a:r>
-                    </a:p>
-                  </a:txBody>
-                  <a:tcPr marL="82296" marR="82296" marT="41148" marB="41148" anchor="ctr">
-                    <a:solidFill>
-                      <a:srgbClr val="F7F7F9"/>
-                    </a:solidFill>
-                  </a:tcPr>
-                </a:tc>
-              </a:tr>
-            </a:tbl>
-          </a:graphicData>
-        </a:graphic>
-      </p:graphicFrame>
-      <p:sp>
-        <p:nvSpPr>
-          <p:cNvPr id="7" name="Rounded Rectangle 6"/>
-          <p:cNvSpPr/>
-          <p:nvPr/>
-        </p:nvSpPr>
-        <p:spPr>
-          <a:xfrm>
-            <a:off x="640080" y="3840480"/>
-            <a:ext cx="10908792" cy="2103120"/>
+            <a:off x="640080" y="1691640"/>
+            <a:ext cx="10908792" cy="2331720"/>
           </a:xfrm>
           <a:prstGeom prst="roundRect">
             <a:avLst>
@@ -6809,14 +5959,14 @@
       </p:sp>
       <p:sp>
         <p:nvSpPr>
-          <p:cNvPr id="8" name="TextBox 7"/>
+          <p:cNvPr id="6" name="TextBox 5"/>
           <p:cNvSpPr txBox="1"/>
           <p:nvPr/>
         </p:nvSpPr>
         <p:spPr>
           <a:xfrm>
-            <a:off x="914400" y="4023360"/>
-            <a:ext cx="10360152" cy="1783080"/>
+            <a:off x="914400" y="1856232"/>
+            <a:ext cx="10360152" cy="2103120"/>
           </a:xfrm>
           <a:prstGeom prst="rect">
             <a:avLst/>
@@ -6835,248 +5985,125 @@
               </a:lnSpc>
             </a:pPr>
             <a:r>
-              <a:rPr sz="1200" b="0">
-                <a:solidFill>
-                  <a:srgbClr val="565C66"/>
+              <a:rPr sz="1350" b="1">
+                <a:solidFill>
+                  <a:srgbClr val="2F6FCE"/>
                 </a:solidFill>
                 <a:latin typeface="Malgun Gothic"/>
                 <a:ea typeface="Malgun Gothic"/>
                 <a:cs typeface="Malgun Gothic"/>
               </a:rPr>
-              <a:t>banking은 42쌍 전부 baseline부터 공격 실패라 "억제율" 틀이 안 맞음 → 판정 근거는 </a:t>
-            </a:r>
-            <a:r>
-              <a:rPr sz="1200" b="1">
-                <a:solidFill>
-                  <a:srgbClr val="16181D"/>
+              <a:t>실험 결과 요약</a:t>
+            </a:r>
+          </a:p>
+          <a:p>
+            <a:pPr algn="l">
+              <a:lnSpc>
+                <a:spcPct val="120000"/>
+              </a:lnSpc>
+              <a:spcBef>
+                <a:spcPts val="600"/>
+              </a:spcBef>
+            </a:pPr>
+            <a:r>
+              <a:rPr sz="1050" b="1">
+                <a:solidFill>
+                  <a:srgbClr val="2F6FCE"/>
                 </a:solidFill>
                 <a:latin typeface="Malgun Gothic"/>
                 <a:ea typeface="Malgun Gothic"/>
                 <a:cs typeface="Malgun Gothic"/>
               </a:rPr>
-              <a:t>backfire</a:t>
-            </a:r>
-            <a:r>
-              <a:rPr sz="1200" b="0">
-                <a:solidFill>
-                  <a:srgbClr val="565C66"/>
+              <a:t>·  </a:t>
+            </a:r>
+            <a:r>
+              <a:rPr sz="1050" b="1">
+                <a:solidFill>
+                  <a:srgbClr val="16181D"/>
                 </a:solidFill>
                 <a:latin typeface="Malgun Gothic"/>
                 <a:ea typeface="Malgun Gothic"/>
                 <a:cs typeface="Malgun Gothic"/>
               </a:rPr>
-              <a:t>: k0=False인데 knockout 후 kN=True로 뒤집힌 쌍이 있는지. </a:t>
-            </a:r>
-            <a:r>
-              <a:rPr sz="1200" b="1">
-                <a:solidFill>
-                  <a:srgbClr val="2F6FCE"/>
+              <a:t>파서</a:t>
+            </a:r>
+            <a:r>
+              <a:rPr sz="1050" b="0">
+                <a:solidFill>
+                  <a:srgbClr val="565C66"/>
                 </a:solidFill>
                 <a:latin typeface="Malgun Gothic"/>
                 <a:ea typeface="Malgun Gothic"/>
                 <a:cs typeface="Malgun Gothic"/>
               </a:rPr>
-              <a:t>0/42로 하나도 없음.</a:t>
+              <a:t> — confound 아님. banking/workspace 저조는 모델·suite 자체 성질. agentdojo_default 기본값 채택.</a:t>
             </a:r>
           </a:p>
           <a:p>
             <a:pPr algn="l">
               <a:lnSpc>
-                <a:spcPct val="125000"/>
+                <a:spcPct val="120000"/>
               </a:lnSpc>
               <a:spcBef>
-                <a:spcPts val="800"/>
+                <a:spcPts val="600"/>
               </a:spcBef>
             </a:pPr>
             <a:r>
-              <a:rPr sz="1200" b="0">
-                <a:solidFill>
-                  <a:srgbClr val="565C66"/>
+              <a:rPr sz="1050" b="1">
+                <a:solidFill>
+                  <a:srgbClr val="2F6FCE"/>
                 </a:solidFill>
                 <a:latin typeface="Malgun Gothic"/>
                 <a:ea typeface="Malgun Gothic"/>
                 <a:cs typeface="Malgun Gothic"/>
               </a:rPr>
-              <a:t>같은 스택에서 slack만 backfire 1건이 나왔던 것과 대비 → </a:t>
-            </a:r>
-            <a:r>
-              <a:rPr sz="1200" b="1">
-                <a:solidFill>
-                  <a:srgbClr val="C1442A"/>
+              <a:t>·  </a:t>
+            </a:r>
+            <a:r>
+              <a:rPr sz="1050" b="1">
+                <a:solidFill>
+                  <a:srgbClr val="16181D"/>
                 </a:solidFill>
                 <a:latin typeface="Malgun Gothic"/>
                 <a:ea typeface="Malgun Gothic"/>
                 <a:cs typeface="Malgun Gothic"/>
               </a:rPr>
-              <a:t>32B 스케일 효과는 slack에 국한, banking엔 전이 안 됨.</a:t>
-            </a:r>
-          </a:p>
-          <a:p>
-            <a:pPr algn="l">
-              <a:lnSpc>
-                <a:spcPct val="125000"/>
-              </a:lnSpc>
-              <a:spcBef>
-                <a:spcPts val="800"/>
-              </a:spcBef>
-            </a:pPr>
-            <a:r>
-              <a:rPr sz="1050" b="1">
-                <a:solidFill>
-                  <a:srgbClr val="8B9099"/>
+              <a:t>표본 확대 (n=148)</a:t>
+            </a:r>
+            <a:r>
+              <a:rPr sz="1050" b="0">
+                <a:solidFill>
+                  <a:srgbClr val="565C66"/>
                 </a:solidFill>
                 <a:latin typeface="Malgun Gothic"/>
                 <a:ea typeface="Malgun Gothic"/>
                 <a:cs typeface="Malgun Gothic"/>
               </a:rPr>
-              <a:t>⚠️ caveat</a:t>
-            </a:r>
-            <a:r>
-              <a:rPr sz="1050" b="0">
-                <a:solidFill>
-                  <a:srgbClr val="8B9099"/>
+              <a:t> — 스케일업 반례 재확정(전체 ASR 6.8%). 성공한 공격은 전부 단순 공격(injection_task 1/3/5) — 8B는 전량 억제, 32B만 절반 이상 persist.</a:t>
+            </a:r>
+          </a:p>
+          <a:p>
+            <a:pPr algn="l">
+              <a:lnSpc>
+                <a:spcPct val="120000"/>
+              </a:lnSpc>
+              <a:spcBef>
+                <a:spcPts val="600"/>
+              </a:spcBef>
+            </a:pPr>
+            <a:r>
+              <a:rPr sz="1050" b="1">
+                <a:solidFill>
+                  <a:srgbClr val="2F6FCE"/>
                 </a:solidFill>
                 <a:latin typeface="Malgun Gothic"/>
                 <a:ea typeface="Malgun Gothic"/>
                 <a:cs typeface="Malgun Gothic"/>
               </a:rPr>
-              <a:t>: 완주율 42/45(3쌍 원인불명 누락) · banking 자체가 baseline 성공률 낮은 suite.</a:t>
-            </a:r>
-          </a:p>
-        </p:txBody>
-      </p:sp>
-    </p:spTree>
-  </p:cSld>
-  <p:clrMapOvr>
-    <a:masterClrMapping/>
-  </p:clrMapOvr>
-</p:sld>
-</file>
-
-<file path=ppt/slides/slide14.xml><?xml version="1.0" encoding="utf-8"?>
-<p:sld xmlns:a="http://schemas.openxmlformats.org/drawingml/2006/main" xmlns:p="http://schemas.openxmlformats.org/presentationml/2006/main" xmlns:r="http://schemas.openxmlformats.org/officeDocument/2006/relationships">
-  <p:cSld>
-    <p:spTree>
-      <p:nvGrpSpPr>
-        <p:cNvPr id="1" name=""/>
-        <p:cNvGrpSpPr/>
-        <p:nvPr/>
-      </p:nvGrpSpPr>
-      <p:grpSpPr/>
-      <p:sp>
-        <p:nvSpPr>
-          <p:cNvPr id="2" name="Rectangle 1"/>
-          <p:cNvSpPr/>
-          <p:nvPr/>
-        </p:nvSpPr>
-        <p:spPr>
-          <a:xfrm>
-            <a:off x="0" y="0"/>
-            <a:ext cx="12188952" cy="6858000"/>
-          </a:xfrm>
-          <a:prstGeom prst="rect">
-            <a:avLst/>
-          </a:prstGeom>
-          <a:solidFill>
-            <a:srgbClr val="FFFFFF"/>
-          </a:solidFill>
-          <a:ln>
-            <a:noFill/>
-          </a:ln>
-          <a:effectLst/>
-        </p:spPr>
-        <p:style>
-          <a:lnRef idx="1">
-            <a:schemeClr val="accent1"/>
-          </a:lnRef>
-          <a:fillRef idx="3">
-            <a:schemeClr val="accent1"/>
-          </a:fillRef>
-          <a:effectRef idx="2">
-            <a:schemeClr val="accent1"/>
-          </a:effectRef>
-          <a:fontRef idx="minor">
-            <a:schemeClr val="lt1"/>
-          </a:fontRef>
-        </p:style>
-        <p:txBody>
-          <a:bodyPr rtlCol="0" anchor="ctr"/>
-          <a:lstStyle/>
-          <a:p>
-            <a:pPr algn="ctr"/>
-          </a:p>
-        </p:txBody>
-      </p:sp>
-      <p:sp>
-        <p:nvSpPr>
-          <p:cNvPr id="3" name="TextBox 2"/>
-          <p:cNvSpPr txBox="1"/>
-          <p:nvPr/>
-        </p:nvSpPr>
-        <p:spPr>
-          <a:xfrm>
-            <a:off x="640080" y="411480"/>
-            <a:ext cx="10908792" cy="365760"/>
-          </a:xfrm>
-          <a:prstGeom prst="rect">
-            <a:avLst/>
-          </a:prstGeom>
-          <a:noFill/>
-        </p:spPr>
-        <p:txBody>
-          <a:bodyPr wrap="square" lIns="0" rIns="0" tIns="0" bIns="0">
-            <a:spAutoFit/>
-          </a:bodyPr>
-          <a:lstStyle/>
-          <a:p>
-            <a:pPr algn="l">
-              <a:lnSpc>
-                <a:spcPct val="125000"/>
-              </a:lnSpc>
-            </a:pPr>
-            <a:r>
-              <a:rPr sz="1200" b="1">
-                <a:solidFill>
-                  <a:srgbClr val="C06A1F"/>
-                </a:solidFill>
-                <a:latin typeface="Consolas"/>
-                <a:ea typeface="Consolas"/>
-                <a:cs typeface="Consolas"/>
-              </a:rPr>
-              <a:t>07 · 한계</a:t>
-            </a:r>
-          </a:p>
-        </p:txBody>
-      </p:sp>
-      <p:sp>
-        <p:nvSpPr>
-          <p:cNvPr id="4" name="TextBox 3"/>
-          <p:cNvSpPr txBox="1"/>
-          <p:nvPr/>
-        </p:nvSpPr>
-        <p:spPr>
-          <a:xfrm>
-            <a:off x="640080" y="777240"/>
-            <a:ext cx="10908792" cy="822960"/>
-          </a:xfrm>
-          <a:prstGeom prst="rect">
-            <a:avLst/>
-          </a:prstGeom>
-          <a:noFill/>
-        </p:spPr>
-        <p:txBody>
-          <a:bodyPr wrap="square" lIns="0" rIns="0" tIns="0" bIns="0">
-            <a:spAutoFit/>
-          </a:bodyPr>
-          <a:lstStyle/>
-          <a:p>
-            <a:pPr algn="l">
-              <a:lnSpc>
-                <a:spcPct val="110000"/>
-              </a:lnSpc>
-            </a:pPr>
-            <a:r>
-              <a:rPr sz="2600" b="1">
+              <a:t>·  </a:t>
+            </a:r>
+            <a:r>
+              <a:rPr sz="1050" b="1">
                 <a:solidFill>
                   <a:srgbClr val="16181D"/>
                 </a:solidFill>
@@ -7084,933 +6111,31 @@
                 <a:ea typeface="Malgun Gothic"/>
                 <a:cs typeface="Malgun Gothic"/>
               </a:rPr>
-              <a:t>한계 및 다음 단계</a:t>
-            </a:r>
-          </a:p>
-        </p:txBody>
-      </p:sp>
-      <p:graphicFrame>
-        <p:nvGraphicFramePr>
-          <p:cNvPr id="5" name="Table 4"/>
-          <p:cNvGraphicFramePr>
-            <a:graphicFrameLocks noGrp="1"/>
-          </p:cNvGraphicFramePr>
-          <p:nvPr/>
-        </p:nvGraphicFramePr>
-        <p:xfrm>
-          <a:off x="640080" y="1691640"/>
-          <a:ext cx="10908792" cy="4297680"/>
-        </p:xfrm>
-        <a:graphic>
-          <a:graphicData uri="http://schemas.openxmlformats.org/drawingml/2006/table">
-            <a:tbl>
-              <a:tblPr bandRow="0">
-                <a:tableStyleId>{5C22544A-7EE6-4342-B048-85BDC9FD1C3A}</a:tableStyleId>
-              </a:tblPr>
-              <a:tblGrid>
-                <a:gridCol w="411480"/>
-                <a:gridCol w="6035040"/>
-                <a:gridCol w="4462272"/>
-              </a:tblGrid>
-              <a:tr h="347472">
-                <a:tc>
-                  <a:txBody>
-                    <a:bodyPr wrap="square"/>
-                    <a:lstStyle/>
-                    <a:p>
-                      <a:pPr algn="ctr">
-                        <a:lnSpc>
-                          <a:spcPct val="100000"/>
-                        </a:lnSpc>
-                      </a:pPr>
-                      <a:r>
-                        <a:rPr sz="1050" b="1">
-                          <a:solidFill>
-                            <a:srgbClr val="8B9099"/>
-                          </a:solidFill>
-                          <a:latin typeface="Malgun Gothic"/>
-                          <a:ea typeface="Malgun Gothic"/>
-                          <a:cs typeface="Malgun Gothic"/>
-                        </a:rPr>
-                        <a:t>#</a:t>
-                      </a:r>
-                    </a:p>
-                  </a:txBody>
-                  <a:tcPr marL="82296" marR="82296" marT="41148" marB="41148" anchor="ctr">
-                    <a:solidFill>
-                      <a:srgbClr val="E9EAED"/>
-                    </a:solidFill>
-                  </a:tcPr>
-                </a:tc>
-                <a:tc>
-                  <a:txBody>
-                    <a:bodyPr wrap="square"/>
-                    <a:lstStyle/>
-                    <a:p>
-                      <a:pPr algn="l">
-                        <a:lnSpc>
-                          <a:spcPct val="100000"/>
-                        </a:lnSpc>
-                      </a:pPr>
-                      <a:r>
-                        <a:rPr sz="1000" b="1">
-                          <a:solidFill>
-                            <a:srgbClr val="8B9099"/>
-                          </a:solidFill>
-                          <a:latin typeface="Malgun Gothic"/>
-                          <a:ea typeface="Malgun Gothic"/>
-                          <a:cs typeface="Malgun Gothic"/>
-                        </a:rPr>
-                        <a:t>한계</a:t>
-                      </a:r>
-                    </a:p>
-                  </a:txBody>
-                  <a:tcPr marL="82296" marR="82296" marT="41148" marB="41148" anchor="ctr">
-                    <a:solidFill>
-                      <a:srgbClr val="E9EAED"/>
-                    </a:solidFill>
-                  </a:tcPr>
-                </a:tc>
-                <a:tc>
-                  <a:txBody>
-                    <a:bodyPr wrap="square"/>
-                    <a:lstStyle/>
-                    <a:p>
-                      <a:pPr algn="l">
-                        <a:lnSpc>
-                          <a:spcPct val="100000"/>
-                        </a:lnSpc>
-                      </a:pPr>
-                      <a:r>
-                        <a:rPr sz="1000" b="1">
-                          <a:solidFill>
-                            <a:srgbClr val="8B9099"/>
-                          </a:solidFill>
-                          <a:latin typeface="Malgun Gothic"/>
-                          <a:ea typeface="Malgun Gothic"/>
-                          <a:cs typeface="Malgun Gothic"/>
-                        </a:rPr>
-                        <a:t>향후 방향</a:t>
-                      </a:r>
-                    </a:p>
-                  </a:txBody>
-                  <a:tcPr marL="82296" marR="82296" marT="41148" marB="41148" anchor="ctr">
-                    <a:solidFill>
-                      <a:srgbClr val="E9EAED"/>
-                    </a:solidFill>
-                  </a:tcPr>
-                </a:tc>
-              </a:tr>
-              <a:tr h="658368">
-                <a:tc>
-                  <a:txBody>
-                    <a:bodyPr wrap="square"/>
-                    <a:lstStyle/>
-                    <a:p>
-                      <a:pPr algn="ctr">
-                        <a:lnSpc>
-                          <a:spcPct val="115000"/>
-                        </a:lnSpc>
-                      </a:pPr>
-                      <a:r>
-                        <a:rPr sz="1050" b="0">
-                          <a:solidFill>
-                            <a:srgbClr val="565C66"/>
-                          </a:solidFill>
-                          <a:latin typeface="Malgun Gothic"/>
-                          <a:ea typeface="Malgun Gothic"/>
-                          <a:cs typeface="Malgun Gothic"/>
-                        </a:rPr>
-                        <a:t>1</a:t>
-                      </a:r>
-                    </a:p>
-                  </a:txBody>
-                  <a:tcPr marL="82296" marR="82296" marT="41148" marB="41148" anchor="ctr">
-                    <a:solidFill>
-                      <a:srgbClr val="FFFFFF"/>
-                    </a:solidFill>
-                  </a:tcPr>
-                </a:tc>
-                <a:tc>
-                  <a:txBody>
-                    <a:bodyPr wrap="square"/>
-                    <a:lstStyle/>
-                    <a:p>
-                      <a:pPr algn="l">
-                        <a:lnSpc>
-                          <a:spcPct val="115000"/>
-                        </a:lnSpc>
-                      </a:pPr>
-                      <a:r>
-                        <a:rPr sz="1000" b="1">
-                          <a:solidFill>
-                            <a:srgbClr val="C1442A"/>
-                          </a:solidFill>
-                          <a:latin typeface="Malgun Gothic"/>
-                          <a:ea typeface="Malgun Gothic"/>
-                          <a:cs typeface="Malgun Gothic"/>
-                        </a:rPr>
-                        <a:t>32B-4bit 평가의 run-to-run 비결정성</a:t>
-                      </a:r>
-                      <a:r>
-                        <a:rPr sz="1000" b="0">
-                          <a:solidFill>
-                            <a:srgbClr val="565C66"/>
-                          </a:solidFill>
-                          <a:latin typeface="Malgun Gothic"/>
-                          <a:ea typeface="Malgun Gothic"/>
-                          <a:cs typeface="Malgun Gothic"/>
-                        </a:rPr>
-                        <a:t> 원인 미규명(별개 이슈)</a:t>
-                      </a:r>
-                    </a:p>
-                  </a:txBody>
-                  <a:tcPr marL="82296" marR="82296" marT="41148" marB="41148" anchor="ctr">
-                    <a:solidFill>
-                      <a:srgbClr val="FFFFFF"/>
-                    </a:solidFill>
-                  </a:tcPr>
-                </a:tc>
-                <a:tc>
-                  <a:txBody>
-                    <a:bodyPr wrap="square"/>
-                    <a:lstStyle/>
-                    <a:p>
-                      <a:pPr algn="l">
-                        <a:lnSpc>
-                          <a:spcPct val="115000"/>
-                        </a:lnSpc>
-                      </a:pPr>
-                      <a:r>
-                        <a:rPr sz="1000" b="0">
-                          <a:solidFill>
-                            <a:srgbClr val="565C66"/>
-                          </a:solidFill>
-                          <a:latin typeface="Malgun Gothic"/>
-                          <a:ea typeface="Malgun Gothic"/>
-                          <a:cs typeface="Malgun Gothic"/>
-                        </a:rPr>
-                        <a:t>bnb 4bit 커널 / 디바이스 배치 조건 추가 조사</a:t>
-                      </a:r>
-                    </a:p>
-                  </a:txBody>
-                  <a:tcPr marL="82296" marR="82296" marT="41148" marB="41148" anchor="ctr">
-                    <a:solidFill>
-                      <a:srgbClr val="FFFFFF"/>
-                    </a:solidFill>
-                  </a:tcPr>
-                </a:tc>
-              </a:tr>
-              <a:tr h="658368">
-                <a:tc>
-                  <a:txBody>
-                    <a:bodyPr wrap="square"/>
-                    <a:lstStyle/>
-                    <a:p>
-                      <a:pPr algn="ctr">
-                        <a:lnSpc>
-                          <a:spcPct val="115000"/>
-                        </a:lnSpc>
-                      </a:pPr>
-                      <a:r>
-                        <a:rPr sz="1050" b="0">
-                          <a:solidFill>
-                            <a:srgbClr val="565C66"/>
-                          </a:solidFill>
-                          <a:latin typeface="Malgun Gothic"/>
-                          <a:ea typeface="Malgun Gothic"/>
-                          <a:cs typeface="Malgun Gothic"/>
-                        </a:rPr>
-                        <a:t>2</a:t>
-                      </a:r>
-                    </a:p>
-                  </a:txBody>
-                  <a:tcPr marL="82296" marR="82296" marT="41148" marB="41148" anchor="ctr">
-                    <a:solidFill>
-                      <a:srgbClr val="F7F7F9"/>
-                    </a:solidFill>
-                  </a:tcPr>
-                </a:tc>
-                <a:tc>
-                  <a:txBody>
-                    <a:bodyPr wrap="square"/>
-                    <a:lstStyle/>
-                    <a:p>
-                      <a:pPr algn="l">
-                        <a:lnSpc>
-                          <a:spcPct val="115000"/>
-                        </a:lnSpc>
-                      </a:pPr>
-                      <a:r>
-                        <a:rPr sz="1000" b="1">
-                          <a:solidFill>
-                            <a:srgbClr val="C1442A"/>
-                          </a:solidFill>
-                          <a:latin typeface="Malgun Gothic"/>
-                          <a:ea typeface="Malgun Gothic"/>
-                          <a:cs typeface="Malgun Gothic"/>
-                        </a:rPr>
-                        <a:t>slack knockout 불안정의 최종 원인</a:t>
-                      </a:r>
-                      <a:r>
-                        <a:rPr sz="1000" b="0">
-                          <a:solidFill>
-                            <a:srgbClr val="565C66"/>
-                          </a:solidFill>
-                          <a:latin typeface="Malgun Gothic"/>
-                          <a:ea typeface="Malgun Gothic"/>
-                          <a:cs typeface="Malgun Gothic"/>
-                        </a:rPr>
-                        <a:t> 이 "단순 공격의 실행 관성" 가설 수준</a:t>
-                      </a:r>
-                    </a:p>
-                  </a:txBody>
-                  <a:tcPr marL="82296" marR="82296" marT="41148" marB="41148" anchor="ctr">
-                    <a:solidFill>
-                      <a:srgbClr val="F7F7F9"/>
-                    </a:solidFill>
-                  </a:tcPr>
-                </a:tc>
-                <a:tc>
-                  <a:txBody>
-                    <a:bodyPr wrap="square"/>
-                    <a:lstStyle/>
-                    <a:p>
-                      <a:pPr algn="l">
-                        <a:lnSpc>
-                          <a:spcPct val="115000"/>
-                        </a:lnSpc>
-                      </a:pPr>
-                      <a:r>
-                        <a:rPr sz="1000" b="0">
-                          <a:solidFill>
-                            <a:srgbClr val="565C66"/>
-                          </a:solidFill>
-                          <a:latin typeface="Malgun Gothic"/>
-                          <a:ea typeface="Malgun Gothic"/>
-                          <a:cs typeface="Malgun Gothic"/>
-                        </a:rPr>
-                        <a:t>k-sweep(head 개수 ↑)으로 억제력 보강되는지 확인</a:t>
-                      </a:r>
-                    </a:p>
-                  </a:txBody>
-                  <a:tcPr marL="82296" marR="82296" marT="41148" marB="41148" anchor="ctr">
-                    <a:solidFill>
-                      <a:srgbClr val="F7F7F9"/>
-                    </a:solidFill>
-                  </a:tcPr>
-                </a:tc>
-              </a:tr>
-              <a:tr h="658368">
-                <a:tc>
-                  <a:txBody>
-                    <a:bodyPr wrap="square"/>
-                    <a:lstStyle/>
-                    <a:p>
-                      <a:pPr algn="ctr">
-                        <a:lnSpc>
-                          <a:spcPct val="115000"/>
-                        </a:lnSpc>
-                      </a:pPr>
-                      <a:r>
-                        <a:rPr sz="1050" b="0">
-                          <a:solidFill>
-                            <a:srgbClr val="565C66"/>
-                          </a:solidFill>
-                          <a:latin typeface="Malgun Gothic"/>
-                          <a:ea typeface="Malgun Gothic"/>
-                          <a:cs typeface="Malgun Gothic"/>
-                        </a:rPr>
-                        <a:t>3</a:t>
-                      </a:r>
-                    </a:p>
-                  </a:txBody>
-                  <a:tcPr marL="82296" marR="82296" marT="41148" marB="41148" anchor="ctr">
-                    <a:solidFill>
-                      <a:srgbClr val="FFFFFF"/>
-                    </a:solidFill>
-                  </a:tcPr>
-                </a:tc>
-                <a:tc>
-                  <a:txBody>
-                    <a:bodyPr wrap="square"/>
-                    <a:lstStyle/>
-                    <a:p>
-                      <a:pPr algn="l">
-                        <a:lnSpc>
-                          <a:spcPct val="115000"/>
-                        </a:lnSpc>
-                      </a:pPr>
-                      <a:r>
-                        <a:rPr sz="1000" b="1">
-                          <a:solidFill>
-                            <a:srgbClr val="C1442A"/>
-                          </a:solidFill>
-                          <a:latin typeface="Malgun Gothic"/>
-                          <a:ea typeface="Malgun Gothic"/>
-                          <a:cs typeface="Malgun Gothic"/>
-                        </a:rPr>
-                        <a:t>복합 공격(2/4)은 채점이 near-unwinnable</a:t>
-                      </a:r>
-                      <a:r>
-                        <a:rPr sz="1000" b="0">
-                          <a:solidFill>
-                            <a:srgbClr val="565C66"/>
-                          </a:solidFill>
-                          <a:latin typeface="Malgun Gothic"/>
-                          <a:ea typeface="Malgun Gothic"/>
-                          <a:cs typeface="Malgun Gothic"/>
-                        </a:rPr>
-                        <a:t> — knockout 효과 측정 축이 없음</a:t>
-                      </a:r>
-                    </a:p>
-                  </a:txBody>
-                  <a:tcPr marL="82296" marR="82296" marT="41148" marB="41148" anchor="ctr">
-                    <a:solidFill>
-                      <a:srgbClr val="FFFFFF"/>
-                    </a:solidFill>
-                  </a:tcPr>
-                </a:tc>
-                <a:tc>
-                  <a:txBody>
-                    <a:bodyPr wrap="square"/>
-                    <a:lstStyle/>
-                    <a:p>
-                      <a:pPr algn="l">
-                        <a:lnSpc>
-                          <a:spcPct val="115000"/>
-                        </a:lnSpc>
-                      </a:pPr>
-                      <a:r>
-                        <a:rPr sz="1000" b="0">
-                          <a:solidFill>
-                            <a:srgbClr val="565C66"/>
-                          </a:solidFill>
-                          <a:latin typeface="Malgun Gothic"/>
-                          <a:ea typeface="Malgun Gothic"/>
-                          <a:cs typeface="Malgun Gothic"/>
-                        </a:rPr>
-                        <a:t>AgentDojo 외 벤치마크 / 자체 시나리오로 다단계 채점 보완</a:t>
-                      </a:r>
-                    </a:p>
-                  </a:txBody>
-                  <a:tcPr marL="82296" marR="82296" marT="41148" marB="41148" anchor="ctr">
-                    <a:solidFill>
-                      <a:srgbClr val="FFFFFF"/>
-                    </a:solidFill>
-                  </a:tcPr>
-                </a:tc>
-              </a:tr>
-              <a:tr h="658368">
-                <a:tc>
-                  <a:txBody>
-                    <a:bodyPr wrap="square"/>
-                    <a:lstStyle/>
-                    <a:p>
-                      <a:pPr algn="ctr">
-                        <a:lnSpc>
-                          <a:spcPct val="115000"/>
-                        </a:lnSpc>
-                      </a:pPr>
-                      <a:r>
-                        <a:rPr sz="1050" b="0">
-                          <a:solidFill>
-                            <a:srgbClr val="565C66"/>
-                          </a:solidFill>
-                          <a:latin typeface="Malgun Gothic"/>
-                          <a:ea typeface="Malgun Gothic"/>
-                          <a:cs typeface="Malgun Gothic"/>
-                        </a:rPr>
-                        <a:t>4</a:t>
-                      </a:r>
-                    </a:p>
-                  </a:txBody>
-                  <a:tcPr marL="82296" marR="82296" marT="41148" marB="41148" anchor="ctr">
-                    <a:solidFill>
-                      <a:srgbClr val="F7F7F9"/>
-                    </a:solidFill>
-                  </a:tcPr>
-                </a:tc>
-                <a:tc>
-                  <a:txBody>
-                    <a:bodyPr wrap="square"/>
-                    <a:lstStyle/>
-                    <a:p>
-                      <a:pPr algn="l">
-                        <a:lnSpc>
-                          <a:spcPct val="115000"/>
-                        </a:lnSpc>
-                      </a:pPr>
-                      <a:r>
-                        <a:rPr sz="1000" b="1">
-                          <a:solidFill>
-                            <a:srgbClr val="C1442A"/>
-                          </a:solidFill>
-                          <a:latin typeface="Malgun Gothic"/>
-                          <a:ea typeface="Malgun Gothic"/>
-                          <a:cs typeface="Malgun Gothic"/>
-                        </a:rPr>
-                        <a:t>Llama-8B banking backfire 1건</a:t>
-                      </a:r>
-                      <a:r>
-                        <a:rPr sz="1000" b="0">
-                          <a:solidFill>
-                            <a:srgbClr val="565C66"/>
-                          </a:solidFill>
-                          <a:latin typeface="Malgun Gothic"/>
-                          <a:ea typeface="Malgun Gothic"/>
-                          <a:cs typeface="Malgun Gothic"/>
-                        </a:rPr>
-                        <a:t> (표본 1건) 미확인</a:t>
-                      </a:r>
-                    </a:p>
-                  </a:txBody>
-                  <a:tcPr marL="82296" marR="82296" marT="41148" marB="41148" anchor="ctr">
-                    <a:solidFill>
-                      <a:srgbClr val="F7F7F9"/>
-                    </a:solidFill>
-                  </a:tcPr>
-                </a:tc>
-                <a:tc>
-                  <a:txBody>
-                    <a:bodyPr wrap="square"/>
-                    <a:lstStyle/>
-                    <a:p>
-                      <a:pPr algn="l">
-                        <a:lnSpc>
-                          <a:spcPct val="115000"/>
-                        </a:lnSpc>
-                      </a:pPr>
-                      <a:r>
-                        <a:rPr sz="1000" b="0">
-                          <a:solidFill>
-                            <a:srgbClr val="565C66"/>
-                          </a:solidFill>
-                          <a:latin typeface="Malgun Gothic"/>
-                          <a:ea typeface="Malgun Gothic"/>
-                          <a:cs typeface="Malgun Gothic"/>
-                        </a:rPr>
-                        <a:t>필요 시 Llama도 n=148급 확대</a:t>
-                      </a:r>
-                    </a:p>
-                  </a:txBody>
-                  <a:tcPr marL="82296" marR="82296" marT="41148" marB="41148" anchor="ctr">
-                    <a:solidFill>
-                      <a:srgbClr val="F7F7F9"/>
-                    </a:solidFill>
-                  </a:tcPr>
-                </a:tc>
-              </a:tr>
-              <a:tr h="658368">
-                <a:tc>
-                  <a:txBody>
-                    <a:bodyPr wrap="square"/>
-                    <a:lstStyle/>
-                    <a:p>
-                      <a:pPr algn="ctr">
-                        <a:lnSpc>
-                          <a:spcPct val="115000"/>
-                        </a:lnSpc>
-                      </a:pPr>
-                      <a:r>
-                        <a:rPr sz="1050" b="0">
-                          <a:solidFill>
-                            <a:srgbClr val="565C66"/>
-                          </a:solidFill>
-                          <a:latin typeface="Malgun Gothic"/>
-                          <a:ea typeface="Malgun Gothic"/>
-                          <a:cs typeface="Malgun Gothic"/>
-                        </a:rPr>
-                        <a:t>5</a:t>
-                      </a:r>
-                    </a:p>
-                  </a:txBody>
-                  <a:tcPr marL="82296" marR="82296" marT="41148" marB="41148" anchor="ctr">
-                    <a:solidFill>
-                      <a:srgbClr val="FFFFFF"/>
-                    </a:solidFill>
-                  </a:tcPr>
-                </a:tc>
-                <a:tc>
-                  <a:txBody>
-                    <a:bodyPr wrap="square"/>
-                    <a:lstStyle/>
-                    <a:p>
-                      <a:pPr algn="l">
-                        <a:lnSpc>
-                          <a:spcPct val="115000"/>
-                        </a:lnSpc>
-                      </a:pPr>
-                      <a:r>
-                        <a:rPr sz="1000" b="0">
-                          <a:solidFill>
-                            <a:srgbClr val="565C66"/>
-                          </a:solidFill>
-                          <a:latin typeface="Malgun Gothic"/>
-                          <a:ea typeface="Malgun Gothic"/>
-                          <a:cs typeface="Malgun Gothic"/>
-                        </a:rPr>
-                        <a:t>다른 아키텍처(Qwen3, Llama-70B) 교차검증 보류 중</a:t>
-                      </a:r>
-                    </a:p>
-                  </a:txBody>
-                  <a:tcPr marL="82296" marR="82296" marT="41148" marB="41148" anchor="ctr">
-                    <a:solidFill>
-                      <a:srgbClr val="FFFFFF"/>
-                    </a:solidFill>
-                  </a:tcPr>
-                </a:tc>
-                <a:tc>
-                  <a:txBody>
-                    <a:bodyPr wrap="square"/>
-                    <a:lstStyle/>
-                    <a:p>
-                      <a:pPr algn="l">
-                        <a:lnSpc>
-                          <a:spcPct val="115000"/>
-                        </a:lnSpc>
-                      </a:pPr>
-                      <a:r>
-                        <a:rPr sz="1000" b="0">
-                          <a:solidFill>
-                            <a:srgbClr val="565C66"/>
-                          </a:solidFill>
-                          <a:latin typeface="Malgun Gothic"/>
-                          <a:ea typeface="Malgun Gothic"/>
-                          <a:cs typeface="Malgun Gothic"/>
-                        </a:rPr>
-                        <a:t>다음 사이클 후보</a:t>
-                      </a:r>
-                    </a:p>
-                  </a:txBody>
-                  <a:tcPr marL="82296" marR="82296" marT="41148" marB="41148" anchor="ctr">
-                    <a:solidFill>
-                      <a:srgbClr val="FFFFFF"/>
-                    </a:solidFill>
-                  </a:tcPr>
-                </a:tc>
-              </a:tr>
-              <a:tr h="658368">
-                <a:tc>
-                  <a:txBody>
-                    <a:bodyPr wrap="square"/>
-                    <a:lstStyle/>
-                    <a:p>
-                      <a:pPr algn="ctr">
-                        <a:lnSpc>
-                          <a:spcPct val="115000"/>
-                        </a:lnSpc>
-                      </a:pPr>
-                      <a:r>
-                        <a:rPr sz="1050" b="0">
-                          <a:solidFill>
-                            <a:srgbClr val="565C66"/>
-                          </a:solidFill>
-                          <a:latin typeface="Malgun Gothic"/>
-                          <a:ea typeface="Malgun Gothic"/>
-                          <a:cs typeface="Malgun Gothic"/>
-                        </a:rPr>
-                        <a:t>6</a:t>
-                      </a:r>
-                    </a:p>
-                  </a:txBody>
-                  <a:tcPr marL="82296" marR="82296" marT="41148" marB="41148" anchor="ctr">
-                    <a:solidFill>
-                      <a:srgbClr val="F7F7F9"/>
-                    </a:solidFill>
-                  </a:tcPr>
-                </a:tc>
-                <a:tc>
-                  <a:txBody>
-                    <a:bodyPr wrap="square"/>
-                    <a:lstStyle/>
-                    <a:p>
-                      <a:pPr algn="l">
-                        <a:lnSpc>
-                          <a:spcPct val="115000"/>
-                        </a:lnSpc>
-                      </a:pPr>
-                      <a:r>
-                        <a:rPr sz="1000" b="1">
-                          <a:solidFill>
-                            <a:srgbClr val="C1442A"/>
-                          </a:solidFill>
-                          <a:latin typeface="Malgun Gothic"/>
-                          <a:ea typeface="Malgun Gothic"/>
-                          <a:cs typeface="Malgun Gothic"/>
-                        </a:rPr>
-                        <a:t>banking 대조 검증력 약함</a:t>
-                      </a:r>
-                      <a:r>
-                        <a:rPr sz="1000" b="0">
-                          <a:solidFill>
-                            <a:srgbClr val="565C66"/>
-                          </a:solidFill>
-                          <a:latin typeface="Malgun Gothic"/>
-                          <a:ea typeface="Malgun Gothic"/>
-                          <a:cs typeface="Malgun Gothic"/>
-                        </a:rPr>
-                        <a:t> (baseline 성공 0/42) + 완주율 93.3%(로그 미보존)</a:t>
-                      </a:r>
-                    </a:p>
-                  </a:txBody>
-                  <a:tcPr marL="82296" marR="82296" marT="41148" marB="41148" anchor="ctr">
-                    <a:solidFill>
-                      <a:srgbClr val="F7F7F9"/>
-                    </a:solidFill>
-                  </a:tcPr>
-                </a:tc>
-                <a:tc>
-                  <a:txBody>
-                    <a:bodyPr wrap="square"/>
-                    <a:lstStyle/>
-                    <a:p>
-                      <a:pPr algn="l">
-                        <a:lnSpc>
-                          <a:spcPct val="115000"/>
-                        </a:lnSpc>
-                      </a:pPr>
-                      <a:r>
-                        <a:rPr sz="1000" b="0">
-                          <a:solidFill>
-                            <a:srgbClr val="565C66"/>
-                          </a:solidFill>
-                          <a:latin typeface="Malgun Gothic"/>
-                          <a:ea typeface="Malgun Gothic"/>
-                          <a:cs typeface="Malgun Gothic"/>
-                        </a:rPr>
-                        <a:t>k-sweep으로 banking 성공률 ↑ 후 재검증 / 재실행 시 로그 보존</a:t>
-                      </a:r>
-                    </a:p>
-                  </a:txBody>
-                  <a:tcPr marL="82296" marR="82296" marT="41148" marB="41148" anchor="ctr">
-                    <a:solidFill>
-                      <a:srgbClr val="F7F7F9"/>
-                    </a:solidFill>
-                  </a:tcPr>
-                </a:tc>
-              </a:tr>
-            </a:tbl>
-          </a:graphicData>
-        </a:graphic>
-      </p:graphicFrame>
-    </p:spTree>
-  </p:cSld>
-  <p:clrMapOvr>
-    <a:masterClrMapping/>
-  </p:clrMapOvr>
-</p:sld>
-</file>
-
-<file path=ppt/slides/slide15.xml><?xml version="1.0" encoding="utf-8"?>
-<p:sld xmlns:a="http://schemas.openxmlformats.org/drawingml/2006/main" xmlns:p="http://schemas.openxmlformats.org/presentationml/2006/main" xmlns:r="http://schemas.openxmlformats.org/officeDocument/2006/relationships">
-  <p:cSld>
-    <p:spTree>
-      <p:nvGrpSpPr>
-        <p:cNvPr id="1" name=""/>
-        <p:cNvGrpSpPr/>
-        <p:nvPr/>
-      </p:nvGrpSpPr>
-      <p:grpSpPr/>
-      <p:sp>
-        <p:nvSpPr>
-          <p:cNvPr id="2" name="Rectangle 1"/>
-          <p:cNvSpPr/>
-          <p:nvPr/>
-        </p:nvSpPr>
-        <p:spPr>
-          <a:xfrm>
-            <a:off x="0" y="0"/>
-            <a:ext cx="12188952" cy="6858000"/>
-          </a:xfrm>
-          <a:prstGeom prst="rect">
-            <a:avLst/>
-          </a:prstGeom>
-          <a:solidFill>
-            <a:srgbClr val="FFFFFF"/>
-          </a:solidFill>
-          <a:ln>
-            <a:noFill/>
-          </a:ln>
-          <a:effectLst/>
-        </p:spPr>
-        <p:style>
-          <a:lnRef idx="1">
-            <a:schemeClr val="accent1"/>
-          </a:lnRef>
-          <a:fillRef idx="3">
-            <a:schemeClr val="accent1"/>
-          </a:fillRef>
-          <a:effectRef idx="2">
-            <a:schemeClr val="accent1"/>
-          </a:effectRef>
-          <a:fontRef idx="minor">
-            <a:schemeClr val="lt1"/>
-          </a:fontRef>
-        </p:style>
-        <p:txBody>
-          <a:bodyPr rtlCol="0" anchor="ctr"/>
-          <a:lstStyle/>
-          <a:p>
-            <a:pPr algn="ctr"/>
-          </a:p>
-        </p:txBody>
-      </p:sp>
-      <p:sp>
-        <p:nvSpPr>
-          <p:cNvPr id="3" name="TextBox 2"/>
-          <p:cNvSpPr txBox="1"/>
-          <p:nvPr/>
-        </p:nvSpPr>
-        <p:spPr>
-          <a:xfrm>
-            <a:off x="640080" y="411480"/>
-            <a:ext cx="10908792" cy="365760"/>
-          </a:xfrm>
-          <a:prstGeom prst="rect">
-            <a:avLst/>
-          </a:prstGeom>
-          <a:noFill/>
-        </p:spPr>
-        <p:txBody>
-          <a:bodyPr wrap="square" lIns="0" rIns="0" tIns="0" bIns="0">
-            <a:spAutoFit/>
-          </a:bodyPr>
-          <a:lstStyle/>
-          <a:p>
-            <a:pPr algn="l">
-              <a:lnSpc>
-                <a:spcPct val="125000"/>
-              </a:lnSpc>
-            </a:pPr>
-            <a:r>
-              <a:rPr sz="1200" b="1">
-                <a:solidFill>
-                  <a:srgbClr val="C06A1F"/>
-                </a:solidFill>
-                <a:latin typeface="Consolas"/>
-                <a:ea typeface="Consolas"/>
-                <a:cs typeface="Consolas"/>
-              </a:rPr>
-              <a:t>08 · 마무리</a:t>
-            </a:r>
-          </a:p>
-        </p:txBody>
-      </p:sp>
-      <p:sp>
-        <p:nvSpPr>
-          <p:cNvPr id="4" name="TextBox 3"/>
-          <p:cNvSpPr txBox="1"/>
-          <p:nvPr/>
-        </p:nvSpPr>
-        <p:spPr>
-          <a:xfrm>
-            <a:off x="640080" y="777240"/>
-            <a:ext cx="10908792" cy="822960"/>
-          </a:xfrm>
-          <a:prstGeom prst="rect">
-            <a:avLst/>
-          </a:prstGeom>
-          <a:noFill/>
-        </p:spPr>
-        <p:txBody>
-          <a:bodyPr wrap="square" lIns="0" rIns="0" tIns="0" bIns="0">
-            <a:spAutoFit/>
-          </a:bodyPr>
-          <a:lstStyle/>
-          <a:p>
-            <a:pPr algn="l">
-              <a:lnSpc>
-                <a:spcPct val="110000"/>
-              </a:lnSpc>
-            </a:pPr>
-            <a:r>
-              <a:rPr sz="2600" b="1">
-                <a:solidFill>
-                  <a:srgbClr val="16181D"/>
+              <a:t>양자화</a:t>
+            </a:r>
+            <a:r>
+              <a:rPr sz="1050" b="0">
+                <a:solidFill>
+                  <a:srgbClr val="565C66"/>
                 </a:solidFill>
                 <a:latin typeface="Malgun Gothic"/>
                 <a:ea typeface="Malgun Gothic"/>
                 <a:cs typeface="Malgun Gothic"/>
               </a:rPr>
-              <a:t>마무리</a:t>
-            </a:r>
-          </a:p>
-        </p:txBody>
-      </p:sp>
-      <p:sp>
-        <p:nvSpPr>
-          <p:cNvPr id="5" name="Rounded Rectangle 4"/>
-          <p:cNvSpPr/>
-          <p:nvPr/>
-        </p:nvSpPr>
-        <p:spPr>
-          <a:xfrm>
-            <a:off x="640080" y="1691640"/>
-            <a:ext cx="3453414" cy="1783080"/>
-          </a:xfrm>
-          <a:prstGeom prst="roundRect">
-            <a:avLst>
-              <a:gd name="adj" fmla="val 9000"/>
-            </a:avLst>
-          </a:prstGeom>
-          <a:solidFill>
-            <a:srgbClr val="F2F2F4"/>
-          </a:solidFill>
-          <a:ln>
-            <a:noFill/>
-          </a:ln>
-          <a:effectLst/>
-        </p:spPr>
-        <p:style>
-          <a:lnRef idx="1">
-            <a:schemeClr val="accent1"/>
-          </a:lnRef>
-          <a:fillRef idx="3">
-            <a:schemeClr val="accent1"/>
-          </a:fillRef>
-          <a:effectRef idx="2">
-            <a:schemeClr val="accent1"/>
-          </a:effectRef>
-          <a:fontRef idx="minor">
-            <a:schemeClr val="lt1"/>
-          </a:fontRef>
-        </p:style>
-        <p:txBody>
-          <a:bodyPr rtlCol="0" anchor="ctr"/>
-          <a:lstStyle/>
-          <a:p/>
-        </p:txBody>
-      </p:sp>
-      <p:sp>
-        <p:nvSpPr>
-          <p:cNvPr id="6" name="TextBox 5"/>
-          <p:cNvSpPr txBox="1"/>
-          <p:nvPr/>
-        </p:nvSpPr>
-        <p:spPr>
-          <a:xfrm>
-            <a:off x="859536" y="1874519"/>
-            <a:ext cx="3014502" cy="1508760"/>
-          </a:xfrm>
-          <a:prstGeom prst="rect">
-            <a:avLst/>
-          </a:prstGeom>
-          <a:noFill/>
-        </p:spPr>
-        <p:txBody>
-          <a:bodyPr wrap="square" lIns="0" rIns="0" tIns="0" bIns="0">
-            <a:spAutoFit/>
-          </a:bodyPr>
-          <a:lstStyle/>
+              <a:t> — fp4 아티팩트 확정(nf4+dq로 해소·기본값 교체). 32B 스케일 효과 약하게 확정 — bf16 단독에서도 slack knockout 불완전 + backfire 1.</a:t>
+            </a:r>
+          </a:p>
           <a:p>
             <a:pPr algn="l">
               <a:lnSpc>
-                <a:spcPct val="125000"/>
+                <a:spcPct val="120000"/>
               </a:lnSpc>
+              <a:spcBef>
+                <a:spcPts val="600"/>
+              </a:spcBef>
             </a:pPr>
             <a:r>
-              <a:rPr sz="1300" b="1">
+              <a:rPr sz="1050" b="1">
                 <a:solidFill>
                   <a:srgbClr val="2F6FCE"/>
                 </a:solidFill>
@@ -8018,28 +6143,18 @@
                 <a:ea typeface="Malgun Gothic"/>
                 <a:cs typeface="Malgun Gothic"/>
               </a:rPr>
-              <a:t>파서 전환</a:t>
-            </a:r>
-          </a:p>
-          <a:p>
-            <a:pPr algn="l">
-              <a:lnSpc>
-                <a:spcPct val="122000"/>
-              </a:lnSpc>
-              <a:spcBef>
-                <a:spcPts val="700"/>
-              </a:spcBef>
-            </a:pPr>
-            <a:r>
-              <a:rPr sz="1050" b="0">
-                <a:solidFill>
-                  <a:srgbClr val="2F6FCE"/>
+              <a:t>·  </a:t>
+            </a:r>
+            <a:r>
+              <a:rPr sz="1050" b="1">
+                <a:solidFill>
+                  <a:srgbClr val="16181D"/>
                 </a:solidFill>
                 <a:latin typeface="Malgun Gothic"/>
                 <a:ea typeface="Malgun Gothic"/>
                 <a:cs typeface="Malgun Gothic"/>
               </a:rPr>
-              <a:t>·  </a:t>
+              <a:t>대조 (32B bf16 banking)</a:t>
             </a:r>
             <a:r>
               <a:rPr sz="1050" b="0">
@@ -8050,20 +6165,20 @@
                 <a:ea typeface="Malgun Gothic"/>
                 <a:cs typeface="Malgun Gothic"/>
               </a:rPr>
-              <a:t>confound 아니었음</a:t>
+              <a:t> — backfire 0/42 → 스케일 취약은 slack에만 국한.</a:t>
             </a:r>
           </a:p>
           <a:p>
             <a:pPr algn="l">
               <a:lnSpc>
-                <a:spcPct val="122000"/>
+                <a:spcPct val="120000"/>
               </a:lnSpc>
               <a:spcBef>
-                <a:spcPts val="700"/>
+                <a:spcPts val="600"/>
               </a:spcBef>
             </a:pPr>
             <a:r>
-              <a:rPr sz="1050" b="0">
+              <a:rPr sz="1050" b="1">
                 <a:solidFill>
                   <a:srgbClr val="2F6FCE"/>
                 </a:solidFill>
@@ -8074,15 +6189,26 @@
               <a:t>·  </a:t>
             </a:r>
             <a:r>
-              <a:rPr sz="1050" b="0">
-                <a:solidFill>
-                  <a:srgbClr val="565C66"/>
+              <a:rPr sz="1050" b="1">
+                <a:solidFill>
+                  <a:srgbClr val="C1442A"/>
                 </a:solidFill>
                 <a:latin typeface="Malgun Gothic"/>
                 <a:ea typeface="Malgun Gothic"/>
                 <a:cs typeface="Malgun Gothic"/>
               </a:rPr>
-              <a:t>agentdojo_default 기본값 채택</a:t>
+              <a:t>순효과는 끝까지 방어적</a:t>
+            </a:r>
+            <a:r>
+              <a:rPr sz="1050" b="0">
+                <a:solidFill>
+                  <a:srgbClr val="565C66"/>
+                </a:solidFill>
+                <a:latin typeface="Malgun Gothic"/>
+                <a:ea typeface="Malgun Gothic"/>
+                <a:cs typeface="Malgun Gothic"/>
+              </a:rPr>
+              <a:t> (suppressed 5 &gt; backfire 1) — "못 막는다"가 아니라 "특정 suite의 단순 공격에서만, 가끔 불완전 + backfire".</a:t>
             </a:r>
           </a:p>
         </p:txBody>
@@ -8095,8 +6221,8 @@
         </p:nvSpPr>
         <p:spPr>
           <a:xfrm>
-            <a:off x="4367814" y="1691640"/>
-            <a:ext cx="3453414" cy="1783080"/>
+            <a:off x="640080" y="4206240"/>
+            <a:ext cx="10908792" cy="1965960"/>
           </a:xfrm>
           <a:prstGeom prst="roundRect">
             <a:avLst>
@@ -8139,8 +6265,8 @@
         </p:nvSpPr>
         <p:spPr>
           <a:xfrm>
-            <a:off x="4587270" y="1874519"/>
-            <a:ext cx="3014502" cy="1508760"/>
+            <a:off x="914400" y="4370832"/>
+            <a:ext cx="10360152" cy="1691640"/>
           </a:xfrm>
           <a:prstGeom prst="rect">
             <a:avLst/>
@@ -8159,408 +6285,25 @@
               </a:lnSpc>
             </a:pPr>
             <a:r>
-              <a:rPr sz="1300" b="1">
-                <a:solidFill>
-                  <a:srgbClr val="2F6FCE"/>
+              <a:rPr sz="1350" b="1">
+                <a:solidFill>
+                  <a:srgbClr val="C06A1F"/>
                 </a:solidFill>
                 <a:latin typeface="Malgun Gothic"/>
                 <a:ea typeface="Malgun Gothic"/>
                 <a:cs typeface="Malgun Gothic"/>
               </a:rPr>
-              <a:t>표본 확대 (n=148)</a:t>
-            </a:r>
-          </a:p>
-          <a:p>
-            <a:pPr algn="l">
-              <a:lnSpc>
-                <a:spcPct val="122000"/>
-              </a:lnSpc>
-              <a:spcBef>
-                <a:spcPts val="700"/>
-              </a:spcBef>
-            </a:pPr>
-            <a:r>
-              <a:rPr sz="1050" b="0">
-                <a:solidFill>
-                  <a:srgbClr val="2F6FCE"/>
-                </a:solidFill>
-                <a:latin typeface="Malgun Gothic"/>
-                <a:ea typeface="Malgun Gothic"/>
-                <a:cs typeface="Malgun Gothic"/>
-              </a:rPr>
-              <a:t>·  </a:t>
-            </a:r>
-            <a:r>
-              <a:rPr sz="1050" b="0">
-                <a:solidFill>
-                  <a:srgbClr val="565C66"/>
-                </a:solidFill>
-                <a:latin typeface="Malgun Gothic"/>
-                <a:ea typeface="Malgun Gothic"/>
-                <a:cs typeface="Malgun Gothic"/>
-              </a:rPr>
-              <a:t>스케일업 반례 최종 확정</a:t>
-            </a:r>
-          </a:p>
-          <a:p>
-            <a:pPr algn="l">
-              <a:lnSpc>
-                <a:spcPct val="122000"/>
-              </a:lnSpc>
-              <a:spcBef>
-                <a:spcPts val="700"/>
-              </a:spcBef>
-            </a:pPr>
-            <a:r>
-              <a:rPr sz="1050" b="0">
-                <a:solidFill>
-                  <a:srgbClr val="2F6FCE"/>
-                </a:solidFill>
-                <a:latin typeface="Malgun Gothic"/>
-                <a:ea typeface="Malgun Gothic"/>
-                <a:cs typeface="Malgun Gothic"/>
-              </a:rPr>
-              <a:t>·  </a:t>
-            </a:r>
-            <a:r>
-              <a:rPr sz="1050" b="0">
-                <a:solidFill>
-                  <a:srgbClr val="565C66"/>
-                </a:solidFill>
-                <a:latin typeface="Malgun Gothic"/>
-                <a:ea typeface="Malgun Gothic"/>
-                <a:cs typeface="Malgun Gothic"/>
-              </a:rPr>
-              <a:t>성공 공격은 전부 단순(1/3/5), 8B 전량 억제 / 32B만 절반 통과</a:t>
-            </a:r>
-          </a:p>
-        </p:txBody>
-      </p:sp>
-      <p:sp>
-        <p:nvSpPr>
-          <p:cNvPr id="9" name="Rounded Rectangle 8"/>
-          <p:cNvSpPr/>
-          <p:nvPr/>
-        </p:nvSpPr>
-        <p:spPr>
-          <a:xfrm>
-            <a:off x="8095548" y="1691640"/>
-            <a:ext cx="3453414" cy="1783080"/>
-          </a:xfrm>
-          <a:prstGeom prst="roundRect">
-            <a:avLst>
-              <a:gd name="adj" fmla="val 9000"/>
-            </a:avLst>
-          </a:prstGeom>
-          <a:solidFill>
-            <a:srgbClr val="F2F2F4"/>
-          </a:solidFill>
-          <a:ln>
-            <a:noFill/>
-          </a:ln>
-          <a:effectLst/>
-        </p:spPr>
-        <p:style>
-          <a:lnRef idx="1">
-            <a:schemeClr val="accent1"/>
-          </a:lnRef>
-          <a:fillRef idx="3">
-            <a:schemeClr val="accent1"/>
-          </a:fillRef>
-          <a:effectRef idx="2">
-            <a:schemeClr val="accent1"/>
-          </a:effectRef>
-          <a:fontRef idx="minor">
-            <a:schemeClr val="lt1"/>
-          </a:fontRef>
-        </p:style>
-        <p:txBody>
-          <a:bodyPr rtlCol="0" anchor="ctr"/>
-          <a:lstStyle/>
-          <a:p/>
-        </p:txBody>
-      </p:sp>
-      <p:sp>
-        <p:nvSpPr>
-          <p:cNvPr id="10" name="TextBox 9"/>
-          <p:cNvSpPr txBox="1"/>
-          <p:nvPr/>
-        </p:nvSpPr>
-        <p:spPr>
-          <a:xfrm>
-            <a:off x="8315004" y="1874519"/>
-            <a:ext cx="3014502" cy="1508760"/>
-          </a:xfrm>
-          <a:prstGeom prst="rect">
-            <a:avLst/>
-          </a:prstGeom>
-          <a:noFill/>
-        </p:spPr>
-        <p:txBody>
-          <a:bodyPr wrap="square" lIns="0" rIns="0" tIns="0" bIns="0">
-            <a:spAutoFit/>
-          </a:bodyPr>
-          <a:lstStyle/>
-          <a:p>
-            <a:pPr algn="l">
-              <a:lnSpc>
-                <a:spcPct val="125000"/>
-              </a:lnSpc>
-            </a:pPr>
-            <a:r>
-              <a:rPr sz="1300" b="1">
-                <a:solidFill>
-                  <a:srgbClr val="C06A1F"/>
-                </a:solidFill>
-                <a:latin typeface="Malgun Gothic"/>
-                <a:ea typeface="Malgun Gothic"/>
-                <a:cs typeface="Malgun Gothic"/>
-              </a:rPr>
-              <a:t>양자화 규명</a:t>
-            </a:r>
-          </a:p>
-          <a:p>
-            <a:pPr algn="l">
-              <a:lnSpc>
-                <a:spcPct val="122000"/>
-              </a:lnSpc>
-              <a:spcBef>
-                <a:spcPts val="700"/>
-              </a:spcBef>
-            </a:pPr>
-            <a:r>
-              <a:rPr sz="1050" b="0">
-                <a:solidFill>
-                  <a:srgbClr val="C06A1F"/>
-                </a:solidFill>
-                <a:latin typeface="Malgun Gothic"/>
-                <a:ea typeface="Malgun Gothic"/>
-                <a:cs typeface="Malgun Gothic"/>
-              </a:rPr>
-              <a:t>·  </a:t>
-            </a:r>
-            <a:r>
-              <a:rPr sz="1050" b="0">
-                <a:solidFill>
-                  <a:srgbClr val="565C66"/>
-                </a:solidFill>
-                <a:latin typeface="Malgun Gothic"/>
-                <a:ea typeface="Malgun Gothic"/>
-                <a:cs typeface="Malgun Gothic"/>
-              </a:rPr>
-              <a:t>fp4 아티팩트 확정(기본값 교체)</a:t>
-            </a:r>
-          </a:p>
-          <a:p>
-            <a:pPr algn="l">
-              <a:lnSpc>
-                <a:spcPct val="122000"/>
-              </a:lnSpc>
-              <a:spcBef>
-                <a:spcPts val="700"/>
-              </a:spcBef>
-            </a:pPr>
-            <a:r>
-              <a:rPr sz="1050" b="0">
-                <a:solidFill>
-                  <a:srgbClr val="C06A1F"/>
-                </a:solidFill>
-                <a:latin typeface="Malgun Gothic"/>
-                <a:ea typeface="Malgun Gothic"/>
-                <a:cs typeface="Malgun Gothic"/>
-              </a:rPr>
-              <a:t>·  </a:t>
-            </a:r>
-            <a:r>
-              <a:rPr sz="1050" b="0">
-                <a:solidFill>
-                  <a:srgbClr val="565C66"/>
-                </a:solidFill>
-                <a:latin typeface="Malgun Gothic"/>
-                <a:ea typeface="Malgun Gothic"/>
-                <a:cs typeface="Malgun Gothic"/>
-              </a:rPr>
-              <a:t>+ 32B 스케일 효과 확정, 순효과는 방어적</a:t>
-            </a:r>
-          </a:p>
-        </p:txBody>
-      </p:sp>
-      <p:sp>
-        <p:nvSpPr>
-          <p:cNvPr id="11" name="Rounded Rectangle 10"/>
-          <p:cNvSpPr/>
-          <p:nvPr/>
-        </p:nvSpPr>
-        <p:spPr>
-          <a:xfrm>
-            <a:off x="640080" y="3749039"/>
-            <a:ext cx="10908792" cy="1691640"/>
-          </a:xfrm>
-          <a:prstGeom prst="roundRect">
-            <a:avLst>
-              <a:gd name="adj" fmla="val 9000"/>
-            </a:avLst>
-          </a:prstGeom>
-          <a:solidFill>
-            <a:srgbClr val="DBE9F8"/>
-          </a:solidFill>
-          <a:ln>
-            <a:noFill/>
-          </a:ln>
-          <a:effectLst/>
-        </p:spPr>
-        <p:style>
-          <a:lnRef idx="1">
-            <a:schemeClr val="accent1"/>
-          </a:lnRef>
-          <a:fillRef idx="3">
-            <a:schemeClr val="accent1"/>
-          </a:fillRef>
-          <a:effectRef idx="2">
-            <a:schemeClr val="accent1"/>
-          </a:effectRef>
-          <a:fontRef idx="minor">
-            <a:schemeClr val="lt1"/>
-          </a:fontRef>
-        </p:style>
-        <p:txBody>
-          <a:bodyPr rtlCol="0" anchor="ctr"/>
-          <a:lstStyle/>
-          <a:p/>
-        </p:txBody>
-      </p:sp>
-      <p:sp>
-        <p:nvSpPr>
-          <p:cNvPr id="12" name="TextBox 11"/>
-          <p:cNvSpPr txBox="1"/>
-          <p:nvPr/>
-        </p:nvSpPr>
-        <p:spPr>
-          <a:xfrm>
-            <a:off x="914400" y="3931920"/>
-            <a:ext cx="10360152" cy="1371600"/>
-          </a:xfrm>
-          <a:prstGeom prst="rect">
-            <a:avLst/>
-          </a:prstGeom>
-          <a:noFill/>
-        </p:spPr>
-        <p:txBody>
-          <a:bodyPr wrap="square" lIns="0" rIns="0" tIns="0" bIns="0">
-            <a:spAutoFit/>
-          </a:bodyPr>
-          <a:lstStyle/>
-          <a:p>
-            <a:pPr algn="l">
-              <a:lnSpc>
-                <a:spcPct val="125000"/>
-              </a:lnSpc>
-            </a:pPr>
-            <a:r>
-              <a:rPr sz="1300" b="1">
-                <a:solidFill>
-                  <a:srgbClr val="16181D"/>
-                </a:solidFill>
-                <a:latin typeface="Malgun Gothic"/>
-                <a:ea typeface="Malgun Gothic"/>
-                <a:cs typeface="Malgun Gothic"/>
-              </a:rPr>
-              <a:t>대조 실험 — </a:t>
-            </a:r>
-            <a:r>
-              <a:rPr sz="1300" b="0">
-                <a:solidFill>
-                  <a:srgbClr val="565C66"/>
-                </a:solidFill>
-                <a:latin typeface="Malgun Gothic"/>
-                <a:ea typeface="Malgun Gothic"/>
-                <a:cs typeface="Malgun Gothic"/>
-              </a:rPr>
-              <a:t>banking 대조로 32B 스케일 효과가 </a:t>
-            </a:r>
-            <a:r>
-              <a:rPr sz="1300" b="1">
-                <a:solidFill>
-                  <a:srgbClr val="C1442A"/>
-                </a:solidFill>
-                <a:latin typeface="Malgun Gothic"/>
-                <a:ea typeface="Malgun Gothic"/>
-                <a:cs typeface="Malgun Gothic"/>
-              </a:rPr>
-              <a:t>slack에 국한</a:t>
-            </a:r>
-            <a:r>
-              <a:rPr sz="1300" b="0">
-                <a:solidFill>
-                  <a:srgbClr val="565C66"/>
-                </a:solidFill>
-                <a:latin typeface="Malgun Gothic"/>
-                <a:ea typeface="Malgun Gothic"/>
-                <a:cs typeface="Malgun Gothic"/>
-              </a:rPr>
-              <a:t>됨을 확정.</a:t>
-            </a:r>
-          </a:p>
-          <a:p>
-            <a:pPr algn="l">
-              <a:lnSpc>
-                <a:spcPct val="125000"/>
-              </a:lnSpc>
-              <a:spcBef>
-                <a:spcPts val="800"/>
-              </a:spcBef>
-            </a:pPr>
-            <a:r>
-              <a:rPr sz="1300" b="0">
-                <a:solidFill>
-                  <a:srgbClr val="565C66"/>
-                </a:solidFill>
-                <a:latin typeface="Malgun Gothic"/>
-                <a:ea typeface="Malgun Gothic"/>
-                <a:cs typeface="Malgun Gothic"/>
-              </a:rPr>
-              <a:t>"모델을 키우면 전반적으로 위험해진다"가 아니라 </a:t>
-            </a:r>
-            <a:r>
-              <a:rPr sz="1300" b="1">
-                <a:solidFill>
-                  <a:srgbClr val="2F6FCE"/>
-                </a:solidFill>
-                <a:latin typeface="Malgun Gothic"/>
-                <a:ea typeface="Malgun Gothic"/>
-                <a:cs typeface="Malgun Gothic"/>
-              </a:rPr>
-              <a:t>"특정 suite의 단순 공격에서만, 가끔 불완전 + backfire".</a:t>
-            </a:r>
-          </a:p>
-        </p:txBody>
-      </p:sp>
-      <p:sp>
-        <p:nvSpPr>
-          <p:cNvPr id="13" name="TextBox 12"/>
-          <p:cNvSpPr txBox="1"/>
-          <p:nvPr/>
-        </p:nvSpPr>
-        <p:spPr>
-          <a:xfrm>
-            <a:off x="640080" y="5669280"/>
-            <a:ext cx="10908792" cy="365760"/>
-          </a:xfrm>
-          <a:prstGeom prst="rect">
-            <a:avLst/>
-          </a:prstGeom>
-          <a:noFill/>
-        </p:spPr>
-        <p:txBody>
-          <a:bodyPr wrap="square" lIns="0" rIns="0" tIns="0" bIns="0">
-            <a:spAutoFit/>
-          </a:bodyPr>
-          <a:lstStyle/>
+              <a:t>다음 진행하면 좋을 태스크</a:t>
+            </a:r>
+          </a:p>
           <a:p>
             <a:pPr algn="l">
               <a:lnSpc>
                 <a:spcPct val="120000"/>
               </a:lnSpc>
+              <a:spcBef>
+                <a:spcPts val="500"/>
+              </a:spcBef>
             </a:pPr>
             <a:r>
               <a:rPr sz="1050" b="1">
@@ -8571,18 +6314,158 @@
                 <a:ea typeface="Malgun Gothic"/>
                 <a:cs typeface="Malgun Gothic"/>
               </a:rPr>
-              <a:t>다음: </a:t>
-            </a:r>
-            <a:r>
-              <a:rPr sz="1050" b="0">
-                <a:solidFill>
-                  <a:srgbClr val="8B9099"/>
+              <a:t>·  </a:t>
+            </a:r>
+            <a:r>
+              <a:rPr sz="1050" b="1">
+                <a:solidFill>
+                  <a:srgbClr val="16181D"/>
                 </a:solidFill>
                 <a:latin typeface="Malgun Gothic"/>
                 <a:ea typeface="Malgun Gothic"/>
                 <a:cs typeface="Malgun Gothic"/>
               </a:rPr>
-              <a:t>이 deck의 pptx 산출 완료 · k-sweep 착수 / Qwen3-8B 진단은 다음 사이클</a:t>
+              <a:t>k-sweep</a:t>
+            </a:r>
+            <a:r>
+              <a:rPr sz="1050" b="0">
+                <a:solidFill>
+                  <a:srgbClr val="565C66"/>
+                </a:solidFill>
+                <a:latin typeface="Malgun Gothic"/>
+                <a:ea typeface="Malgun Gothic"/>
+                <a:cs typeface="Malgun Gothic"/>
+              </a:rPr>
+              <a:t> — head 개수 ↑로 slack 1/3/5 억제력 보강되는지 (Track B용 신규 구현).</a:t>
+            </a:r>
+          </a:p>
+          <a:p>
+            <a:pPr algn="l">
+              <a:lnSpc>
+                <a:spcPct val="120000"/>
+              </a:lnSpc>
+              <a:spcBef>
+                <a:spcPts val="500"/>
+              </a:spcBef>
+            </a:pPr>
+            <a:r>
+              <a:rPr sz="1050" b="1">
+                <a:solidFill>
+                  <a:srgbClr val="C06A1F"/>
+                </a:solidFill>
+                <a:latin typeface="Malgun Gothic"/>
+                <a:ea typeface="Malgun Gothic"/>
+                <a:cs typeface="Malgun Gothic"/>
+              </a:rPr>
+              <a:t>·  </a:t>
+            </a:r>
+            <a:r>
+              <a:rPr sz="1050" b="1">
+                <a:solidFill>
+                  <a:srgbClr val="16181D"/>
+                </a:solidFill>
+                <a:latin typeface="Malgun Gothic"/>
+                <a:ea typeface="Malgun Gothic"/>
+                <a:cs typeface="Malgun Gothic"/>
+              </a:rPr>
+              <a:t>복합 공격 채점 축 확보</a:t>
+            </a:r>
+            <a:r>
+              <a:rPr sz="1050" b="0">
+                <a:solidFill>
+                  <a:srgbClr val="565C66"/>
+                </a:solidFill>
+                <a:latin typeface="Malgun Gothic"/>
+                <a:ea typeface="Malgun Gothic"/>
+                <a:cs typeface="Malgun Gothic"/>
+              </a:rPr>
+              <a:t> — injection_task 2/4는 near-unwinnable → AgentDojo 외 벤치마크/자체 시나리오로 다단계 knockout 효과 측정.</a:t>
+            </a:r>
+          </a:p>
+          <a:p>
+            <a:pPr algn="l">
+              <a:lnSpc>
+                <a:spcPct val="120000"/>
+              </a:lnSpc>
+              <a:spcBef>
+                <a:spcPts val="500"/>
+              </a:spcBef>
+            </a:pPr>
+            <a:r>
+              <a:rPr sz="1050" b="1">
+                <a:solidFill>
+                  <a:srgbClr val="C06A1F"/>
+                </a:solidFill>
+                <a:latin typeface="Malgun Gothic"/>
+                <a:ea typeface="Malgun Gothic"/>
+                <a:cs typeface="Malgun Gothic"/>
+              </a:rPr>
+              <a:t>·  </a:t>
+            </a:r>
+            <a:r>
+              <a:rPr sz="1050" b="1">
+                <a:solidFill>
+                  <a:srgbClr val="16181D"/>
+                </a:solidFill>
+                <a:latin typeface="Malgun Gothic"/>
+                <a:ea typeface="Malgun Gothic"/>
+                <a:cs typeface="Malgun Gothic"/>
+              </a:rPr>
+              <a:t>32B-4bit 비결정성 규명</a:t>
+            </a:r>
+            <a:r>
+              <a:rPr sz="1050" b="0">
+                <a:solidFill>
+                  <a:srgbClr val="565C66"/>
+                </a:solidFill>
+                <a:latin typeface="Malgun Gothic"/>
+                <a:ea typeface="Malgun Gothic"/>
+                <a:cs typeface="Malgun Gothic"/>
+              </a:rPr>
+              <a:t> — GPU 고정 시 결정론적인지 (진행 중: Blackwell 커널이 모델 손상, A6000은 bf16과 일치).</a:t>
+            </a:r>
+          </a:p>
+          <a:p>
+            <a:pPr algn="l">
+              <a:lnSpc>
+                <a:spcPct val="120000"/>
+              </a:lnSpc>
+              <a:spcBef>
+                <a:spcPts val="500"/>
+              </a:spcBef>
+            </a:pPr>
+            <a:r>
+              <a:rPr sz="1050" b="1">
+                <a:solidFill>
+                  <a:srgbClr val="C06A1F"/>
+                </a:solidFill>
+                <a:latin typeface="Malgun Gothic"/>
+                <a:ea typeface="Malgun Gothic"/>
+                <a:cs typeface="Malgun Gothic"/>
+              </a:rPr>
+              <a:t>·  </a:t>
+            </a:r>
+            <a:r>
+              <a:rPr sz="1050" b="1">
+                <a:solidFill>
+                  <a:srgbClr val="16181D"/>
+                </a:solidFill>
+                <a:latin typeface="Malgun Gothic"/>
+                <a:ea typeface="Malgun Gothic"/>
+                <a:cs typeface="Malgun Gothic"/>
+              </a:rPr>
+              <a:t>다른 아키텍처 교차검증</a:t>
+            </a:r>
+            <a:r>
+              <a:rPr sz="1050" b="0">
+                <a:solidFill>
+                  <a:srgbClr val="565C66"/>
+                </a:solidFill>
+                <a:latin typeface="Malgun Gothic"/>
+                <a:ea typeface="Malgun Gothic"/>
+                <a:cs typeface="Malgun Gothic"/>
+              </a:rPr>
+              <a:t> — Qwen3-8B, Llama-70B (후순위, 다음 사이클).</a:t>
             </a:r>
           </a:p>
         </p:txBody>

--- a/docs/presentation/IPI_Head_Separation_PoC_4th [26-09-XX].pptx
+++ b/docs/presentation/IPI_Head_Separation_PoC_4th [26-09-XX].pptx
@@ -4528,7 +4528,7 @@
               </a:lnSpc>
             </a:pPr>
             <a:r>
-              <a:rPr sz="2600" b="1">
+              <a:rPr sz="2300" b="1">
                 <a:solidFill>
                   <a:srgbClr val="16181D"/>
                 </a:solidFill>
@@ -4536,7 +4536,7 @@
                 <a:ea typeface="Malgun Gothic"/>
                 <a:cs typeface="Malgun Gothic"/>
               </a:rPr>
-              <a:t>32B: fp4 / nf4dq (비결정적) / bf16</a:t>
+              <a:t>32B: nf4dq는 GPU 의존 · bf16으로 스케일 효과 확정</a:t>
             </a:r>
           </a:p>
         </p:txBody>
@@ -4551,7 +4551,7 @@
         </p:nvGraphicFramePr>
         <p:xfrm>
           <a:off x="640080" y="1691640"/>
-          <a:ext cx="10908792" cy="2048256"/>
+          <a:ext cx="10908790" cy="2048256"/>
         </p:xfrm>
         <a:graphic>
           <a:graphicData uri="http://schemas.openxmlformats.org/drawingml/2006/table">
@@ -4560,13 +4560,13 @@
                 <a:tableStyleId>{5C22544A-7EE6-4342-B048-85BDC9FD1C3A}</a:tableStyleId>
               </a:tblPr>
               <a:tblGrid>
-                <a:gridCol w="2468880"/>
-                <a:gridCol w="2651760"/>
-                <a:gridCol w="1280160"/>
-                <a:gridCol w="1280160"/>
-                <a:gridCol w="914400"/>
-                <a:gridCol w="1280160"/>
-                <a:gridCol w="1033272"/>
+                <a:gridCol w="2473139"/>
+                <a:gridCol w="2742936"/>
+                <a:gridCol w="1124154"/>
+                <a:gridCol w="1124154"/>
+                <a:gridCol w="1393951"/>
+                <a:gridCol w="1034221"/>
+                <a:gridCol w="1016235"/>
               </a:tblGrid>
               <a:tr h="365760">
                 <a:tc>
@@ -4580,6 +4580,64 @@
                         </a:lnSpc>
                       </a:pPr>
                       <a:r>
+                        <a:rPr sz="950" b="1">
+                          <a:solidFill>
+                            <a:srgbClr val="8B9099"/>
+                          </a:solidFill>
+                          <a:latin typeface="Malgun Gothic"/>
+                          <a:ea typeface="Malgun Gothic"/>
+                          <a:cs typeface="Malgun Gothic"/>
+                        </a:rPr>
+                        <a:t>실행</a:t>
+                      </a:r>
+                    </a:p>
+                  </a:txBody>
+                  <a:tcPr marL="82296" marR="82296" marT="41148" marB="41148" anchor="ctr">
+                    <a:solidFill>
+                      <a:srgbClr val="E9EAED"/>
+                    </a:solidFill>
+                  </a:tcPr>
+                </a:tc>
+                <a:tc>
+                  <a:txBody>
+                    <a:bodyPr wrap="square"/>
+                    <a:lstStyle/>
+                    <a:p>
+                      <a:pPr algn="l">
+                        <a:lnSpc>
+                          <a:spcPct val="100000"/>
+                        </a:lnSpc>
+                      </a:pPr>
+                      <a:r>
+                        <a:rPr sz="900" b="1">
+                          <a:solidFill>
+                            <a:srgbClr val="8B9099"/>
+                          </a:solidFill>
+                          <a:latin typeface="Malgun Gothic"/>
+                          <a:ea typeface="Malgun Gothic"/>
+                          <a:cs typeface="Malgun Gothic"/>
+                        </a:rPr>
+                        <a:t>GPU / quant</a:t>
+                      </a:r>
+                    </a:p>
+                  </a:txBody>
+                  <a:tcPr marL="82296" marR="82296" marT="41148" marB="41148" anchor="ctr">
+                    <a:solidFill>
+                      <a:srgbClr val="E9EAED"/>
+                    </a:solidFill>
+                  </a:tcPr>
+                </a:tc>
+                <a:tc>
+                  <a:txBody>
+                    <a:bodyPr wrap="square"/>
+                    <a:lstStyle/>
+                    <a:p>
+                      <a:pPr algn="r">
+                        <a:lnSpc>
+                          <a:spcPct val="100000"/>
+                        </a:lnSpc>
+                      </a:pPr>
+                      <a:r>
                         <a:rPr sz="1000" b="1">
                           <a:solidFill>
                             <a:srgbClr val="8B9099"/>
@@ -4588,7 +4646,7 @@
                           <a:ea typeface="Malgun Gothic"/>
                           <a:cs typeface="Malgun Gothic"/>
                         </a:rPr>
-                        <a:t>실행</a:t>
+                        <a:t>slack k0</a:t>
                       </a:r>
                     </a:p>
                   </a:txBody>
@@ -4603,12 +4661,41 @@
                     <a:bodyPr wrap="square"/>
                     <a:lstStyle/>
                     <a:p>
-                      <a:pPr algn="l">
+                      <a:pPr algn="r">
                         <a:lnSpc>
                           <a:spcPct val="100000"/>
                         </a:lnSpc>
                       </a:pPr>
                       <a:r>
+                        <a:rPr sz="1000" b="1">
+                          <a:solidFill>
+                            <a:srgbClr val="8B9099"/>
+                          </a:solidFill>
+                          <a:latin typeface="Malgun Gothic"/>
+                          <a:ea typeface="Malgun Gothic"/>
+                          <a:cs typeface="Malgun Gothic"/>
+                        </a:rPr>
+                        <a:t>slack kN</a:t>
+                      </a:r>
+                    </a:p>
+                  </a:txBody>
+                  <a:tcPr marL="82296" marR="82296" marT="41148" marB="41148" anchor="ctr">
+                    <a:solidFill>
+                      <a:srgbClr val="E9EAED"/>
+                    </a:solidFill>
+                  </a:tcPr>
+                </a:tc>
+                <a:tc>
+                  <a:txBody>
+                    <a:bodyPr wrap="square"/>
+                    <a:lstStyle/>
+                    <a:p>
+                      <a:pPr algn="r">
+                        <a:lnSpc>
+                          <a:spcPct val="100000"/>
+                        </a:lnSpc>
+                      </a:pPr>
+                      <a:r>
                         <a:rPr sz="950" b="1">
                           <a:solidFill>
                             <a:srgbClr val="8B9099"/>
@@ -4617,94 +4704,7 @@
                           <a:ea typeface="Malgun Gothic"/>
                           <a:cs typeface="Malgun Gothic"/>
                         </a:rPr>
-                        <a:t>GPU / quant</a:t>
-                      </a:r>
-                    </a:p>
-                  </a:txBody>
-                  <a:tcPr marL="82296" marR="82296" marT="41148" marB="41148" anchor="ctr">
-                    <a:solidFill>
-                      <a:srgbClr val="E9EAED"/>
-                    </a:solidFill>
-                  </a:tcPr>
-                </a:tc>
-                <a:tc>
-                  <a:txBody>
-                    <a:bodyPr wrap="square"/>
-                    <a:lstStyle/>
-                    <a:p>
-                      <a:pPr algn="r">
-                        <a:lnSpc>
-                          <a:spcPct val="100000"/>
-                        </a:lnSpc>
-                      </a:pPr>
-                      <a:r>
-                        <a:rPr sz="1000" b="1">
-                          <a:solidFill>
-                            <a:srgbClr val="8B9099"/>
-                          </a:solidFill>
-                          <a:latin typeface="Malgun Gothic"/>
-                          <a:ea typeface="Malgun Gothic"/>
-                          <a:cs typeface="Malgun Gothic"/>
-                        </a:rPr>
-                        <a:t>slack k0</a:t>
-                      </a:r>
-                    </a:p>
-                  </a:txBody>
-                  <a:tcPr marL="82296" marR="82296" marT="41148" marB="41148" anchor="ctr">
-                    <a:solidFill>
-                      <a:srgbClr val="E9EAED"/>
-                    </a:solidFill>
-                  </a:tcPr>
-                </a:tc>
-                <a:tc>
-                  <a:txBody>
-                    <a:bodyPr wrap="square"/>
-                    <a:lstStyle/>
-                    <a:p>
-                      <a:pPr algn="r">
-                        <a:lnSpc>
-                          <a:spcPct val="100000"/>
-                        </a:lnSpc>
-                      </a:pPr>
-                      <a:r>
-                        <a:rPr sz="1000" b="1">
-                          <a:solidFill>
-                            <a:srgbClr val="8B9099"/>
-                          </a:solidFill>
-                          <a:latin typeface="Malgun Gothic"/>
-                          <a:ea typeface="Malgun Gothic"/>
-                          <a:cs typeface="Malgun Gothic"/>
-                        </a:rPr>
-                        <a:t>slack kN</a:t>
-                      </a:r>
-                    </a:p>
-                  </a:txBody>
-                  <a:tcPr marL="82296" marR="82296" marT="41148" marB="41148" anchor="ctr">
-                    <a:solidFill>
-                      <a:srgbClr val="E9EAED"/>
-                    </a:solidFill>
-                  </a:tcPr>
-                </a:tc>
-                <a:tc>
-                  <a:txBody>
-                    <a:bodyPr wrap="square"/>
-                    <a:lstStyle/>
-                    <a:p>
-                      <a:pPr algn="ctr">
-                        <a:lnSpc>
-                          <a:spcPct val="100000"/>
-                        </a:lnSpc>
-                      </a:pPr>
-                      <a:r>
-                        <a:rPr sz="1000" b="1">
-                          <a:solidFill>
-                            <a:srgbClr val="8B9099"/>
-                          </a:solidFill>
-                          <a:latin typeface="Malgun Gothic"/>
-                          <a:ea typeface="Malgun Gothic"/>
-                          <a:cs typeface="Malgun Gothic"/>
-                        </a:rPr>
-                        <a:t>supp</a:t>
+                        <a:t>slack k0_util</a:t>
                       </a:r>
                     </a:p>
                   </a:txBody>
@@ -4785,6 +4785,64 @@
                         </a:lnSpc>
                       </a:pPr>
                       <a:r>
+                        <a:rPr sz="950" b="0">
+                          <a:solidFill>
+                            <a:srgbClr val="565C66"/>
+                          </a:solidFill>
+                          <a:latin typeface="Malgun Gothic"/>
+                          <a:ea typeface="Malgun Gothic"/>
+                          <a:cs typeface="Malgun Gothic"/>
+                        </a:rPr>
+                        <a:t>32B nf4dq  (×3 동일)</a:t>
+                      </a:r>
+                    </a:p>
+                  </a:txBody>
+                  <a:tcPr marL="82296" marR="82296" marT="41148" marB="41148" anchor="ctr">
+                    <a:solidFill>
+                      <a:srgbClr val="FFFFFF"/>
+                    </a:solidFill>
+                  </a:tcPr>
+                </a:tc>
+                <a:tc>
+                  <a:txBody>
+                    <a:bodyPr wrap="square"/>
+                    <a:lstStyle/>
+                    <a:p>
+                      <a:pPr algn="l">
+                        <a:lnSpc>
+                          <a:spcPct val="115000"/>
+                        </a:lnSpc>
+                      </a:pPr>
+                      <a:r>
+                        <a:rPr sz="900" b="0">
+                          <a:solidFill>
+                            <a:srgbClr val="565C66"/>
+                          </a:solidFill>
+                          <a:latin typeface="Malgun Gothic"/>
+                          <a:ea typeface="Malgun Gothic"/>
+                          <a:cs typeface="Malgun Gothic"/>
+                        </a:rPr>
+                        <a:t>A6000 sm_86 / nf4dq</a:t>
+                      </a:r>
+                    </a:p>
+                  </a:txBody>
+                  <a:tcPr marL="82296" marR="82296" marT="41148" marB="41148" anchor="ctr">
+                    <a:solidFill>
+                      <a:srgbClr val="FFFFFF"/>
+                    </a:solidFill>
+                  </a:tcPr>
+                </a:tc>
+                <a:tc>
+                  <a:txBody>
+                    <a:bodyPr wrap="square"/>
+                    <a:lstStyle/>
+                    <a:p>
+                      <a:pPr algn="r">
+                        <a:lnSpc>
+                          <a:spcPct val="115000"/>
+                        </a:lnSpc>
+                      </a:pPr>
+                      <a:r>
                         <a:rPr sz="1000" b="0">
                           <a:solidFill>
                             <a:srgbClr val="565C66"/>
@@ -4793,7 +4851,7 @@
                           <a:ea typeface="Malgun Gothic"/>
                           <a:cs typeface="Malgun Gothic"/>
                         </a:rPr>
-                        <a:t>32B nf4dq #1</a:t>
+                        <a:t>0.229</a:t>
                       </a:r>
                     </a:p>
                   </a:txBody>
@@ -4808,7 +4866,36 @@
                     <a:bodyPr wrap="square"/>
                     <a:lstStyle/>
                     <a:p>
-                      <a:pPr algn="l">
+                      <a:pPr algn="r">
+                        <a:lnSpc>
+                          <a:spcPct val="115000"/>
+                        </a:lnSpc>
+                      </a:pPr>
+                      <a:r>
+                        <a:rPr sz="1000" b="0">
+                          <a:solidFill>
+                            <a:srgbClr val="565C66"/>
+                          </a:solidFill>
+                          <a:latin typeface="Malgun Gothic"/>
+                          <a:ea typeface="Malgun Gothic"/>
+                          <a:cs typeface="Malgun Gothic"/>
+                        </a:rPr>
+                        <a:t>0.229</a:t>
+                      </a:r>
+                    </a:p>
+                  </a:txBody>
+                  <a:tcPr marL="82296" marR="82296" marT="41148" marB="41148" anchor="ctr">
+                    <a:solidFill>
+                      <a:srgbClr val="FFFFFF"/>
+                    </a:solidFill>
+                  </a:tcPr>
+                </a:tc>
+                <a:tc>
+                  <a:txBody>
+                    <a:bodyPr wrap="square"/>
+                    <a:lstStyle/>
+                    <a:p>
+                      <a:pPr algn="r">
                         <a:lnSpc>
                           <a:spcPct val="115000"/>
                         </a:lnSpc>
@@ -4822,94 +4909,7 @@
                           <a:ea typeface="Malgun Gothic"/>
                           <a:cs typeface="Malgun Gothic"/>
                         </a:rPr>
-                        <a:t>A6000 / nf4dq</a:t>
-                      </a:r>
-                    </a:p>
-                  </a:txBody>
-                  <a:tcPr marL="82296" marR="82296" marT="41148" marB="41148" anchor="ctr">
-                    <a:solidFill>
-                      <a:srgbClr val="FFFFFF"/>
-                    </a:solidFill>
-                  </a:tcPr>
-                </a:tc>
-                <a:tc>
-                  <a:txBody>
-                    <a:bodyPr wrap="square"/>
-                    <a:lstStyle/>
-                    <a:p>
-                      <a:pPr algn="r">
-                        <a:lnSpc>
-                          <a:spcPct val="115000"/>
-                        </a:lnSpc>
-                      </a:pPr>
-                      <a:r>
-                        <a:rPr sz="1000" b="0">
-                          <a:solidFill>
-                            <a:srgbClr val="565C66"/>
-                          </a:solidFill>
-                          <a:latin typeface="Malgun Gothic"/>
-                          <a:ea typeface="Malgun Gothic"/>
-                          <a:cs typeface="Malgun Gothic"/>
-                        </a:rPr>
-                        <a:t>0.229</a:t>
-                      </a:r>
-                    </a:p>
-                  </a:txBody>
-                  <a:tcPr marL="82296" marR="82296" marT="41148" marB="41148" anchor="ctr">
-                    <a:solidFill>
-                      <a:srgbClr val="FFFFFF"/>
-                    </a:solidFill>
-                  </a:tcPr>
-                </a:tc>
-                <a:tc>
-                  <a:txBody>
-                    <a:bodyPr wrap="square"/>
-                    <a:lstStyle/>
-                    <a:p>
-                      <a:pPr algn="r">
-                        <a:lnSpc>
-                          <a:spcPct val="115000"/>
-                        </a:lnSpc>
-                      </a:pPr>
-                      <a:r>
-                        <a:rPr sz="1000" b="0">
-                          <a:solidFill>
-                            <a:srgbClr val="565C66"/>
-                          </a:solidFill>
-                          <a:latin typeface="Malgun Gothic"/>
-                          <a:ea typeface="Malgun Gothic"/>
-                          <a:cs typeface="Malgun Gothic"/>
-                        </a:rPr>
-                        <a:t>0.229</a:t>
-                      </a:r>
-                    </a:p>
-                  </a:txBody>
-                  <a:tcPr marL="82296" marR="82296" marT="41148" marB="41148" anchor="ctr">
-                    <a:solidFill>
-                      <a:srgbClr val="FFFFFF"/>
-                    </a:solidFill>
-                  </a:tcPr>
-                </a:tc>
-                <a:tc>
-                  <a:txBody>
-                    <a:bodyPr wrap="square"/>
-                    <a:lstStyle/>
-                    <a:p>
-                      <a:pPr algn="ctr">
-                        <a:lnSpc>
-                          <a:spcPct val="115000"/>
-                        </a:lnSpc>
-                      </a:pPr>
-                      <a:r>
-                        <a:rPr sz="1000" b="0">
-                          <a:solidFill>
-                            <a:srgbClr val="565C66"/>
-                          </a:solidFill>
-                          <a:latin typeface="Malgun Gothic"/>
-                          <a:ea typeface="Malgun Gothic"/>
-                          <a:cs typeface="Malgun Gothic"/>
-                        </a:rPr>
-                        <a:t>2</a:t>
+                        <a:t>0.286</a:t>
                       </a:r>
                     </a:p>
                   </a:txBody>
@@ -4990,6 +4990,64 @@
                         </a:lnSpc>
                       </a:pPr>
                       <a:r>
+                        <a:rPr sz="950" b="0">
+                          <a:solidFill>
+                            <a:srgbClr val="565C66"/>
+                          </a:solidFill>
+                          <a:latin typeface="Malgun Gothic"/>
+                          <a:ea typeface="Malgun Gothic"/>
+                          <a:cs typeface="Malgun Gothic"/>
+                        </a:rPr>
+                        <a:t>32B nf4dq  (×5 동일)</a:t>
+                      </a:r>
+                    </a:p>
+                  </a:txBody>
+                  <a:tcPr marL="82296" marR="82296" marT="41148" marB="41148" anchor="ctr">
+                    <a:solidFill>
+                      <a:srgbClr val="F7F7F9"/>
+                    </a:solidFill>
+                  </a:tcPr>
+                </a:tc>
+                <a:tc>
+                  <a:txBody>
+                    <a:bodyPr wrap="square"/>
+                    <a:lstStyle/>
+                    <a:p>
+                      <a:pPr algn="l">
+                        <a:lnSpc>
+                          <a:spcPct val="115000"/>
+                        </a:lnSpc>
+                      </a:pPr>
+                      <a:r>
+                        <a:rPr sz="900" b="0">
+                          <a:solidFill>
+                            <a:srgbClr val="565C66"/>
+                          </a:solidFill>
+                          <a:latin typeface="Malgun Gothic"/>
+                          <a:ea typeface="Malgun Gothic"/>
+                          <a:cs typeface="Malgun Gothic"/>
+                        </a:rPr>
+                        <a:t>Blackwell sm_120 / nf4dq</a:t>
+                      </a:r>
+                    </a:p>
+                  </a:txBody>
+                  <a:tcPr marL="82296" marR="82296" marT="41148" marB="41148" anchor="ctr">
+                    <a:solidFill>
+                      <a:srgbClr val="F7F7F9"/>
+                    </a:solidFill>
+                  </a:tcPr>
+                </a:tc>
+                <a:tc>
+                  <a:txBody>
+                    <a:bodyPr wrap="square"/>
+                    <a:lstStyle/>
+                    <a:p>
+                      <a:pPr algn="r">
+                        <a:lnSpc>
+                          <a:spcPct val="115000"/>
+                        </a:lnSpc>
+                      </a:pPr>
+                      <a:r>
                         <a:rPr sz="1000" b="0">
                           <a:solidFill>
                             <a:srgbClr val="565C66"/>
@@ -4998,7 +5056,7 @@
                           <a:ea typeface="Malgun Gothic"/>
                           <a:cs typeface="Malgun Gothic"/>
                         </a:rPr>
-                        <a:t>32B nf4dq #2</a:t>
+                        <a:t>0.171</a:t>
                       </a:r>
                     </a:p>
                   </a:txBody>
@@ -5013,13 +5071,13 @@
                     <a:bodyPr wrap="square"/>
                     <a:lstStyle/>
                     <a:p>
-                      <a:pPr algn="l">
-                        <a:lnSpc>
-                          <a:spcPct val="115000"/>
-                        </a:lnSpc>
-                      </a:pPr>
-                      <a:r>
-                        <a:rPr sz="950" b="0">
+                      <a:pPr algn="r">
+                        <a:lnSpc>
+                          <a:spcPct val="115000"/>
+                        </a:lnSpc>
+                      </a:pPr>
+                      <a:r>
+                        <a:rPr sz="1000" b="0">
                           <a:solidFill>
                             <a:srgbClr val="565C66"/>
                           </a:solidFill>
@@ -5027,7 +5085,7 @@
                           <a:ea typeface="Malgun Gothic"/>
                           <a:cs typeface="Malgun Gothic"/>
                         </a:rPr>
-                        <a:t>Blackwell / nf4dq</a:t>
+                        <a:t>0.114</a:t>
                       </a:r>
                     </a:p>
                   </a:txBody>
@@ -5048,73 +5106,15 @@
                         </a:lnSpc>
                       </a:pPr>
                       <a:r>
-                        <a:rPr sz="1000" b="0">
-                          <a:solidFill>
-                            <a:srgbClr val="565C66"/>
-                          </a:solidFill>
-                          <a:latin typeface="Malgun Gothic"/>
-                          <a:ea typeface="Malgun Gothic"/>
-                          <a:cs typeface="Malgun Gothic"/>
-                        </a:rPr>
-                        <a:t>0.171</a:t>
-                      </a:r>
-                    </a:p>
-                  </a:txBody>
-                  <a:tcPr marL="82296" marR="82296" marT="41148" marB="41148" anchor="ctr">
-                    <a:solidFill>
-                      <a:srgbClr val="F7F7F9"/>
-                    </a:solidFill>
-                  </a:tcPr>
-                </a:tc>
-                <a:tc>
-                  <a:txBody>
-                    <a:bodyPr wrap="square"/>
-                    <a:lstStyle/>
-                    <a:p>
-                      <a:pPr algn="r">
-                        <a:lnSpc>
-                          <a:spcPct val="115000"/>
-                        </a:lnSpc>
-                      </a:pPr>
-                      <a:r>
-                        <a:rPr sz="1000" b="0">
-                          <a:solidFill>
-                            <a:srgbClr val="565C66"/>
-                          </a:solidFill>
-                          <a:latin typeface="Malgun Gothic"/>
-                          <a:ea typeface="Malgun Gothic"/>
-                          <a:cs typeface="Malgun Gothic"/>
-                        </a:rPr>
-                        <a:t>0.114</a:t>
-                      </a:r>
-                    </a:p>
-                  </a:txBody>
-                  <a:tcPr marL="82296" marR="82296" marT="41148" marB="41148" anchor="ctr">
-                    <a:solidFill>
-                      <a:srgbClr val="F7F7F9"/>
-                    </a:solidFill>
-                  </a:tcPr>
-                </a:tc>
-                <a:tc>
-                  <a:txBody>
-                    <a:bodyPr wrap="square"/>
-                    <a:lstStyle/>
-                    <a:p>
-                      <a:pPr algn="ctr">
-                        <a:lnSpc>
-                          <a:spcPct val="115000"/>
-                        </a:lnSpc>
-                      </a:pPr>
-                      <a:r>
-                        <a:rPr sz="1000" b="0">
-                          <a:solidFill>
-                            <a:srgbClr val="565C66"/>
-                          </a:solidFill>
-                          <a:latin typeface="Malgun Gothic"/>
-                          <a:ea typeface="Malgun Gothic"/>
-                          <a:cs typeface="Malgun Gothic"/>
-                        </a:rPr>
-                        <a:t>2</a:t>
+                        <a:rPr sz="950" b="1">
+                          <a:solidFill>
+                            <a:srgbClr val="C1442A"/>
+                          </a:solidFill>
+                          <a:latin typeface="Malgun Gothic"/>
+                          <a:ea typeface="Malgun Gothic"/>
+                          <a:cs typeface="Malgun Gothic"/>
+                        </a:rPr>
+                        <a:t>0.09</a:t>
                       </a:r>
                     </a:p>
                   </a:txBody>
@@ -5195,15 +5195,102 @@
                         </a:lnSpc>
                       </a:pPr>
                       <a:r>
+                        <a:rPr sz="950" b="1">
+                          <a:solidFill>
+                            <a:srgbClr val="2F6FCE"/>
+                          </a:solidFill>
+                          <a:latin typeface="Malgun Gothic"/>
+                          <a:ea typeface="Malgun Gothic"/>
+                          <a:cs typeface="Malgun Gothic"/>
+                        </a:rPr>
+                        <a:t>32B bf16</a:t>
+                      </a:r>
+                    </a:p>
+                  </a:txBody>
+                  <a:tcPr marL="82296" marR="82296" marT="41148" marB="41148" anchor="ctr">
+                    <a:solidFill>
+                      <a:srgbClr val="FFFFFF"/>
+                    </a:solidFill>
+                  </a:tcPr>
+                </a:tc>
+                <a:tc>
+                  <a:txBody>
+                    <a:bodyPr wrap="square"/>
+                    <a:lstStyle/>
+                    <a:p>
+                      <a:pPr algn="l">
+                        <a:lnSpc>
+                          <a:spcPct val="115000"/>
+                        </a:lnSpc>
+                      </a:pPr>
+                      <a:r>
+                        <a:rPr sz="900" b="1">
+                          <a:solidFill>
+                            <a:srgbClr val="16181D"/>
+                          </a:solidFill>
+                          <a:latin typeface="Malgun Gothic"/>
+                          <a:ea typeface="Malgun Gothic"/>
+                          <a:cs typeface="Malgun Gothic"/>
+                        </a:rPr>
+                        <a:t>A6000 / bf16</a:t>
+                      </a:r>
+                    </a:p>
+                  </a:txBody>
+                  <a:tcPr marL="82296" marR="82296" marT="41148" marB="41148" anchor="ctr">
+                    <a:solidFill>
+                      <a:srgbClr val="FFFFFF"/>
+                    </a:solidFill>
+                  </a:tcPr>
+                </a:tc>
+                <a:tc>
+                  <a:txBody>
+                    <a:bodyPr wrap="square"/>
+                    <a:lstStyle/>
+                    <a:p>
+                      <a:pPr algn="r">
+                        <a:lnSpc>
+                          <a:spcPct val="115000"/>
+                        </a:lnSpc>
+                      </a:pPr>
+                      <a:r>
+                        <a:rPr sz="1000" b="0">
+                          <a:solidFill>
+                            <a:srgbClr val="565C66"/>
+                          </a:solidFill>
+                          <a:latin typeface="Malgun Gothic"/>
+                          <a:ea typeface="Malgun Gothic"/>
+                          <a:cs typeface="Malgun Gothic"/>
+                        </a:rPr>
+                        <a:t>0.257</a:t>
+                      </a:r>
+                    </a:p>
+                  </a:txBody>
+                  <a:tcPr marL="82296" marR="82296" marT="41148" marB="41148" anchor="ctr">
+                    <a:solidFill>
+                      <a:srgbClr val="FFFFFF"/>
+                    </a:solidFill>
+                  </a:tcPr>
+                </a:tc>
+                <a:tc>
+                  <a:txBody>
+                    <a:bodyPr wrap="square"/>
+                    <a:lstStyle/>
+                    <a:p>
+                      <a:pPr algn="r">
+                        <a:lnSpc>
+                          <a:spcPct val="115000"/>
+                        </a:lnSpc>
+                      </a:pPr>
+                      <a:r>
                         <a:rPr sz="1000" b="1">
                           <a:solidFill>
-                            <a:srgbClr val="2F6FCE"/>
-                          </a:solidFill>
-                          <a:latin typeface="Malgun Gothic"/>
-                          <a:ea typeface="Malgun Gothic"/>
-                          <a:cs typeface="Malgun Gothic"/>
-                        </a:rPr>
-                        <a:t>32B bf16</a:t>
+                            <a:srgbClr val="C1442A"/>
+                          </a:solidFill>
+                          <a:latin typeface="Malgun Gothic"/>
+                          <a:ea typeface="Malgun Gothic"/>
+                          <a:cs typeface="Malgun Gothic"/>
+                        </a:rPr>
+                        <a:t>0.143</a:t>
                       </a:r>
                     </a:p>
                   </a:txBody>
@@ -5218,42 +5305,13 @@
                     <a:bodyPr wrap="square"/>
                     <a:lstStyle/>
                     <a:p>
-                      <a:pPr algn="l">
-                        <a:lnSpc>
-                          <a:spcPct val="115000"/>
-                        </a:lnSpc>
-                      </a:pPr>
-                      <a:r>
-                        <a:rPr sz="950" b="1">
-                          <a:solidFill>
-                            <a:srgbClr val="16181D"/>
-                          </a:solidFill>
-                          <a:latin typeface="Malgun Gothic"/>
-                          <a:ea typeface="Malgun Gothic"/>
-                          <a:cs typeface="Malgun Gothic"/>
-                        </a:rPr>
-                        <a:t>A6000+2 / bf16</a:t>
-                      </a:r>
-                    </a:p>
-                  </a:txBody>
-                  <a:tcPr marL="82296" marR="82296" marT="41148" marB="41148" anchor="ctr">
-                    <a:solidFill>
-                      <a:srgbClr val="FFFFFF"/>
-                    </a:solidFill>
-                  </a:tcPr>
-                </a:tc>
-                <a:tc>
-                  <a:txBody>
-                    <a:bodyPr wrap="square"/>
-                    <a:lstStyle/>
-                    <a:p>
                       <a:pPr algn="r">
                         <a:lnSpc>
                           <a:spcPct val="115000"/>
                         </a:lnSpc>
                       </a:pPr>
                       <a:r>
-                        <a:rPr sz="1000" b="0">
+                        <a:rPr sz="950" b="0">
                           <a:solidFill>
                             <a:srgbClr val="565C66"/>
                           </a:solidFill>
@@ -5261,65 +5319,7 @@
                           <a:ea typeface="Malgun Gothic"/>
                           <a:cs typeface="Malgun Gothic"/>
                         </a:rPr>
-                        <a:t>0.257</a:t>
-                      </a:r>
-                    </a:p>
-                  </a:txBody>
-                  <a:tcPr marL="82296" marR="82296" marT="41148" marB="41148" anchor="ctr">
-                    <a:solidFill>
-                      <a:srgbClr val="FFFFFF"/>
-                    </a:solidFill>
-                  </a:tcPr>
-                </a:tc>
-                <a:tc>
-                  <a:txBody>
-                    <a:bodyPr wrap="square"/>
-                    <a:lstStyle/>
-                    <a:p>
-                      <a:pPr algn="r">
-                        <a:lnSpc>
-                          <a:spcPct val="115000"/>
-                        </a:lnSpc>
-                      </a:pPr>
-                      <a:r>
-                        <a:rPr sz="1000" b="1">
-                          <a:solidFill>
-                            <a:srgbClr val="C1442A"/>
-                          </a:solidFill>
-                          <a:latin typeface="Malgun Gothic"/>
-                          <a:ea typeface="Malgun Gothic"/>
-                          <a:cs typeface="Malgun Gothic"/>
-                        </a:rPr>
-                        <a:t>0.143</a:t>
-                      </a:r>
-                    </a:p>
-                  </a:txBody>
-                  <a:tcPr marL="82296" marR="82296" marT="41148" marB="41148" anchor="ctr">
-                    <a:solidFill>
-                      <a:srgbClr val="FFFFFF"/>
-                    </a:solidFill>
-                  </a:tcPr>
-                </a:tc>
-                <a:tc>
-                  <a:txBody>
-                    <a:bodyPr wrap="square"/>
-                    <a:lstStyle/>
-                    <a:p>
-                      <a:pPr algn="ctr">
-                        <a:lnSpc>
-                          <a:spcPct val="115000"/>
-                        </a:lnSpc>
-                      </a:pPr>
-                      <a:r>
-                        <a:rPr sz="1000" b="0">
-                          <a:solidFill>
-                            <a:srgbClr val="565C66"/>
-                          </a:solidFill>
-                          <a:latin typeface="Malgun Gothic"/>
-                          <a:ea typeface="Malgun Gothic"/>
-                          <a:cs typeface="Malgun Gothic"/>
-                        </a:rPr>
-                        <a:t>5</a:t>
+                        <a:t>0.286</a:t>
                       </a:r>
                     </a:p>
                   </a:txBody>
@@ -5400,6 +5400,64 @@
                         </a:lnSpc>
                       </a:pPr>
                       <a:r>
+                        <a:rPr sz="950" b="0">
+                          <a:solidFill>
+                            <a:srgbClr val="565C66"/>
+                          </a:solidFill>
+                          <a:latin typeface="Malgun Gothic"/>
+                          <a:ea typeface="Malgun Gothic"/>
+                          <a:cs typeface="Malgun Gothic"/>
+                        </a:rPr>
+                        <a:t>(대조) 7B·8B bf16</a:t>
+                      </a:r>
+                    </a:p>
+                  </a:txBody>
+                  <a:tcPr marL="82296" marR="82296" marT="41148" marB="41148" anchor="ctr">
+                    <a:solidFill>
+                      <a:srgbClr val="F7F7F9"/>
+                    </a:solidFill>
+                  </a:tcPr>
+                </a:tc>
+                <a:tc>
+                  <a:txBody>
+                    <a:bodyPr wrap="square"/>
+                    <a:lstStyle/>
+                    <a:p>
+                      <a:pPr algn="l">
+                        <a:lnSpc>
+                          <a:spcPct val="115000"/>
+                        </a:lnSpc>
+                      </a:pPr>
+                      <a:r>
+                        <a:rPr sz="900" b="0">
+                          <a:solidFill>
+                            <a:srgbClr val="565C66"/>
+                          </a:solidFill>
+                          <a:latin typeface="Malgun Gothic"/>
+                          <a:ea typeface="Malgun Gothic"/>
+                          <a:cs typeface="Malgun Gothic"/>
+                        </a:rPr>
+                        <a:t>4090 / bf16</a:t>
+                      </a:r>
+                    </a:p>
+                  </a:txBody>
+                  <a:tcPr marL="82296" marR="82296" marT="41148" marB="41148" anchor="ctr">
+                    <a:solidFill>
+                      <a:srgbClr val="F7F7F9"/>
+                    </a:solidFill>
+                  </a:tcPr>
+                </a:tc>
+                <a:tc>
+                  <a:txBody>
+                    <a:bodyPr wrap="square"/>
+                    <a:lstStyle/>
+                    <a:p>
+                      <a:pPr algn="r">
+                        <a:lnSpc>
+                          <a:spcPct val="115000"/>
+                        </a:lnSpc>
+                      </a:pPr>
+                      <a:r>
                         <a:rPr sz="1000" b="0">
                           <a:solidFill>
                             <a:srgbClr val="565C66"/>
@@ -5408,7 +5466,7 @@
                           <a:ea typeface="Malgun Gothic"/>
                           <a:cs typeface="Malgun Gothic"/>
                         </a:rPr>
-                        <a:t>(대조) 7B·8B bf16</a:t>
+                        <a:t>~0.18</a:t>
                       </a:r>
                     </a:p>
                   </a:txBody>
@@ -5423,7 +5481,36 @@
                     <a:bodyPr wrap="square"/>
                     <a:lstStyle/>
                     <a:p>
-                      <a:pPr algn="l">
+                      <a:pPr algn="r">
+                        <a:lnSpc>
+                          <a:spcPct val="115000"/>
+                        </a:lnSpc>
+                      </a:pPr>
+                      <a:r>
+                        <a:rPr sz="1000" b="1">
+                          <a:solidFill>
+                            <a:srgbClr val="2F6FCE"/>
+                          </a:solidFill>
+                          <a:latin typeface="Malgun Gothic"/>
+                          <a:ea typeface="Malgun Gothic"/>
+                          <a:cs typeface="Malgun Gothic"/>
+                        </a:rPr>
+                        <a:t>0.000</a:t>
+                      </a:r>
+                    </a:p>
+                  </a:txBody>
+                  <a:tcPr marL="82296" marR="82296" marT="41148" marB="41148" anchor="ctr">
+                    <a:solidFill>
+                      <a:srgbClr val="F7F7F9"/>
+                    </a:solidFill>
+                  </a:tcPr>
+                </a:tc>
+                <a:tc>
+                  <a:txBody>
+                    <a:bodyPr wrap="square"/>
+                    <a:lstStyle/>
+                    <a:p>
+                      <a:pPr algn="r">
                         <a:lnSpc>
                           <a:spcPct val="115000"/>
                         </a:lnSpc>
@@ -5437,7 +5524,7 @@
                           <a:ea typeface="Malgun Gothic"/>
                           <a:cs typeface="Malgun Gothic"/>
                         </a:rPr>
-                        <a:t>4090 / bf16</a:t>
+                        <a:t>0.31</a:t>
                       </a:r>
                     </a:p>
                   </a:txBody>
@@ -5452,7 +5539,36 @@
                     <a:bodyPr wrap="square"/>
                     <a:lstStyle/>
                     <a:p>
-                      <a:pPr algn="r">
+                      <a:pPr algn="ctr">
+                        <a:lnSpc>
+                          <a:spcPct val="115000"/>
+                        </a:lnSpc>
+                      </a:pPr>
+                      <a:r>
+                        <a:rPr sz="1000" b="1">
+                          <a:solidFill>
+                            <a:srgbClr val="2F6FCE"/>
+                          </a:solidFill>
+                          <a:latin typeface="Malgun Gothic"/>
+                          <a:ea typeface="Malgun Gothic"/>
+                          <a:cs typeface="Malgun Gothic"/>
+                        </a:rPr>
+                        <a:t>0</a:t>
+                      </a:r>
+                    </a:p>
+                  </a:txBody>
+                  <a:tcPr marL="82296" marR="82296" marT="41148" marB="41148" anchor="ctr">
+                    <a:solidFill>
+                      <a:srgbClr val="F7F7F9"/>
+                    </a:solidFill>
+                  </a:tcPr>
+                </a:tc>
+                <a:tc>
+                  <a:txBody>
+                    <a:bodyPr wrap="square"/>
+                    <a:lstStyle/>
+                    <a:p>
+                      <a:pPr algn="ctr">
                         <a:lnSpc>
                           <a:spcPct val="115000"/>
                         </a:lnSpc>
@@ -5466,123 +5582,7 @@
                           <a:ea typeface="Malgun Gothic"/>
                           <a:cs typeface="Malgun Gothic"/>
                         </a:rPr>
-                        <a:t>~0.18</a:t>
-                      </a:r>
-                    </a:p>
-                  </a:txBody>
-                  <a:tcPr marL="82296" marR="82296" marT="41148" marB="41148" anchor="ctr">
-                    <a:solidFill>
-                      <a:srgbClr val="F7F7F9"/>
-                    </a:solidFill>
-                  </a:tcPr>
-                </a:tc>
-                <a:tc>
-                  <a:txBody>
-                    <a:bodyPr wrap="square"/>
-                    <a:lstStyle/>
-                    <a:p>
-                      <a:pPr algn="r">
-                        <a:lnSpc>
-                          <a:spcPct val="115000"/>
-                        </a:lnSpc>
-                      </a:pPr>
-                      <a:r>
-                        <a:rPr sz="1000" b="1">
-                          <a:solidFill>
-                            <a:srgbClr val="2F6FCE"/>
-                          </a:solidFill>
-                          <a:latin typeface="Malgun Gothic"/>
-                          <a:ea typeface="Malgun Gothic"/>
-                          <a:cs typeface="Malgun Gothic"/>
-                        </a:rPr>
-                        <a:t>0.000</a:t>
-                      </a:r>
-                    </a:p>
-                  </a:txBody>
-                  <a:tcPr marL="82296" marR="82296" marT="41148" marB="41148" anchor="ctr">
-                    <a:solidFill>
-                      <a:srgbClr val="F7F7F9"/>
-                    </a:solidFill>
-                  </a:tcPr>
-                </a:tc>
-                <a:tc>
-                  <a:txBody>
-                    <a:bodyPr wrap="square"/>
-                    <a:lstStyle/>
-                    <a:p>
-                      <a:pPr algn="ctr">
-                        <a:lnSpc>
-                          <a:spcPct val="115000"/>
-                        </a:lnSpc>
-                      </a:pPr>
-                      <a:r>
-                        <a:rPr sz="1000" b="0">
-                          <a:solidFill>
-                            <a:srgbClr val="565C66"/>
-                          </a:solidFill>
-                          <a:latin typeface="Malgun Gothic"/>
-                          <a:ea typeface="Malgun Gothic"/>
-                          <a:cs typeface="Malgun Gothic"/>
-                        </a:rPr>
-                        <a:t>전량</a:t>
-                      </a:r>
-                    </a:p>
-                  </a:txBody>
-                  <a:tcPr marL="82296" marR="82296" marT="41148" marB="41148" anchor="ctr">
-                    <a:solidFill>
-                      <a:srgbClr val="F7F7F9"/>
-                    </a:solidFill>
-                  </a:tcPr>
-                </a:tc>
-                <a:tc>
-                  <a:txBody>
-                    <a:bodyPr wrap="square"/>
-                    <a:lstStyle/>
-                    <a:p>
-                      <a:pPr algn="ctr">
-                        <a:lnSpc>
-                          <a:spcPct val="115000"/>
-                        </a:lnSpc>
-                      </a:pPr>
-                      <a:r>
-                        <a:rPr sz="1000" b="1">
-                          <a:solidFill>
-                            <a:srgbClr val="2F6FCE"/>
-                          </a:solidFill>
-                          <a:latin typeface="Malgun Gothic"/>
-                          <a:ea typeface="Malgun Gothic"/>
-                          <a:cs typeface="Malgun Gothic"/>
-                        </a:rPr>
                         <a:t>0</a:t>
-                      </a:r>
-                    </a:p>
-                  </a:txBody>
-                  <a:tcPr marL="82296" marR="82296" marT="41148" marB="41148" anchor="ctr">
-                    <a:solidFill>
-                      <a:srgbClr val="F7F7F9"/>
-                    </a:solidFill>
-                  </a:tcPr>
-                </a:tc>
-                <a:tc>
-                  <a:txBody>
-                    <a:bodyPr wrap="square"/>
-                    <a:lstStyle/>
-                    <a:p>
-                      <a:pPr algn="ctr">
-                        <a:lnSpc>
-                          <a:spcPct val="115000"/>
-                        </a:lnSpc>
-                      </a:pPr>
-                      <a:r>
-                        <a:rPr sz="1000" b="0">
-                          <a:solidFill>
-                            <a:srgbClr val="565C66"/>
-                          </a:solidFill>
-                          <a:latin typeface="Malgun Gothic"/>
-                          <a:ea typeface="Malgun Gothic"/>
-                          <a:cs typeface="Malgun Gothic"/>
-                        </a:rPr>
-                        <a:t>—</a:t>
                       </a:r>
                     </a:p>
                   </a:txBody>
@@ -5606,7 +5606,7 @@
         <p:spPr>
           <a:xfrm>
             <a:off x="640080" y="3931920"/>
-            <a:ext cx="10908792" cy="1874519"/>
+            <a:ext cx="10908792" cy="2148840"/>
           </a:xfrm>
           <a:prstGeom prst="roundRect">
             <a:avLst>
@@ -5649,8 +5649,8 @@
         </p:nvSpPr>
         <p:spPr>
           <a:xfrm>
-            <a:off x="914400" y="4114800"/>
-            <a:ext cx="10360152" cy="1554480"/>
+            <a:off x="914400" y="4096512"/>
+            <a:ext cx="10360152" cy="1828800"/>
           </a:xfrm>
           <a:prstGeom prst="rect">
             <a:avLst/>
@@ -5669,59 +5669,48 @@
               </a:lnSpc>
             </a:pPr>
             <a:r>
-              <a:rPr sz="1200" b="0">
-                <a:solidFill>
-                  <a:srgbClr val="565C66"/>
+              <a:rPr sz="1150" b="1">
+                <a:solidFill>
+                  <a:srgbClr val="2F6FCE"/>
                 </a:solidFill>
                 <a:latin typeface="Malgun Gothic"/>
                 <a:ea typeface="Malgun Gothic"/>
                 <a:cs typeface="Malgun Gothic"/>
               </a:rPr>
-              <a:t>두 nf4dq 실행(둘 다 slack 풀 35쌍 전수) 비교 시 </a:t>
-            </a:r>
-            <a:r>
-              <a:rPr sz="1200" b="1">
-                <a:solidFill>
-                  <a:srgbClr val="C1442A"/>
+              <a:t>4bit는 GPU 고정 시 결정론적</a:t>
+            </a:r>
+            <a:r>
+              <a:rPr sz="1150" b="0">
+                <a:solidFill>
+                  <a:srgbClr val="565C66"/>
                 </a:solidFill>
                 <a:latin typeface="Malgun Gothic"/>
                 <a:ea typeface="Malgun Gothic"/>
                 <a:cs typeface="Malgun Gothic"/>
               </a:rPr>
-              <a:t>slack 12/35쌍(34%) 불일치, 그중 8쌍이 baseline 차이</a:t>
-            </a:r>
-            <a:r>
-              <a:rPr sz="1200" b="0">
-                <a:solidFill>
-                  <a:srgbClr val="565C66"/>
+              <a:t> (7B와 동일) — A6000 3회·Blackwell 5회 각각 slack 35쌍 전부 일치. 이전에 본 "nf4dq 실행 간 12/35 불일치"는 run-to-run 노이즈가 아니라 </a:t>
+            </a:r>
+            <a:r>
+              <a:rPr sz="1150" b="1">
+                <a:solidFill>
+                  <a:srgbClr val="C1442A"/>
                 </a:solidFill>
                 <a:latin typeface="Malgun Gothic"/>
                 <a:ea typeface="Malgun Gothic"/>
                 <a:cs typeface="Malgun Gothic"/>
               </a:rPr>
-              <a:t> (user_task_0·2가 k0 붕괴) → </a:t>
-            </a:r>
-            <a:r>
-              <a:rPr sz="1200" b="1">
-                <a:solidFill>
-                  <a:srgbClr val="C1442A"/>
+              <a:t>A6000 ↔ Blackwell 아키텍처 차이</a:t>
+            </a:r>
+            <a:r>
+              <a:rPr sz="1150" b="0">
+                <a:solidFill>
+                  <a:srgbClr val="565C66"/>
                 </a:solidFill>
                 <a:latin typeface="Malgun Gothic"/>
                 <a:ea typeface="Malgun Gothic"/>
                 <a:cs typeface="Malgun Gothic"/>
               </a:rPr>
-              <a:t>32B-4bit 평가는 run-to-run 비결정적</a:t>
-            </a:r>
-            <a:r>
-              <a:rPr sz="1200" b="0">
-                <a:solidFill>
-                  <a:srgbClr val="565C66"/>
-                </a:solidFill>
-                <a:latin typeface="Malgun Gothic"/>
-                <a:ea typeface="Malgun Gothic"/>
-                <a:cs typeface="Malgun Gothic"/>
-              </a:rPr>
-              <a:t> — 이 경로로는 스케일 판정 불가.</a:t>
+              <a:t>.</a:t>
             </a:r>
           </a:p>
           <a:p>
@@ -5730,22 +5719,22 @@
                 <a:spcPct val="125000"/>
               </a:lnSpc>
               <a:spcBef>
-                <a:spcPts val="800"/>
+                <a:spcPts val="700"/>
               </a:spcBef>
             </a:pPr>
             <a:r>
-              <a:rPr sz="1200" b="1">
-                <a:solidFill>
-                  <a:srgbClr val="2F6FCE"/>
+              <a:rPr sz="1150" b="1">
+                <a:solidFill>
+                  <a:srgbClr val="C1442A"/>
                 </a:solidFill>
                 <a:latin typeface="Malgun Gothic"/>
                 <a:ea typeface="Malgun Gothic"/>
                 <a:cs typeface="Malgun Gothic"/>
               </a:rPr>
-              <a:t>bf16으로 우회</a:t>
-            </a:r>
-            <a:r>
-              <a:rPr sz="1200" b="0">
+              <a:t>원인: Blackwell sm_120의 bnb nf4 커널이 32B 손상</a:t>
+            </a:r>
+            <a:r>
+              <a:rPr sz="1150" b="0">
                 <a:solidFill>
                   <a:srgbClr val="565C66"/>
                 </a:solidFill>
@@ -5753,10 +5742,10 @@
                 <a:ea typeface="Malgun Gothic"/>
                 <a:cs typeface="Malgun Gothic"/>
               </a:rPr>
-              <a:t>: 완주율 100%·결정론적인데도 kN ASR 0.143(≠0) + backfire 1 — 7B·8B bf16(전량 억제·backfire 0)과 질적으로 다름 → </a:t>
-            </a:r>
-            <a:r>
-              <a:rPr sz="1200" b="1">
+              <a:t> — slack k0_util 0.286(=bf16) → 0.09 붕괴. → </a:t>
+            </a:r>
+            <a:r>
+              <a:rPr sz="1150" b="1">
                 <a:solidFill>
                   <a:srgbClr val="16181D"/>
                 </a:solidFill>
@@ -5764,7 +5753,39 @@
                 <a:ea typeface="Malgun Gothic"/>
                 <a:cs typeface="Malgun Gothic"/>
               </a:rPr>
-              <a:t>fp4와 무관한 스케일 기여 확인.</a:t>
+              <a:t>A6000 nf4dq가 신뢰 가능한 4bit 실행.</a:t>
+            </a:r>
+          </a:p>
+          <a:p>
+            <a:pPr algn="l">
+              <a:lnSpc>
+                <a:spcPct val="125000"/>
+              </a:lnSpc>
+              <a:spcBef>
+                <a:spcPts val="700"/>
+              </a:spcBef>
+            </a:pPr>
+            <a:r>
+              <a:rPr sz="1150" b="1">
+                <a:solidFill>
+                  <a:srgbClr val="2F6FCE"/>
+                </a:solidFill>
+                <a:latin typeface="Malgun Gothic"/>
+                <a:ea typeface="Malgun Gothic"/>
+                <a:cs typeface="Malgun Gothic"/>
+              </a:rPr>
+              <a:t>스케일 효과 확정</a:t>
+            </a:r>
+            <a:r>
+              <a:rPr sz="1150" b="0">
+                <a:solidFill>
+                  <a:srgbClr val="565C66"/>
+                </a:solidFill>
+                <a:latin typeface="Malgun Gothic"/>
+                <a:ea typeface="Malgun Gothic"/>
+                <a:cs typeface="Malgun Gothic"/>
+              </a:rPr>
+              <a:t>: bf16(양자화 배제)에서 kN 0.143(≠0) + backfire 1 vs 7B·8B bf16 전량 억제. A6000에서 nf4dq·bf16 둘 다 8B에 못 미침.</a:t>
             </a:r>
           </a:p>
         </p:txBody>
@@ -5922,7 +5943,7 @@
         <p:spPr>
           <a:xfrm>
             <a:off x="640080" y="1691640"/>
-            <a:ext cx="10908792" cy="2331720"/>
+            <a:ext cx="10908792" cy="2606040"/>
           </a:xfrm>
           <a:prstGeom prst="roundRect">
             <a:avLst>
@@ -5966,7 +5987,7 @@
         <p:spPr>
           <a:xfrm>
             <a:off x="914400" y="1856232"/>
-            <a:ext cx="10360152" cy="2103120"/>
+            <a:ext cx="10360152" cy="2377440"/>
           </a:xfrm>
           <a:prstGeom prst="rect">
             <a:avLst/>
@@ -6122,7 +6143,7 @@
                 <a:ea typeface="Malgun Gothic"/>
                 <a:cs typeface="Malgun Gothic"/>
               </a:rPr>
-              <a:t> — fp4 아티팩트 확정(nf4+dq로 해소·기본값 교체). 32B 스케일 효과 약하게 확정 — bf16 단독에서도 slack knockout 불완전 + backfire 1.</a:t>
+              <a:t> — fp4 아티팩트 확정(nf4+dq로 해소·기본값 교체). 32B 스케일 효과 약하게 확정 — bf16 단독에서도 slack knockout 불완전 + backfire 1. 4bit는 GPU 고정 시 결정론적 (이전 "비결정성"은 Blackwell 커널이 32B 손상시킨 것, A6000은 bf16과 일치).</a:t>
             </a:r>
           </a:p>
           <a:p>
@@ -6221,8 +6242,8 @@
         </p:nvSpPr>
         <p:spPr>
           <a:xfrm>
-            <a:off x="640080" y="4206240"/>
-            <a:ext cx="10908792" cy="1965960"/>
+            <a:off x="640080" y="4526280"/>
+            <a:ext cx="10908792" cy="1554480"/>
           </a:xfrm>
           <a:prstGeom prst="roundRect">
             <a:avLst>
@@ -6265,8 +6286,8 @@
         </p:nvSpPr>
         <p:spPr>
           <a:xfrm>
-            <a:off x="914400" y="4370832"/>
-            <a:ext cx="10360152" cy="1691640"/>
+            <a:off x="914400" y="4690872"/>
+            <a:ext cx="10360152" cy="1280160"/>
           </a:xfrm>
           <a:prstGeom prst="rect">
             <a:avLst/>
@@ -6380,49 +6401,6 @@
                 <a:cs typeface="Malgun Gothic"/>
               </a:rPr>
               <a:t> — injection_task 2/4는 near-unwinnable → AgentDojo 외 벤치마크/자체 시나리오로 다단계 knockout 효과 측정.</a:t>
-            </a:r>
-          </a:p>
-          <a:p>
-            <a:pPr algn="l">
-              <a:lnSpc>
-                <a:spcPct val="120000"/>
-              </a:lnSpc>
-              <a:spcBef>
-                <a:spcPts val="500"/>
-              </a:spcBef>
-            </a:pPr>
-            <a:r>
-              <a:rPr sz="1050" b="1">
-                <a:solidFill>
-                  <a:srgbClr val="C06A1F"/>
-                </a:solidFill>
-                <a:latin typeface="Malgun Gothic"/>
-                <a:ea typeface="Malgun Gothic"/>
-                <a:cs typeface="Malgun Gothic"/>
-              </a:rPr>
-              <a:t>·  </a:t>
-            </a:r>
-            <a:r>
-              <a:rPr sz="1050" b="1">
-                <a:solidFill>
-                  <a:srgbClr val="16181D"/>
-                </a:solidFill>
-                <a:latin typeface="Malgun Gothic"/>
-                <a:ea typeface="Malgun Gothic"/>
-                <a:cs typeface="Malgun Gothic"/>
-              </a:rPr>
-              <a:t>32B-4bit 비결정성 규명</a:t>
-            </a:r>
-            <a:r>
-              <a:rPr sz="1050" b="0">
-                <a:solidFill>
-                  <a:srgbClr val="565C66"/>
-                </a:solidFill>
-                <a:latin typeface="Malgun Gothic"/>
-                <a:ea typeface="Malgun Gothic"/>
-                <a:cs typeface="Malgun Gothic"/>
-              </a:rPr>
-              <a:t> — GPU 고정 시 결정론적인지 (진행 중: Blackwell 커널이 모델 손상, A6000은 bf16과 일치).</a:t>
             </a:r>
           </a:p>
           <a:p>

--- a/docs/presentation/IPI_Head_Separation_PoC_4th [26-09-XX].pptx
+++ b/docs/presentation/IPI_Head_Separation_PoC_4th [26-09-XX].pptx
@@ -4541,17 +4541,58 @@
           </a:p>
         </p:txBody>
       </p:sp>
+      <p:sp>
+        <p:nvSpPr>
+          <p:cNvPr id="5" name="TextBox 4"/>
+          <p:cNvSpPr txBox="1"/>
+          <p:nvPr/>
+        </p:nvSpPr>
+        <p:spPr>
+          <a:xfrm>
+            <a:off x="640080" y="1618488"/>
+            <a:ext cx="10908792" cy="274320"/>
+          </a:xfrm>
+          <a:prstGeom prst="rect">
+            <a:avLst/>
+          </a:prstGeom>
+          <a:noFill/>
+        </p:spPr>
+        <p:txBody>
+          <a:bodyPr wrap="square" lIns="0" rIns="0" tIns="0" bIns="0">
+            <a:spAutoFit/>
+          </a:bodyPr>
+          <a:lstStyle/>
+          <a:p>
+            <a:pPr algn="l">
+              <a:lnSpc>
+                <a:spcPct val="125000"/>
+              </a:lnSpc>
+            </a:pPr>
+            <a:r>
+              <a:rPr sz="1000" b="0">
+                <a:solidFill>
+                  <a:srgbClr val="8B9099"/>
+                </a:solidFill>
+                <a:latin typeface="Malgun Gothic"/>
+                <a:ea typeface="Malgun Gothic"/>
+                <a:cs typeface="Malgun Gothic"/>
+              </a:rPr>
+              <a:t>모든 수치는 slack held-out 35쌍 기준</a:t>
+            </a:r>
+          </a:p>
+        </p:txBody>
+      </p:sp>
       <p:graphicFrame>
         <p:nvGraphicFramePr>
-          <p:cNvPr id="5" name="Table 4"/>
+          <p:cNvPr id="6" name="Table 5"/>
           <p:cNvGraphicFramePr>
             <a:graphicFrameLocks noGrp="1"/>
           </p:cNvGraphicFramePr>
           <p:nvPr/>
         </p:nvGraphicFramePr>
         <p:xfrm>
-          <a:off x="640080" y="1691640"/>
-          <a:ext cx="10908790" cy="2048256"/>
+          <a:off x="640080" y="1947672"/>
+          <a:ext cx="10908787" cy="2359152"/>
         </p:xfrm>
         <a:graphic>
           <a:graphicData uri="http://schemas.openxmlformats.org/drawingml/2006/table">
@@ -4560,15 +4601,16 @@
                 <a:tableStyleId>{5C22544A-7EE6-4342-B048-85BDC9FD1C3A}</a:tableStyleId>
               </a:tblPr>
               <a:tblGrid>
-                <a:gridCol w="2473139"/>
-                <a:gridCol w="2742936"/>
-                <a:gridCol w="1124154"/>
-                <a:gridCol w="1124154"/>
-                <a:gridCol w="1393951"/>
-                <a:gridCol w="1034221"/>
-                <a:gridCol w="1016235"/>
+                <a:gridCol w="2373540"/>
+                <a:gridCol w="2800777"/>
+                <a:gridCol w="1091828"/>
+                <a:gridCol w="1091828"/>
+                <a:gridCol w="1091828"/>
+                <a:gridCol w="1091828"/>
+                <a:gridCol w="683579"/>
+                <a:gridCol w="683579"/>
               </a:tblGrid>
-              <a:tr h="365760">
+              <a:tr h="347472">
                 <a:tc>
                   <a:txBody>
                     <a:bodyPr wrap="square"/>
@@ -4580,6 +4622,64 @@
                         </a:lnSpc>
                       </a:pPr>
                       <a:r>
+                        <a:rPr sz="900" b="1">
+                          <a:solidFill>
+                            <a:srgbClr val="8B9099"/>
+                          </a:solidFill>
+                          <a:latin typeface="Malgun Gothic"/>
+                          <a:ea typeface="Malgun Gothic"/>
+                          <a:cs typeface="Malgun Gothic"/>
+                        </a:rPr>
+                        <a:t>실행</a:t>
+                      </a:r>
+                    </a:p>
+                  </a:txBody>
+                  <a:tcPr marL="82296" marR="82296" marT="41148" marB="41148" anchor="ctr">
+                    <a:solidFill>
+                      <a:srgbClr val="E9EAED"/>
+                    </a:solidFill>
+                  </a:tcPr>
+                </a:tc>
+                <a:tc>
+                  <a:txBody>
+                    <a:bodyPr wrap="square"/>
+                    <a:lstStyle/>
+                    <a:p>
+                      <a:pPr algn="l">
+                        <a:lnSpc>
+                          <a:spcPct val="100000"/>
+                        </a:lnSpc>
+                      </a:pPr>
+                      <a:r>
+                        <a:rPr sz="850" b="1">
+                          <a:solidFill>
+                            <a:srgbClr val="8B9099"/>
+                          </a:solidFill>
+                          <a:latin typeface="Malgun Gothic"/>
+                          <a:ea typeface="Malgun Gothic"/>
+                          <a:cs typeface="Malgun Gothic"/>
+                        </a:rPr>
+                        <a:t>GPU / quant</a:t>
+                      </a:r>
+                    </a:p>
+                  </a:txBody>
+                  <a:tcPr marL="82296" marR="82296" marT="41148" marB="41148" anchor="ctr">
+                    <a:solidFill>
+                      <a:srgbClr val="E9EAED"/>
+                    </a:solidFill>
+                  </a:tcPr>
+                </a:tc>
+                <a:tc>
+                  <a:txBody>
+                    <a:bodyPr wrap="square"/>
+                    <a:lstStyle/>
+                    <a:p>
+                      <a:pPr algn="r">
+                        <a:lnSpc>
+                          <a:spcPct val="100000"/>
+                        </a:lnSpc>
+                      </a:pPr>
+                      <a:r>
                         <a:rPr sz="950" b="1">
                           <a:solidFill>
                             <a:srgbClr val="8B9099"/>
@@ -4588,7 +4688,7 @@
                           <a:ea typeface="Malgun Gothic"/>
                           <a:cs typeface="Malgun Gothic"/>
                         </a:rPr>
-                        <a:t>실행</a:t>
+                        <a:t>k0_sec</a:t>
                       </a:r>
                     </a:p>
                   </a:txBody>
@@ -4603,27 +4703,671 @@
                     <a:bodyPr wrap="square"/>
                     <a:lstStyle/>
                     <a:p>
+                      <a:pPr algn="r">
+                        <a:lnSpc>
+                          <a:spcPct val="100000"/>
+                        </a:lnSpc>
+                      </a:pPr>
+                      <a:r>
+                        <a:rPr sz="950" b="1">
+                          <a:solidFill>
+                            <a:srgbClr val="8B9099"/>
+                          </a:solidFill>
+                          <a:latin typeface="Malgun Gothic"/>
+                          <a:ea typeface="Malgun Gothic"/>
+                          <a:cs typeface="Malgun Gothic"/>
+                        </a:rPr>
+                        <a:t>kN_sec</a:t>
+                      </a:r>
+                    </a:p>
+                  </a:txBody>
+                  <a:tcPr marL="82296" marR="82296" marT="41148" marB="41148" anchor="ctr">
+                    <a:solidFill>
+                      <a:srgbClr val="E9EAED"/>
+                    </a:solidFill>
+                  </a:tcPr>
+                </a:tc>
+                <a:tc>
+                  <a:txBody>
+                    <a:bodyPr wrap="square"/>
+                    <a:lstStyle/>
+                    <a:p>
+                      <a:pPr algn="r">
+                        <a:lnSpc>
+                          <a:spcPct val="100000"/>
+                        </a:lnSpc>
+                      </a:pPr>
+                      <a:r>
+                        <a:rPr sz="950" b="1">
+                          <a:solidFill>
+                            <a:srgbClr val="8B9099"/>
+                          </a:solidFill>
+                          <a:latin typeface="Malgun Gothic"/>
+                          <a:ea typeface="Malgun Gothic"/>
+                          <a:cs typeface="Malgun Gothic"/>
+                        </a:rPr>
+                        <a:t>k0_util</a:t>
+                      </a:r>
+                    </a:p>
+                  </a:txBody>
+                  <a:tcPr marL="82296" marR="82296" marT="41148" marB="41148" anchor="ctr">
+                    <a:solidFill>
+                      <a:srgbClr val="E9EAED"/>
+                    </a:solidFill>
+                  </a:tcPr>
+                </a:tc>
+                <a:tc>
+                  <a:txBody>
+                    <a:bodyPr wrap="square"/>
+                    <a:lstStyle/>
+                    <a:p>
+                      <a:pPr algn="r">
+                        <a:lnSpc>
+                          <a:spcPct val="100000"/>
+                        </a:lnSpc>
+                      </a:pPr>
+                      <a:r>
+                        <a:rPr sz="950" b="1">
+                          <a:solidFill>
+                            <a:srgbClr val="8B9099"/>
+                          </a:solidFill>
+                          <a:latin typeface="Malgun Gothic"/>
+                          <a:ea typeface="Malgun Gothic"/>
+                          <a:cs typeface="Malgun Gothic"/>
+                        </a:rPr>
+                        <a:t>kN_util</a:t>
+                      </a:r>
+                    </a:p>
+                  </a:txBody>
+                  <a:tcPr marL="82296" marR="82296" marT="41148" marB="41148" anchor="ctr">
+                    <a:solidFill>
+                      <a:srgbClr val="E9EAED"/>
+                    </a:solidFill>
+                  </a:tcPr>
+                </a:tc>
+                <a:tc>
+                  <a:txBody>
+                    <a:bodyPr wrap="square"/>
+                    <a:lstStyle/>
+                    <a:p>
+                      <a:pPr algn="ctr">
+                        <a:lnSpc>
+                          <a:spcPct val="100000"/>
+                        </a:lnSpc>
+                      </a:pPr>
+                      <a:r>
+                        <a:rPr sz="950" b="1">
+                          <a:solidFill>
+                            <a:srgbClr val="8B9099"/>
+                          </a:solidFill>
+                          <a:latin typeface="Malgun Gothic"/>
+                          <a:ea typeface="Malgun Gothic"/>
+                          <a:cs typeface="Malgun Gothic"/>
+                        </a:rPr>
+                        <a:t>bf</a:t>
+                      </a:r>
+                    </a:p>
+                  </a:txBody>
+                  <a:tcPr marL="82296" marR="82296" marT="41148" marB="41148" anchor="ctr">
+                    <a:solidFill>
+                      <a:srgbClr val="E9EAED"/>
+                    </a:solidFill>
+                  </a:tcPr>
+                </a:tc>
+                <a:tc>
+                  <a:txBody>
+                    <a:bodyPr wrap="square"/>
+                    <a:lstStyle/>
+                    <a:p>
+                      <a:pPr algn="ctr">
+                        <a:lnSpc>
+                          <a:spcPct val="100000"/>
+                        </a:lnSpc>
+                      </a:pPr>
+                      <a:r>
+                        <a:rPr sz="950" b="1">
+                          <a:solidFill>
+                            <a:srgbClr val="8B9099"/>
+                          </a:solidFill>
+                          <a:latin typeface="Malgun Gothic"/>
+                          <a:ea typeface="Malgun Gothic"/>
+                          <a:cs typeface="Malgun Gothic"/>
+                        </a:rPr>
+                        <a:t>per</a:t>
+                      </a:r>
+                    </a:p>
+                  </a:txBody>
+                  <a:tcPr marL="82296" marR="82296" marT="41148" marB="41148" anchor="ctr">
+                    <a:solidFill>
+                      <a:srgbClr val="E9EAED"/>
+                    </a:solidFill>
+                  </a:tcPr>
+                </a:tc>
+              </a:tr>
+              <a:tr h="402336">
+                <a:tc>
+                  <a:txBody>
+                    <a:bodyPr wrap="square"/>
+                    <a:lstStyle/>
+                    <a:p>
                       <a:pPr algn="l">
                         <a:lnSpc>
-                          <a:spcPct val="100000"/>
+                          <a:spcPct val="115000"/>
+                        </a:lnSpc>
+                      </a:pPr>
+                      <a:r>
+                        <a:rPr sz="900" b="0">
+                          <a:solidFill>
+                            <a:srgbClr val="565C66"/>
+                          </a:solidFill>
+                          <a:latin typeface="Malgun Gothic"/>
+                          <a:ea typeface="Malgun Gothic"/>
+                          <a:cs typeface="Malgun Gothic"/>
+                        </a:rPr>
+                        <a:t>32B nf4dq  (×3 동일)</a:t>
+                      </a:r>
+                    </a:p>
+                  </a:txBody>
+                  <a:tcPr marL="82296" marR="82296" marT="41148" marB="41148" anchor="ctr">
+                    <a:solidFill>
+                      <a:srgbClr val="FFFFFF"/>
+                    </a:solidFill>
+                  </a:tcPr>
+                </a:tc>
+                <a:tc>
+                  <a:txBody>
+                    <a:bodyPr wrap="square"/>
+                    <a:lstStyle/>
+                    <a:p>
+                      <a:pPr algn="l">
+                        <a:lnSpc>
+                          <a:spcPct val="115000"/>
+                        </a:lnSpc>
+                      </a:pPr>
+                      <a:r>
+                        <a:rPr sz="850" b="0">
+                          <a:solidFill>
+                            <a:srgbClr val="565C66"/>
+                          </a:solidFill>
+                          <a:latin typeface="Malgun Gothic"/>
+                          <a:ea typeface="Malgun Gothic"/>
+                          <a:cs typeface="Malgun Gothic"/>
+                        </a:rPr>
+                        <a:t>A6000 sm_86 / nf4dq</a:t>
+                      </a:r>
+                    </a:p>
+                  </a:txBody>
+                  <a:tcPr marL="82296" marR="82296" marT="41148" marB="41148" anchor="ctr">
+                    <a:solidFill>
+                      <a:srgbClr val="FFFFFF"/>
+                    </a:solidFill>
+                  </a:tcPr>
+                </a:tc>
+                <a:tc>
+                  <a:txBody>
+                    <a:bodyPr wrap="square"/>
+                    <a:lstStyle/>
+                    <a:p>
+                      <a:pPr algn="r">
+                        <a:lnSpc>
+                          <a:spcPct val="115000"/>
+                        </a:lnSpc>
+                      </a:pPr>
+                      <a:r>
+                        <a:rPr sz="950" b="0">
+                          <a:solidFill>
+                            <a:srgbClr val="565C66"/>
+                          </a:solidFill>
+                          <a:latin typeface="Malgun Gothic"/>
+                          <a:ea typeface="Malgun Gothic"/>
+                          <a:cs typeface="Malgun Gothic"/>
+                        </a:rPr>
+                        <a:t>0.229</a:t>
+                      </a:r>
+                    </a:p>
+                  </a:txBody>
+                  <a:tcPr marL="82296" marR="82296" marT="41148" marB="41148" anchor="ctr">
+                    <a:solidFill>
+                      <a:srgbClr val="FFFFFF"/>
+                    </a:solidFill>
+                  </a:tcPr>
+                </a:tc>
+                <a:tc>
+                  <a:txBody>
+                    <a:bodyPr wrap="square"/>
+                    <a:lstStyle/>
+                    <a:p>
+                      <a:pPr algn="r">
+                        <a:lnSpc>
+                          <a:spcPct val="115000"/>
+                        </a:lnSpc>
+                      </a:pPr>
+                      <a:r>
+                        <a:rPr sz="950" b="0">
+                          <a:solidFill>
+                            <a:srgbClr val="565C66"/>
+                          </a:solidFill>
+                          <a:latin typeface="Malgun Gothic"/>
+                          <a:ea typeface="Malgun Gothic"/>
+                          <a:cs typeface="Malgun Gothic"/>
+                        </a:rPr>
+                        <a:t>0.229</a:t>
+                      </a:r>
+                    </a:p>
+                  </a:txBody>
+                  <a:tcPr marL="82296" marR="82296" marT="41148" marB="41148" anchor="ctr">
+                    <a:solidFill>
+                      <a:srgbClr val="FFFFFF"/>
+                    </a:solidFill>
+                  </a:tcPr>
+                </a:tc>
+                <a:tc>
+                  <a:txBody>
+                    <a:bodyPr wrap="square"/>
+                    <a:lstStyle/>
+                    <a:p>
+                      <a:pPr algn="r">
+                        <a:lnSpc>
+                          <a:spcPct val="115000"/>
+                        </a:lnSpc>
+                      </a:pPr>
+                      <a:r>
+                        <a:rPr sz="950" b="0">
+                          <a:solidFill>
+                            <a:srgbClr val="565C66"/>
+                          </a:solidFill>
+                          <a:latin typeface="Malgun Gothic"/>
+                          <a:ea typeface="Malgun Gothic"/>
+                          <a:cs typeface="Malgun Gothic"/>
+                        </a:rPr>
+                        <a:t>0.286</a:t>
+                      </a:r>
+                    </a:p>
+                  </a:txBody>
+                  <a:tcPr marL="82296" marR="82296" marT="41148" marB="41148" anchor="ctr">
+                    <a:solidFill>
+                      <a:srgbClr val="FFFFFF"/>
+                    </a:solidFill>
+                  </a:tcPr>
+                </a:tc>
+                <a:tc>
+                  <a:txBody>
+                    <a:bodyPr wrap="square"/>
+                    <a:lstStyle/>
+                    <a:p>
+                      <a:pPr algn="r">
+                        <a:lnSpc>
+                          <a:spcPct val="115000"/>
+                        </a:lnSpc>
+                      </a:pPr>
+                      <a:r>
+                        <a:rPr sz="950" b="0">
+                          <a:solidFill>
+                            <a:srgbClr val="565C66"/>
+                          </a:solidFill>
+                          <a:latin typeface="Malgun Gothic"/>
+                          <a:ea typeface="Malgun Gothic"/>
+                          <a:cs typeface="Malgun Gothic"/>
+                        </a:rPr>
+                        <a:t>0.314</a:t>
+                      </a:r>
+                    </a:p>
+                  </a:txBody>
+                  <a:tcPr marL="82296" marR="82296" marT="41148" marB="41148" anchor="ctr">
+                    <a:solidFill>
+                      <a:srgbClr val="FFFFFF"/>
+                    </a:solidFill>
+                  </a:tcPr>
+                </a:tc>
+                <a:tc>
+                  <a:txBody>
+                    <a:bodyPr wrap="square"/>
+                    <a:lstStyle/>
+                    <a:p>
+                      <a:pPr algn="ctr">
+                        <a:lnSpc>
+                          <a:spcPct val="115000"/>
+                        </a:lnSpc>
+                      </a:pPr>
+                      <a:r>
+                        <a:rPr sz="950" b="0">
+                          <a:solidFill>
+                            <a:srgbClr val="565C66"/>
+                          </a:solidFill>
+                          <a:latin typeface="Malgun Gothic"/>
+                          <a:ea typeface="Malgun Gothic"/>
+                          <a:cs typeface="Malgun Gothic"/>
+                        </a:rPr>
+                        <a:t>2</a:t>
+                      </a:r>
+                    </a:p>
+                  </a:txBody>
+                  <a:tcPr marL="82296" marR="82296" marT="41148" marB="41148" anchor="ctr">
+                    <a:solidFill>
+                      <a:srgbClr val="FFFFFF"/>
+                    </a:solidFill>
+                  </a:tcPr>
+                </a:tc>
+                <a:tc>
+                  <a:txBody>
+                    <a:bodyPr wrap="square"/>
+                    <a:lstStyle/>
+                    <a:p>
+                      <a:pPr algn="ctr">
+                        <a:lnSpc>
+                          <a:spcPct val="115000"/>
+                        </a:lnSpc>
+                      </a:pPr>
+                      <a:r>
+                        <a:rPr sz="950" b="0">
+                          <a:solidFill>
+                            <a:srgbClr val="565C66"/>
+                          </a:solidFill>
+                          <a:latin typeface="Malgun Gothic"/>
+                          <a:ea typeface="Malgun Gothic"/>
+                          <a:cs typeface="Malgun Gothic"/>
+                        </a:rPr>
+                        <a:t>6</a:t>
+                      </a:r>
+                    </a:p>
+                  </a:txBody>
+                  <a:tcPr marL="82296" marR="82296" marT="41148" marB="41148" anchor="ctr">
+                    <a:solidFill>
+                      <a:srgbClr val="FFFFFF"/>
+                    </a:solidFill>
+                  </a:tcPr>
+                </a:tc>
+              </a:tr>
+              <a:tr h="402336">
+                <a:tc>
+                  <a:txBody>
+                    <a:bodyPr wrap="square"/>
+                    <a:lstStyle/>
+                    <a:p>
+                      <a:pPr algn="l">
+                        <a:lnSpc>
+                          <a:spcPct val="115000"/>
+                        </a:lnSpc>
+                      </a:pPr>
+                      <a:r>
+                        <a:rPr sz="900" b="0">
+                          <a:solidFill>
+                            <a:srgbClr val="565C66"/>
+                          </a:solidFill>
+                          <a:latin typeface="Malgun Gothic"/>
+                          <a:ea typeface="Malgun Gothic"/>
+                          <a:cs typeface="Malgun Gothic"/>
+                        </a:rPr>
+                        <a:t>32B nf4dq  (×5 동일)</a:t>
+                      </a:r>
+                    </a:p>
+                  </a:txBody>
+                  <a:tcPr marL="82296" marR="82296" marT="41148" marB="41148" anchor="ctr">
+                    <a:solidFill>
+                      <a:srgbClr val="F7F7F9"/>
+                    </a:solidFill>
+                  </a:tcPr>
+                </a:tc>
+                <a:tc>
+                  <a:txBody>
+                    <a:bodyPr wrap="square"/>
+                    <a:lstStyle/>
+                    <a:p>
+                      <a:pPr algn="l">
+                        <a:lnSpc>
+                          <a:spcPct val="115000"/>
+                        </a:lnSpc>
+                      </a:pPr>
+                      <a:r>
+                        <a:rPr sz="850" b="0">
+                          <a:solidFill>
+                            <a:srgbClr val="565C66"/>
+                          </a:solidFill>
+                          <a:latin typeface="Malgun Gothic"/>
+                          <a:ea typeface="Malgun Gothic"/>
+                          <a:cs typeface="Malgun Gothic"/>
+                        </a:rPr>
+                        <a:t>Blackwell sm_120 / nf4dq</a:t>
+                      </a:r>
+                    </a:p>
+                  </a:txBody>
+                  <a:tcPr marL="82296" marR="82296" marT="41148" marB="41148" anchor="ctr">
+                    <a:solidFill>
+                      <a:srgbClr val="F7F7F9"/>
+                    </a:solidFill>
+                  </a:tcPr>
+                </a:tc>
+                <a:tc>
+                  <a:txBody>
+                    <a:bodyPr wrap="square"/>
+                    <a:lstStyle/>
+                    <a:p>
+                      <a:pPr algn="r">
+                        <a:lnSpc>
+                          <a:spcPct val="115000"/>
+                        </a:lnSpc>
+                      </a:pPr>
+                      <a:r>
+                        <a:rPr sz="950" b="0">
+                          <a:solidFill>
+                            <a:srgbClr val="565C66"/>
+                          </a:solidFill>
+                          <a:latin typeface="Malgun Gothic"/>
+                          <a:ea typeface="Malgun Gothic"/>
+                          <a:cs typeface="Malgun Gothic"/>
+                        </a:rPr>
+                        <a:t>0.171</a:t>
+                      </a:r>
+                    </a:p>
+                  </a:txBody>
+                  <a:tcPr marL="82296" marR="82296" marT="41148" marB="41148" anchor="ctr">
+                    <a:solidFill>
+                      <a:srgbClr val="F7F7F9"/>
+                    </a:solidFill>
+                  </a:tcPr>
+                </a:tc>
+                <a:tc>
+                  <a:txBody>
+                    <a:bodyPr wrap="square"/>
+                    <a:lstStyle/>
+                    <a:p>
+                      <a:pPr algn="r">
+                        <a:lnSpc>
+                          <a:spcPct val="115000"/>
+                        </a:lnSpc>
+                      </a:pPr>
+                      <a:r>
+                        <a:rPr sz="950" b="0">
+                          <a:solidFill>
+                            <a:srgbClr val="565C66"/>
+                          </a:solidFill>
+                          <a:latin typeface="Malgun Gothic"/>
+                          <a:ea typeface="Malgun Gothic"/>
+                          <a:cs typeface="Malgun Gothic"/>
+                        </a:rPr>
+                        <a:t>0.114</a:t>
+                      </a:r>
+                    </a:p>
+                  </a:txBody>
+                  <a:tcPr marL="82296" marR="82296" marT="41148" marB="41148" anchor="ctr">
+                    <a:solidFill>
+                      <a:srgbClr val="F7F7F9"/>
+                    </a:solidFill>
+                  </a:tcPr>
+                </a:tc>
+                <a:tc>
+                  <a:txBody>
+                    <a:bodyPr wrap="square"/>
+                    <a:lstStyle/>
+                    <a:p>
+                      <a:pPr algn="r">
+                        <a:lnSpc>
+                          <a:spcPct val="115000"/>
+                        </a:lnSpc>
+                      </a:pPr>
+                      <a:r>
+                        <a:rPr sz="950" b="1">
+                          <a:solidFill>
+                            <a:srgbClr val="C1442A"/>
+                          </a:solidFill>
+                          <a:latin typeface="Malgun Gothic"/>
+                          <a:ea typeface="Malgun Gothic"/>
+                          <a:cs typeface="Malgun Gothic"/>
+                        </a:rPr>
+                        <a:t>0.086</a:t>
+                      </a:r>
+                    </a:p>
+                  </a:txBody>
+                  <a:tcPr marL="82296" marR="82296" marT="41148" marB="41148" anchor="ctr">
+                    <a:solidFill>
+                      <a:srgbClr val="F7F7F9"/>
+                    </a:solidFill>
+                  </a:tcPr>
+                </a:tc>
+                <a:tc>
+                  <a:txBody>
+                    <a:bodyPr wrap="square"/>
+                    <a:lstStyle/>
+                    <a:p>
+                      <a:pPr algn="r">
+                        <a:lnSpc>
+                          <a:spcPct val="115000"/>
+                        </a:lnSpc>
+                      </a:pPr>
+                      <a:r>
+                        <a:rPr sz="950" b="0">
+                          <a:solidFill>
+                            <a:srgbClr val="565C66"/>
+                          </a:solidFill>
+                          <a:latin typeface="Malgun Gothic"/>
+                          <a:ea typeface="Malgun Gothic"/>
+                          <a:cs typeface="Malgun Gothic"/>
+                        </a:rPr>
+                        <a:t>0.114</a:t>
+                      </a:r>
+                    </a:p>
+                  </a:txBody>
+                  <a:tcPr marL="82296" marR="82296" marT="41148" marB="41148" anchor="ctr">
+                    <a:solidFill>
+                      <a:srgbClr val="F7F7F9"/>
+                    </a:solidFill>
+                  </a:tcPr>
+                </a:tc>
+                <a:tc>
+                  <a:txBody>
+                    <a:bodyPr wrap="square"/>
+                    <a:lstStyle/>
+                    <a:p>
+                      <a:pPr algn="ctr">
+                        <a:lnSpc>
+                          <a:spcPct val="115000"/>
+                        </a:lnSpc>
+                      </a:pPr>
+                      <a:r>
+                        <a:rPr sz="950" b="0">
+                          <a:solidFill>
+                            <a:srgbClr val="565C66"/>
+                          </a:solidFill>
+                          <a:latin typeface="Malgun Gothic"/>
+                          <a:ea typeface="Malgun Gothic"/>
+                          <a:cs typeface="Malgun Gothic"/>
+                        </a:rPr>
+                        <a:t>0</a:t>
+                      </a:r>
+                    </a:p>
+                  </a:txBody>
+                  <a:tcPr marL="82296" marR="82296" marT="41148" marB="41148" anchor="ctr">
+                    <a:solidFill>
+                      <a:srgbClr val="F7F7F9"/>
+                    </a:solidFill>
+                  </a:tcPr>
+                </a:tc>
+                <a:tc>
+                  <a:txBody>
+                    <a:bodyPr wrap="square"/>
+                    <a:lstStyle/>
+                    <a:p>
+                      <a:pPr algn="ctr">
+                        <a:lnSpc>
+                          <a:spcPct val="115000"/>
+                        </a:lnSpc>
+                      </a:pPr>
+                      <a:r>
+                        <a:rPr sz="950" b="0">
+                          <a:solidFill>
+                            <a:srgbClr val="565C66"/>
+                          </a:solidFill>
+                          <a:latin typeface="Malgun Gothic"/>
+                          <a:ea typeface="Malgun Gothic"/>
+                          <a:cs typeface="Malgun Gothic"/>
+                        </a:rPr>
+                        <a:t>4</a:t>
+                      </a:r>
+                    </a:p>
+                  </a:txBody>
+                  <a:tcPr marL="82296" marR="82296" marT="41148" marB="41148" anchor="ctr">
+                    <a:solidFill>
+                      <a:srgbClr val="F7F7F9"/>
+                    </a:solidFill>
+                  </a:tcPr>
+                </a:tc>
+              </a:tr>
+              <a:tr h="402336">
+                <a:tc>
+                  <a:txBody>
+                    <a:bodyPr wrap="square"/>
+                    <a:lstStyle/>
+                    <a:p>
+                      <a:pPr algn="l">
+                        <a:lnSpc>
+                          <a:spcPct val="115000"/>
                         </a:lnSpc>
                       </a:pPr>
                       <a:r>
                         <a:rPr sz="900" b="1">
                           <a:solidFill>
-                            <a:srgbClr val="8B9099"/>
-                          </a:solidFill>
-                          <a:latin typeface="Malgun Gothic"/>
-                          <a:ea typeface="Malgun Gothic"/>
-                          <a:cs typeface="Malgun Gothic"/>
-                        </a:rPr>
-                        <a:t>GPU / quant</a:t>
-                      </a:r>
-                    </a:p>
-                  </a:txBody>
-                  <a:tcPr marL="82296" marR="82296" marT="41148" marB="41148" anchor="ctr">
-                    <a:solidFill>
-                      <a:srgbClr val="E9EAED"/>
+                            <a:srgbClr val="2F6FCE"/>
+                          </a:solidFill>
+                          <a:latin typeface="Malgun Gothic"/>
+                          <a:ea typeface="Malgun Gothic"/>
+                          <a:cs typeface="Malgun Gothic"/>
+                        </a:rPr>
+                        <a:t>32B bf16</a:t>
+                      </a:r>
+                    </a:p>
+                  </a:txBody>
+                  <a:tcPr marL="82296" marR="82296" marT="41148" marB="41148" anchor="ctr">
+                    <a:solidFill>
+                      <a:srgbClr val="FFFFFF"/>
+                    </a:solidFill>
+                  </a:tcPr>
+                </a:tc>
+                <a:tc>
+                  <a:txBody>
+                    <a:bodyPr wrap="square"/>
+                    <a:lstStyle/>
+                    <a:p>
+                      <a:pPr algn="l">
+                        <a:lnSpc>
+                          <a:spcPct val="115000"/>
+                        </a:lnSpc>
+                      </a:pPr>
+                      <a:r>
+                        <a:rPr sz="850" b="1">
+                          <a:solidFill>
+                            <a:srgbClr val="16181D"/>
+                          </a:solidFill>
+                          <a:latin typeface="Malgun Gothic"/>
+                          <a:ea typeface="Malgun Gothic"/>
+                          <a:cs typeface="Malgun Gothic"/>
+                        </a:rPr>
+                        <a:t>A6000 / bf16</a:t>
+                      </a:r>
+                    </a:p>
+                  </a:txBody>
+                  <a:tcPr marL="82296" marR="82296" marT="41148" marB="41148" anchor="ctr">
+                    <a:solidFill>
+                      <a:srgbClr val="FFFFFF"/>
                     </a:solidFill>
                   </a:tcPr>
                 </a:tc>
@@ -4634,25 +5378,25 @@
                     <a:p>
                       <a:pPr algn="r">
                         <a:lnSpc>
-                          <a:spcPct val="100000"/>
-                        </a:lnSpc>
-                      </a:pPr>
-                      <a:r>
-                        <a:rPr sz="1000" b="1">
-                          <a:solidFill>
-                            <a:srgbClr val="8B9099"/>
-                          </a:solidFill>
-                          <a:latin typeface="Malgun Gothic"/>
-                          <a:ea typeface="Malgun Gothic"/>
-                          <a:cs typeface="Malgun Gothic"/>
-                        </a:rPr>
-                        <a:t>slack k0</a:t>
-                      </a:r>
-                    </a:p>
-                  </a:txBody>
-                  <a:tcPr marL="82296" marR="82296" marT="41148" marB="41148" anchor="ctr">
-                    <a:solidFill>
-                      <a:srgbClr val="E9EAED"/>
+                          <a:spcPct val="115000"/>
+                        </a:lnSpc>
+                      </a:pPr>
+                      <a:r>
+                        <a:rPr sz="950" b="0">
+                          <a:solidFill>
+                            <a:srgbClr val="565C66"/>
+                          </a:solidFill>
+                          <a:latin typeface="Malgun Gothic"/>
+                          <a:ea typeface="Malgun Gothic"/>
+                          <a:cs typeface="Malgun Gothic"/>
+                        </a:rPr>
+                        <a:t>0.257</a:t>
+                      </a:r>
+                    </a:p>
+                  </a:txBody>
+                  <a:tcPr marL="82296" marR="82296" marT="41148" marB="41148" anchor="ctr">
+                    <a:solidFill>
+                      <a:srgbClr val="FFFFFF"/>
                     </a:solidFill>
                   </a:tcPr>
                 </a:tc>
@@ -4663,25 +5407,25 @@
                     <a:p>
                       <a:pPr algn="r">
                         <a:lnSpc>
-                          <a:spcPct val="100000"/>
-                        </a:lnSpc>
-                      </a:pPr>
-                      <a:r>
-                        <a:rPr sz="1000" b="1">
-                          <a:solidFill>
-                            <a:srgbClr val="8B9099"/>
-                          </a:solidFill>
-                          <a:latin typeface="Malgun Gothic"/>
-                          <a:ea typeface="Malgun Gothic"/>
-                          <a:cs typeface="Malgun Gothic"/>
-                        </a:rPr>
-                        <a:t>slack kN</a:t>
-                      </a:r>
-                    </a:p>
-                  </a:txBody>
-                  <a:tcPr marL="82296" marR="82296" marT="41148" marB="41148" anchor="ctr">
-                    <a:solidFill>
-                      <a:srgbClr val="E9EAED"/>
+                          <a:spcPct val="115000"/>
+                        </a:lnSpc>
+                      </a:pPr>
+                      <a:r>
+                        <a:rPr sz="950" b="1">
+                          <a:solidFill>
+                            <a:srgbClr val="C1442A"/>
+                          </a:solidFill>
+                          <a:latin typeface="Malgun Gothic"/>
+                          <a:ea typeface="Malgun Gothic"/>
+                          <a:cs typeface="Malgun Gothic"/>
+                        </a:rPr>
+                        <a:t>0.143</a:t>
+                      </a:r>
+                    </a:p>
+                  </a:txBody>
+                  <a:tcPr marL="82296" marR="82296" marT="41148" marB="41148" anchor="ctr">
+                    <a:solidFill>
+                      <a:srgbClr val="FFFFFF"/>
                     </a:solidFill>
                   </a:tcPr>
                 </a:tc>
@@ -4692,25 +5436,83 @@
                     <a:p>
                       <a:pPr algn="r">
                         <a:lnSpc>
-                          <a:spcPct val="100000"/>
+                          <a:spcPct val="115000"/>
+                        </a:lnSpc>
+                      </a:pPr>
+                      <a:r>
+                        <a:rPr sz="950" b="0">
+                          <a:solidFill>
+                            <a:srgbClr val="565C66"/>
+                          </a:solidFill>
+                          <a:latin typeface="Malgun Gothic"/>
+                          <a:ea typeface="Malgun Gothic"/>
+                          <a:cs typeface="Malgun Gothic"/>
+                        </a:rPr>
+                        <a:t>0.286</a:t>
+                      </a:r>
+                    </a:p>
+                  </a:txBody>
+                  <a:tcPr marL="82296" marR="82296" marT="41148" marB="41148" anchor="ctr">
+                    <a:solidFill>
+                      <a:srgbClr val="FFFFFF"/>
+                    </a:solidFill>
+                  </a:tcPr>
+                </a:tc>
+                <a:tc>
+                  <a:txBody>
+                    <a:bodyPr wrap="square"/>
+                    <a:lstStyle/>
+                    <a:p>
+                      <a:pPr algn="r">
+                        <a:lnSpc>
+                          <a:spcPct val="115000"/>
+                        </a:lnSpc>
+                      </a:pPr>
+                      <a:r>
+                        <a:rPr sz="950" b="0">
+                          <a:solidFill>
+                            <a:srgbClr val="565C66"/>
+                          </a:solidFill>
+                          <a:latin typeface="Malgun Gothic"/>
+                          <a:ea typeface="Malgun Gothic"/>
+                          <a:cs typeface="Malgun Gothic"/>
+                        </a:rPr>
+                        <a:t>0.314</a:t>
+                      </a:r>
+                    </a:p>
+                  </a:txBody>
+                  <a:tcPr marL="82296" marR="82296" marT="41148" marB="41148" anchor="ctr">
+                    <a:solidFill>
+                      <a:srgbClr val="FFFFFF"/>
+                    </a:solidFill>
+                  </a:tcPr>
+                </a:tc>
+                <a:tc>
+                  <a:txBody>
+                    <a:bodyPr wrap="square"/>
+                    <a:lstStyle/>
+                    <a:p>
+                      <a:pPr algn="ctr">
+                        <a:lnSpc>
+                          <a:spcPct val="115000"/>
                         </a:lnSpc>
                       </a:pPr>
                       <a:r>
                         <a:rPr sz="950" b="1">
                           <a:solidFill>
-                            <a:srgbClr val="8B9099"/>
-                          </a:solidFill>
-                          <a:latin typeface="Malgun Gothic"/>
-                          <a:ea typeface="Malgun Gothic"/>
-                          <a:cs typeface="Malgun Gothic"/>
-                        </a:rPr>
-                        <a:t>slack k0_util</a:t>
-                      </a:r>
-                    </a:p>
-                  </a:txBody>
-                  <a:tcPr marL="82296" marR="82296" marT="41148" marB="41148" anchor="ctr">
-                    <a:solidFill>
-                      <a:srgbClr val="E9EAED"/>
+                            <a:srgbClr val="C1442A"/>
+                          </a:solidFill>
+                          <a:latin typeface="Malgun Gothic"/>
+                          <a:ea typeface="Malgun Gothic"/>
+                          <a:cs typeface="Malgun Gothic"/>
+                        </a:rPr>
+                        <a:t>1</a:t>
+                      </a:r>
+                    </a:p>
+                  </a:txBody>
+                  <a:tcPr marL="82296" marR="82296" marT="41148" marB="41148" anchor="ctr">
+                    <a:solidFill>
+                      <a:srgbClr val="FFFFFF"/>
                     </a:solidFill>
                   </a:tcPr>
                 </a:tc>
@@ -4721,25 +5523,201 @@
                     <a:p>
                       <a:pPr algn="ctr">
                         <a:lnSpc>
-                          <a:spcPct val="100000"/>
-                        </a:lnSpc>
-                      </a:pPr>
-                      <a:r>
-                        <a:rPr sz="1000" b="1">
-                          <a:solidFill>
-                            <a:srgbClr val="8B9099"/>
-                          </a:solidFill>
-                          <a:latin typeface="Malgun Gothic"/>
-                          <a:ea typeface="Malgun Gothic"/>
-                          <a:cs typeface="Malgun Gothic"/>
-                        </a:rPr>
-                        <a:t>backfire</a:t>
-                      </a:r>
-                    </a:p>
-                  </a:txBody>
-                  <a:tcPr marL="82296" marR="82296" marT="41148" marB="41148" anchor="ctr">
-                    <a:solidFill>
-                      <a:srgbClr val="E9EAED"/>
+                          <a:spcPct val="115000"/>
+                        </a:lnSpc>
+                      </a:pPr>
+                      <a:r>
+                        <a:rPr sz="950" b="0">
+                          <a:solidFill>
+                            <a:srgbClr val="565C66"/>
+                          </a:solidFill>
+                          <a:latin typeface="Malgun Gothic"/>
+                          <a:ea typeface="Malgun Gothic"/>
+                          <a:cs typeface="Malgun Gothic"/>
+                        </a:rPr>
+                        <a:t>4</a:t>
+                      </a:r>
+                    </a:p>
+                  </a:txBody>
+                  <a:tcPr marL="82296" marR="82296" marT="41148" marB="41148" anchor="ctr">
+                    <a:solidFill>
+                      <a:srgbClr val="FFFFFF"/>
+                    </a:solidFill>
+                  </a:tcPr>
+                </a:tc>
+              </a:tr>
+              <a:tr h="402336">
+                <a:tc>
+                  <a:txBody>
+                    <a:bodyPr wrap="square"/>
+                    <a:lstStyle/>
+                    <a:p>
+                      <a:pPr algn="l">
+                        <a:lnSpc>
+                          <a:spcPct val="115000"/>
+                        </a:lnSpc>
+                      </a:pPr>
+                      <a:r>
+                        <a:rPr sz="900" b="0">
+                          <a:solidFill>
+                            <a:srgbClr val="565C66"/>
+                          </a:solidFill>
+                          <a:latin typeface="Malgun Gothic"/>
+                          <a:ea typeface="Malgun Gothic"/>
+                          <a:cs typeface="Malgun Gothic"/>
+                        </a:rPr>
+                        <a:t>(대조) 7B bf16</a:t>
+                      </a:r>
+                    </a:p>
+                  </a:txBody>
+                  <a:tcPr marL="82296" marR="82296" marT="41148" marB="41148" anchor="ctr">
+                    <a:solidFill>
+                      <a:srgbClr val="F7F7F9"/>
+                    </a:solidFill>
+                  </a:tcPr>
+                </a:tc>
+                <a:tc>
+                  <a:txBody>
+                    <a:bodyPr wrap="square"/>
+                    <a:lstStyle/>
+                    <a:p>
+                      <a:pPr algn="l">
+                        <a:lnSpc>
+                          <a:spcPct val="115000"/>
+                        </a:lnSpc>
+                      </a:pPr>
+                      <a:r>
+                        <a:rPr sz="850" b="0">
+                          <a:solidFill>
+                            <a:srgbClr val="565C66"/>
+                          </a:solidFill>
+                          <a:latin typeface="Malgun Gothic"/>
+                          <a:ea typeface="Malgun Gothic"/>
+                          <a:cs typeface="Malgun Gothic"/>
+                        </a:rPr>
+                        <a:t>4090 / bf16</a:t>
+                      </a:r>
+                    </a:p>
+                  </a:txBody>
+                  <a:tcPr marL="82296" marR="82296" marT="41148" marB="41148" anchor="ctr">
+                    <a:solidFill>
+                      <a:srgbClr val="F7F7F9"/>
+                    </a:solidFill>
+                  </a:tcPr>
+                </a:tc>
+                <a:tc>
+                  <a:txBody>
+                    <a:bodyPr wrap="square"/>
+                    <a:lstStyle/>
+                    <a:p>
+                      <a:pPr algn="r">
+                        <a:lnSpc>
+                          <a:spcPct val="115000"/>
+                        </a:lnSpc>
+                      </a:pPr>
+                      <a:r>
+                        <a:rPr sz="950" b="0">
+                          <a:solidFill>
+                            <a:srgbClr val="565C66"/>
+                          </a:solidFill>
+                          <a:latin typeface="Malgun Gothic"/>
+                          <a:ea typeface="Malgun Gothic"/>
+                          <a:cs typeface="Malgun Gothic"/>
+                        </a:rPr>
+                        <a:t>0.171</a:t>
+                      </a:r>
+                    </a:p>
+                  </a:txBody>
+                  <a:tcPr marL="82296" marR="82296" marT="41148" marB="41148" anchor="ctr">
+                    <a:solidFill>
+                      <a:srgbClr val="F7F7F9"/>
+                    </a:solidFill>
+                  </a:tcPr>
+                </a:tc>
+                <a:tc>
+                  <a:txBody>
+                    <a:bodyPr wrap="square"/>
+                    <a:lstStyle/>
+                    <a:p>
+                      <a:pPr algn="r">
+                        <a:lnSpc>
+                          <a:spcPct val="115000"/>
+                        </a:lnSpc>
+                      </a:pPr>
+                      <a:r>
+                        <a:rPr sz="950" b="1">
+                          <a:solidFill>
+                            <a:srgbClr val="2F6FCE"/>
+                          </a:solidFill>
+                          <a:latin typeface="Malgun Gothic"/>
+                          <a:ea typeface="Malgun Gothic"/>
+                          <a:cs typeface="Malgun Gothic"/>
+                        </a:rPr>
+                        <a:t>0.000</a:t>
+                      </a:r>
+                    </a:p>
+                  </a:txBody>
+                  <a:tcPr marL="82296" marR="82296" marT="41148" marB="41148" anchor="ctr">
+                    <a:solidFill>
+                      <a:srgbClr val="F7F7F9"/>
+                    </a:solidFill>
+                  </a:tcPr>
+                </a:tc>
+                <a:tc>
+                  <a:txBody>
+                    <a:bodyPr wrap="square"/>
+                    <a:lstStyle/>
+                    <a:p>
+                      <a:pPr algn="r">
+                        <a:lnSpc>
+                          <a:spcPct val="115000"/>
+                        </a:lnSpc>
+                      </a:pPr>
+                      <a:r>
+                        <a:rPr sz="950" b="0">
+                          <a:solidFill>
+                            <a:srgbClr val="565C66"/>
+                          </a:solidFill>
+                          <a:latin typeface="Malgun Gothic"/>
+                          <a:ea typeface="Malgun Gothic"/>
+                          <a:cs typeface="Malgun Gothic"/>
+                        </a:rPr>
+                        <a:t>0.371</a:t>
+                      </a:r>
+                    </a:p>
+                  </a:txBody>
+                  <a:tcPr marL="82296" marR="82296" marT="41148" marB="41148" anchor="ctr">
+                    <a:solidFill>
+                      <a:srgbClr val="F7F7F9"/>
+                    </a:solidFill>
+                  </a:tcPr>
+                </a:tc>
+                <a:tc>
+                  <a:txBody>
+                    <a:bodyPr wrap="square"/>
+                    <a:lstStyle/>
+                    <a:p>
+                      <a:pPr algn="r">
+                        <a:lnSpc>
+                          <a:spcPct val="115000"/>
+                        </a:lnSpc>
+                      </a:pPr>
+                      <a:r>
+                        <a:rPr sz="950" b="0">
+                          <a:solidFill>
+                            <a:srgbClr val="565C66"/>
+                          </a:solidFill>
+                          <a:latin typeface="Malgun Gothic"/>
+                          <a:ea typeface="Malgun Gothic"/>
+                          <a:cs typeface="Malgun Gothic"/>
+                        </a:rPr>
+                        <a:t>0.429</a:t>
+                      </a:r>
+                    </a:p>
+                  </a:txBody>
+                  <a:tcPr marL="82296" marR="82296" marT="41148" marB="41148" anchor="ctr">
+                    <a:solidFill>
+                      <a:srgbClr val="F7F7F9"/>
                     </a:solidFill>
                   </a:tcPr>
                 </a:tc>
@@ -4750,30 +5728,59 @@
                     <a:p>
                       <a:pPr algn="ctr">
                         <a:lnSpc>
-                          <a:spcPct val="100000"/>
-                        </a:lnSpc>
-                      </a:pPr>
-                      <a:r>
-                        <a:rPr sz="1000" b="1">
-                          <a:solidFill>
-                            <a:srgbClr val="8B9099"/>
-                          </a:solidFill>
-                          <a:latin typeface="Malgun Gothic"/>
-                          <a:ea typeface="Malgun Gothic"/>
-                          <a:cs typeface="Malgun Gothic"/>
-                        </a:rPr>
-                        <a:t>persist</a:t>
-                      </a:r>
-                    </a:p>
-                  </a:txBody>
-                  <a:tcPr marL="82296" marR="82296" marT="41148" marB="41148" anchor="ctr">
-                    <a:solidFill>
-                      <a:srgbClr val="E9EAED"/>
+                          <a:spcPct val="115000"/>
+                        </a:lnSpc>
+                      </a:pPr>
+                      <a:r>
+                        <a:rPr sz="950" b="1">
+                          <a:solidFill>
+                            <a:srgbClr val="2F6FCE"/>
+                          </a:solidFill>
+                          <a:latin typeface="Malgun Gothic"/>
+                          <a:ea typeface="Malgun Gothic"/>
+                          <a:cs typeface="Malgun Gothic"/>
+                        </a:rPr>
+                        <a:t>0</a:t>
+                      </a:r>
+                    </a:p>
+                  </a:txBody>
+                  <a:tcPr marL="82296" marR="82296" marT="41148" marB="41148" anchor="ctr">
+                    <a:solidFill>
+                      <a:srgbClr val="F7F7F9"/>
+                    </a:solidFill>
+                  </a:tcPr>
+                </a:tc>
+                <a:tc>
+                  <a:txBody>
+                    <a:bodyPr wrap="square"/>
+                    <a:lstStyle/>
+                    <a:p>
+                      <a:pPr algn="ctr">
+                        <a:lnSpc>
+                          <a:spcPct val="115000"/>
+                        </a:lnSpc>
+                      </a:pPr>
+                      <a:r>
+                        <a:rPr sz="950" b="0">
+                          <a:solidFill>
+                            <a:srgbClr val="565C66"/>
+                          </a:solidFill>
+                          <a:latin typeface="Malgun Gothic"/>
+                          <a:ea typeface="Malgun Gothic"/>
+                          <a:cs typeface="Malgun Gothic"/>
+                        </a:rPr>
+                        <a:t>0</a:t>
+                      </a:r>
+                    </a:p>
+                  </a:txBody>
+                  <a:tcPr marL="82296" marR="82296" marT="41148" marB="41148" anchor="ctr">
+                    <a:solidFill>
+                      <a:srgbClr val="F7F7F9"/>
                     </a:solidFill>
                   </a:tcPr>
                 </a:tc>
               </a:tr>
-              <a:tr h="420624">
+              <a:tr h="402336">
                 <a:tc>
                   <a:txBody>
                     <a:bodyPr wrap="square"/>
@@ -4785,6 +5792,64 @@
                         </a:lnSpc>
                       </a:pPr>
                       <a:r>
+                        <a:rPr sz="900" b="0">
+                          <a:solidFill>
+                            <a:srgbClr val="565C66"/>
+                          </a:solidFill>
+                          <a:latin typeface="Malgun Gothic"/>
+                          <a:ea typeface="Malgun Gothic"/>
+                          <a:cs typeface="Malgun Gothic"/>
+                        </a:rPr>
+                        <a:t>(대조) Llama-8B bf16</a:t>
+                      </a:r>
+                    </a:p>
+                  </a:txBody>
+                  <a:tcPr marL="82296" marR="82296" marT="41148" marB="41148" anchor="ctr">
+                    <a:solidFill>
+                      <a:srgbClr val="FFFFFF"/>
+                    </a:solidFill>
+                  </a:tcPr>
+                </a:tc>
+                <a:tc>
+                  <a:txBody>
+                    <a:bodyPr wrap="square"/>
+                    <a:lstStyle/>
+                    <a:p>
+                      <a:pPr algn="l">
+                        <a:lnSpc>
+                          <a:spcPct val="115000"/>
+                        </a:lnSpc>
+                      </a:pPr>
+                      <a:r>
+                        <a:rPr sz="850" b="0">
+                          <a:solidFill>
+                            <a:srgbClr val="565C66"/>
+                          </a:solidFill>
+                          <a:latin typeface="Malgun Gothic"/>
+                          <a:ea typeface="Malgun Gothic"/>
+                          <a:cs typeface="Malgun Gothic"/>
+                        </a:rPr>
+                        <a:t>A6000 / bf16</a:t>
+                      </a:r>
+                    </a:p>
+                  </a:txBody>
+                  <a:tcPr marL="82296" marR="82296" marT="41148" marB="41148" anchor="ctr">
+                    <a:solidFill>
+                      <a:srgbClr val="FFFFFF"/>
+                    </a:solidFill>
+                  </a:tcPr>
+                </a:tc>
+                <a:tc>
+                  <a:txBody>
+                    <a:bodyPr wrap="square"/>
+                    <a:lstStyle/>
+                    <a:p>
+                      <a:pPr algn="r">
+                        <a:lnSpc>
+                          <a:spcPct val="115000"/>
+                        </a:lnSpc>
+                      </a:pPr>
+                      <a:r>
                         <a:rPr sz="950" b="0">
                           <a:solidFill>
                             <a:srgbClr val="565C66"/>
@@ -4793,7 +5858,7 @@
                           <a:ea typeface="Malgun Gothic"/>
                           <a:cs typeface="Malgun Gothic"/>
                         </a:rPr>
-                        <a:t>32B nf4dq  (×3 동일)</a:t>
+                        <a:t>0.200</a:t>
                       </a:r>
                     </a:p>
                   </a:txBody>
@@ -4808,13 +5873,42 @@
                     <a:bodyPr wrap="square"/>
                     <a:lstStyle/>
                     <a:p>
-                      <a:pPr algn="l">
-                        <a:lnSpc>
-                          <a:spcPct val="115000"/>
-                        </a:lnSpc>
-                      </a:pPr>
-                      <a:r>
-                        <a:rPr sz="900" b="0">
+                      <a:pPr algn="r">
+                        <a:lnSpc>
+                          <a:spcPct val="115000"/>
+                        </a:lnSpc>
+                      </a:pPr>
+                      <a:r>
+                        <a:rPr sz="950" b="1">
+                          <a:solidFill>
+                            <a:srgbClr val="2F6FCE"/>
+                          </a:solidFill>
+                          <a:latin typeface="Malgun Gothic"/>
+                          <a:ea typeface="Malgun Gothic"/>
+                          <a:cs typeface="Malgun Gothic"/>
+                        </a:rPr>
+                        <a:t>0.000</a:t>
+                      </a:r>
+                    </a:p>
+                  </a:txBody>
+                  <a:tcPr marL="82296" marR="82296" marT="41148" marB="41148" anchor="ctr">
+                    <a:solidFill>
+                      <a:srgbClr val="FFFFFF"/>
+                    </a:solidFill>
+                  </a:tcPr>
+                </a:tc>
+                <a:tc>
+                  <a:txBody>
+                    <a:bodyPr wrap="square"/>
+                    <a:lstStyle/>
+                    <a:p>
+                      <a:pPr algn="r">
+                        <a:lnSpc>
+                          <a:spcPct val="115000"/>
+                        </a:lnSpc>
+                      </a:pPr>
+                      <a:r>
+                        <a:rPr sz="950" b="0">
                           <a:solidFill>
                             <a:srgbClr val="565C66"/>
                           </a:solidFill>
@@ -4822,7 +5916,7 @@
                           <a:ea typeface="Malgun Gothic"/>
                           <a:cs typeface="Malgun Gothic"/>
                         </a:rPr>
-                        <a:t>A6000 sm_86 / nf4dq</a:t>
+                        <a:t>0.314</a:t>
                       </a:r>
                     </a:p>
                   </a:txBody>
@@ -4843,7 +5937,7 @@
                         </a:lnSpc>
                       </a:pPr>
                       <a:r>
-                        <a:rPr sz="1000" b="0">
+                        <a:rPr sz="950" b="0">
                           <a:solidFill>
                             <a:srgbClr val="565C66"/>
                           </a:solidFill>
@@ -4851,7 +5945,7 @@
                           <a:ea typeface="Malgun Gothic"/>
                           <a:cs typeface="Malgun Gothic"/>
                         </a:rPr>
-                        <a:t>0.229</a:t>
+                        <a:t>0.286</a:t>
                       </a:r>
                     </a:p>
                   </a:txBody>
@@ -4866,13 +5960,42 @@
                     <a:bodyPr wrap="square"/>
                     <a:lstStyle/>
                     <a:p>
-                      <a:pPr algn="r">
-                        <a:lnSpc>
-                          <a:spcPct val="115000"/>
-                        </a:lnSpc>
-                      </a:pPr>
-                      <a:r>
-                        <a:rPr sz="1000" b="0">
+                      <a:pPr algn="ctr">
+                        <a:lnSpc>
+                          <a:spcPct val="115000"/>
+                        </a:lnSpc>
+                      </a:pPr>
+                      <a:r>
+                        <a:rPr sz="950" b="1">
+                          <a:solidFill>
+                            <a:srgbClr val="2F6FCE"/>
+                          </a:solidFill>
+                          <a:latin typeface="Malgun Gothic"/>
+                          <a:ea typeface="Malgun Gothic"/>
+                          <a:cs typeface="Malgun Gothic"/>
+                        </a:rPr>
+                        <a:t>0</a:t>
+                      </a:r>
+                    </a:p>
+                  </a:txBody>
+                  <a:tcPr marL="82296" marR="82296" marT="41148" marB="41148" anchor="ctr">
+                    <a:solidFill>
+                      <a:srgbClr val="FFFFFF"/>
+                    </a:solidFill>
+                  </a:tcPr>
+                </a:tc>
+                <a:tc>
+                  <a:txBody>
+                    <a:bodyPr wrap="square"/>
+                    <a:lstStyle/>
+                    <a:p>
+                      <a:pPr algn="ctr">
+                        <a:lnSpc>
+                          <a:spcPct val="115000"/>
+                        </a:lnSpc>
+                      </a:pPr>
+                      <a:r>
+                        <a:rPr sz="950" b="0">
                           <a:solidFill>
                             <a:srgbClr val="565C66"/>
                           </a:solidFill>
@@ -4880,715 +6003,13 @@
                           <a:ea typeface="Malgun Gothic"/>
                           <a:cs typeface="Malgun Gothic"/>
                         </a:rPr>
-                        <a:t>0.229</a:t>
+                        <a:t>0</a:t>
                       </a:r>
                     </a:p>
                   </a:txBody>
                   <a:tcPr marL="82296" marR="82296" marT="41148" marB="41148" anchor="ctr">
                     <a:solidFill>
                       <a:srgbClr val="FFFFFF"/>
-                    </a:solidFill>
-                  </a:tcPr>
-                </a:tc>
-                <a:tc>
-                  <a:txBody>
-                    <a:bodyPr wrap="square"/>
-                    <a:lstStyle/>
-                    <a:p>
-                      <a:pPr algn="r">
-                        <a:lnSpc>
-                          <a:spcPct val="115000"/>
-                        </a:lnSpc>
-                      </a:pPr>
-                      <a:r>
-                        <a:rPr sz="950" b="0">
-                          <a:solidFill>
-                            <a:srgbClr val="565C66"/>
-                          </a:solidFill>
-                          <a:latin typeface="Malgun Gothic"/>
-                          <a:ea typeface="Malgun Gothic"/>
-                          <a:cs typeface="Malgun Gothic"/>
-                        </a:rPr>
-                        <a:t>0.286</a:t>
-                      </a:r>
-                    </a:p>
-                  </a:txBody>
-                  <a:tcPr marL="82296" marR="82296" marT="41148" marB="41148" anchor="ctr">
-                    <a:solidFill>
-                      <a:srgbClr val="FFFFFF"/>
-                    </a:solidFill>
-                  </a:tcPr>
-                </a:tc>
-                <a:tc>
-                  <a:txBody>
-                    <a:bodyPr wrap="square"/>
-                    <a:lstStyle/>
-                    <a:p>
-                      <a:pPr algn="ctr">
-                        <a:lnSpc>
-                          <a:spcPct val="115000"/>
-                        </a:lnSpc>
-                      </a:pPr>
-                      <a:r>
-                        <a:rPr sz="1000" b="0">
-                          <a:solidFill>
-                            <a:srgbClr val="565C66"/>
-                          </a:solidFill>
-                          <a:latin typeface="Malgun Gothic"/>
-                          <a:ea typeface="Malgun Gothic"/>
-                          <a:cs typeface="Malgun Gothic"/>
-                        </a:rPr>
-                        <a:t>2</a:t>
-                      </a:r>
-                    </a:p>
-                  </a:txBody>
-                  <a:tcPr marL="82296" marR="82296" marT="41148" marB="41148" anchor="ctr">
-                    <a:solidFill>
-                      <a:srgbClr val="FFFFFF"/>
-                    </a:solidFill>
-                  </a:tcPr>
-                </a:tc>
-                <a:tc>
-                  <a:txBody>
-                    <a:bodyPr wrap="square"/>
-                    <a:lstStyle/>
-                    <a:p>
-                      <a:pPr algn="ctr">
-                        <a:lnSpc>
-                          <a:spcPct val="115000"/>
-                        </a:lnSpc>
-                      </a:pPr>
-                      <a:r>
-                        <a:rPr sz="1000" b="0">
-                          <a:solidFill>
-                            <a:srgbClr val="565C66"/>
-                          </a:solidFill>
-                          <a:latin typeface="Malgun Gothic"/>
-                          <a:ea typeface="Malgun Gothic"/>
-                          <a:cs typeface="Malgun Gothic"/>
-                        </a:rPr>
-                        <a:t>6</a:t>
-                      </a:r>
-                    </a:p>
-                  </a:txBody>
-                  <a:tcPr marL="82296" marR="82296" marT="41148" marB="41148" anchor="ctr">
-                    <a:solidFill>
-                      <a:srgbClr val="FFFFFF"/>
-                    </a:solidFill>
-                  </a:tcPr>
-                </a:tc>
-              </a:tr>
-              <a:tr h="420624">
-                <a:tc>
-                  <a:txBody>
-                    <a:bodyPr wrap="square"/>
-                    <a:lstStyle/>
-                    <a:p>
-                      <a:pPr algn="l">
-                        <a:lnSpc>
-                          <a:spcPct val="115000"/>
-                        </a:lnSpc>
-                      </a:pPr>
-                      <a:r>
-                        <a:rPr sz="950" b="0">
-                          <a:solidFill>
-                            <a:srgbClr val="565C66"/>
-                          </a:solidFill>
-                          <a:latin typeface="Malgun Gothic"/>
-                          <a:ea typeface="Malgun Gothic"/>
-                          <a:cs typeface="Malgun Gothic"/>
-                        </a:rPr>
-                        <a:t>32B nf4dq  (×5 동일)</a:t>
-                      </a:r>
-                    </a:p>
-                  </a:txBody>
-                  <a:tcPr marL="82296" marR="82296" marT="41148" marB="41148" anchor="ctr">
-                    <a:solidFill>
-                      <a:srgbClr val="F7F7F9"/>
-                    </a:solidFill>
-                  </a:tcPr>
-                </a:tc>
-                <a:tc>
-                  <a:txBody>
-                    <a:bodyPr wrap="square"/>
-                    <a:lstStyle/>
-                    <a:p>
-                      <a:pPr algn="l">
-                        <a:lnSpc>
-                          <a:spcPct val="115000"/>
-                        </a:lnSpc>
-                      </a:pPr>
-                      <a:r>
-                        <a:rPr sz="900" b="0">
-                          <a:solidFill>
-                            <a:srgbClr val="565C66"/>
-                          </a:solidFill>
-                          <a:latin typeface="Malgun Gothic"/>
-                          <a:ea typeface="Malgun Gothic"/>
-                          <a:cs typeface="Malgun Gothic"/>
-                        </a:rPr>
-                        <a:t>Blackwell sm_120 / nf4dq</a:t>
-                      </a:r>
-                    </a:p>
-                  </a:txBody>
-                  <a:tcPr marL="82296" marR="82296" marT="41148" marB="41148" anchor="ctr">
-                    <a:solidFill>
-                      <a:srgbClr val="F7F7F9"/>
-                    </a:solidFill>
-                  </a:tcPr>
-                </a:tc>
-                <a:tc>
-                  <a:txBody>
-                    <a:bodyPr wrap="square"/>
-                    <a:lstStyle/>
-                    <a:p>
-                      <a:pPr algn="r">
-                        <a:lnSpc>
-                          <a:spcPct val="115000"/>
-                        </a:lnSpc>
-                      </a:pPr>
-                      <a:r>
-                        <a:rPr sz="1000" b="0">
-                          <a:solidFill>
-                            <a:srgbClr val="565C66"/>
-                          </a:solidFill>
-                          <a:latin typeface="Malgun Gothic"/>
-                          <a:ea typeface="Malgun Gothic"/>
-                          <a:cs typeface="Malgun Gothic"/>
-                        </a:rPr>
-                        <a:t>0.171</a:t>
-                      </a:r>
-                    </a:p>
-                  </a:txBody>
-                  <a:tcPr marL="82296" marR="82296" marT="41148" marB="41148" anchor="ctr">
-                    <a:solidFill>
-                      <a:srgbClr val="F7F7F9"/>
-                    </a:solidFill>
-                  </a:tcPr>
-                </a:tc>
-                <a:tc>
-                  <a:txBody>
-                    <a:bodyPr wrap="square"/>
-                    <a:lstStyle/>
-                    <a:p>
-                      <a:pPr algn="r">
-                        <a:lnSpc>
-                          <a:spcPct val="115000"/>
-                        </a:lnSpc>
-                      </a:pPr>
-                      <a:r>
-                        <a:rPr sz="1000" b="0">
-                          <a:solidFill>
-                            <a:srgbClr val="565C66"/>
-                          </a:solidFill>
-                          <a:latin typeface="Malgun Gothic"/>
-                          <a:ea typeface="Malgun Gothic"/>
-                          <a:cs typeface="Malgun Gothic"/>
-                        </a:rPr>
-                        <a:t>0.114</a:t>
-                      </a:r>
-                    </a:p>
-                  </a:txBody>
-                  <a:tcPr marL="82296" marR="82296" marT="41148" marB="41148" anchor="ctr">
-                    <a:solidFill>
-                      <a:srgbClr val="F7F7F9"/>
-                    </a:solidFill>
-                  </a:tcPr>
-                </a:tc>
-                <a:tc>
-                  <a:txBody>
-                    <a:bodyPr wrap="square"/>
-                    <a:lstStyle/>
-                    <a:p>
-                      <a:pPr algn="r">
-                        <a:lnSpc>
-                          <a:spcPct val="115000"/>
-                        </a:lnSpc>
-                      </a:pPr>
-                      <a:r>
-                        <a:rPr sz="950" b="1">
-                          <a:solidFill>
-                            <a:srgbClr val="C1442A"/>
-                          </a:solidFill>
-                          <a:latin typeface="Malgun Gothic"/>
-                          <a:ea typeface="Malgun Gothic"/>
-                          <a:cs typeface="Malgun Gothic"/>
-                        </a:rPr>
-                        <a:t>0.09</a:t>
-                      </a:r>
-                    </a:p>
-                  </a:txBody>
-                  <a:tcPr marL="82296" marR="82296" marT="41148" marB="41148" anchor="ctr">
-                    <a:solidFill>
-                      <a:srgbClr val="F7F7F9"/>
-                    </a:solidFill>
-                  </a:tcPr>
-                </a:tc>
-                <a:tc>
-                  <a:txBody>
-                    <a:bodyPr wrap="square"/>
-                    <a:lstStyle/>
-                    <a:p>
-                      <a:pPr algn="ctr">
-                        <a:lnSpc>
-                          <a:spcPct val="115000"/>
-                        </a:lnSpc>
-                      </a:pPr>
-                      <a:r>
-                        <a:rPr sz="1000" b="0">
-                          <a:solidFill>
-                            <a:srgbClr val="565C66"/>
-                          </a:solidFill>
-                          <a:latin typeface="Malgun Gothic"/>
-                          <a:ea typeface="Malgun Gothic"/>
-                          <a:cs typeface="Malgun Gothic"/>
-                        </a:rPr>
-                        <a:t>0</a:t>
-                      </a:r>
-                    </a:p>
-                  </a:txBody>
-                  <a:tcPr marL="82296" marR="82296" marT="41148" marB="41148" anchor="ctr">
-                    <a:solidFill>
-                      <a:srgbClr val="F7F7F9"/>
-                    </a:solidFill>
-                  </a:tcPr>
-                </a:tc>
-                <a:tc>
-                  <a:txBody>
-                    <a:bodyPr wrap="square"/>
-                    <a:lstStyle/>
-                    <a:p>
-                      <a:pPr algn="ctr">
-                        <a:lnSpc>
-                          <a:spcPct val="115000"/>
-                        </a:lnSpc>
-                      </a:pPr>
-                      <a:r>
-                        <a:rPr sz="1000" b="0">
-                          <a:solidFill>
-                            <a:srgbClr val="565C66"/>
-                          </a:solidFill>
-                          <a:latin typeface="Malgun Gothic"/>
-                          <a:ea typeface="Malgun Gothic"/>
-                          <a:cs typeface="Malgun Gothic"/>
-                        </a:rPr>
-                        <a:t>4</a:t>
-                      </a:r>
-                    </a:p>
-                  </a:txBody>
-                  <a:tcPr marL="82296" marR="82296" marT="41148" marB="41148" anchor="ctr">
-                    <a:solidFill>
-                      <a:srgbClr val="F7F7F9"/>
-                    </a:solidFill>
-                  </a:tcPr>
-                </a:tc>
-              </a:tr>
-              <a:tr h="420624">
-                <a:tc>
-                  <a:txBody>
-                    <a:bodyPr wrap="square"/>
-                    <a:lstStyle/>
-                    <a:p>
-                      <a:pPr algn="l">
-                        <a:lnSpc>
-                          <a:spcPct val="115000"/>
-                        </a:lnSpc>
-                      </a:pPr>
-                      <a:r>
-                        <a:rPr sz="950" b="1">
-                          <a:solidFill>
-                            <a:srgbClr val="2F6FCE"/>
-                          </a:solidFill>
-                          <a:latin typeface="Malgun Gothic"/>
-                          <a:ea typeface="Malgun Gothic"/>
-                          <a:cs typeface="Malgun Gothic"/>
-                        </a:rPr>
-                        <a:t>32B bf16</a:t>
-                      </a:r>
-                    </a:p>
-                  </a:txBody>
-                  <a:tcPr marL="82296" marR="82296" marT="41148" marB="41148" anchor="ctr">
-                    <a:solidFill>
-                      <a:srgbClr val="FFFFFF"/>
-                    </a:solidFill>
-                  </a:tcPr>
-                </a:tc>
-                <a:tc>
-                  <a:txBody>
-                    <a:bodyPr wrap="square"/>
-                    <a:lstStyle/>
-                    <a:p>
-                      <a:pPr algn="l">
-                        <a:lnSpc>
-                          <a:spcPct val="115000"/>
-                        </a:lnSpc>
-                      </a:pPr>
-                      <a:r>
-                        <a:rPr sz="900" b="1">
-                          <a:solidFill>
-                            <a:srgbClr val="16181D"/>
-                          </a:solidFill>
-                          <a:latin typeface="Malgun Gothic"/>
-                          <a:ea typeface="Malgun Gothic"/>
-                          <a:cs typeface="Malgun Gothic"/>
-                        </a:rPr>
-                        <a:t>A6000 / bf16</a:t>
-                      </a:r>
-                    </a:p>
-                  </a:txBody>
-                  <a:tcPr marL="82296" marR="82296" marT="41148" marB="41148" anchor="ctr">
-                    <a:solidFill>
-                      <a:srgbClr val="FFFFFF"/>
-                    </a:solidFill>
-                  </a:tcPr>
-                </a:tc>
-                <a:tc>
-                  <a:txBody>
-                    <a:bodyPr wrap="square"/>
-                    <a:lstStyle/>
-                    <a:p>
-                      <a:pPr algn="r">
-                        <a:lnSpc>
-                          <a:spcPct val="115000"/>
-                        </a:lnSpc>
-                      </a:pPr>
-                      <a:r>
-                        <a:rPr sz="1000" b="0">
-                          <a:solidFill>
-                            <a:srgbClr val="565C66"/>
-                          </a:solidFill>
-                          <a:latin typeface="Malgun Gothic"/>
-                          <a:ea typeface="Malgun Gothic"/>
-                          <a:cs typeface="Malgun Gothic"/>
-                        </a:rPr>
-                        <a:t>0.257</a:t>
-                      </a:r>
-                    </a:p>
-                  </a:txBody>
-                  <a:tcPr marL="82296" marR="82296" marT="41148" marB="41148" anchor="ctr">
-                    <a:solidFill>
-                      <a:srgbClr val="FFFFFF"/>
-                    </a:solidFill>
-                  </a:tcPr>
-                </a:tc>
-                <a:tc>
-                  <a:txBody>
-                    <a:bodyPr wrap="square"/>
-                    <a:lstStyle/>
-                    <a:p>
-                      <a:pPr algn="r">
-                        <a:lnSpc>
-                          <a:spcPct val="115000"/>
-                        </a:lnSpc>
-                      </a:pPr>
-                      <a:r>
-                        <a:rPr sz="1000" b="1">
-                          <a:solidFill>
-                            <a:srgbClr val="C1442A"/>
-                          </a:solidFill>
-                          <a:latin typeface="Malgun Gothic"/>
-                          <a:ea typeface="Malgun Gothic"/>
-                          <a:cs typeface="Malgun Gothic"/>
-                        </a:rPr>
-                        <a:t>0.143</a:t>
-                      </a:r>
-                    </a:p>
-                  </a:txBody>
-                  <a:tcPr marL="82296" marR="82296" marT="41148" marB="41148" anchor="ctr">
-                    <a:solidFill>
-                      <a:srgbClr val="FFFFFF"/>
-                    </a:solidFill>
-                  </a:tcPr>
-                </a:tc>
-                <a:tc>
-                  <a:txBody>
-                    <a:bodyPr wrap="square"/>
-                    <a:lstStyle/>
-                    <a:p>
-                      <a:pPr algn="r">
-                        <a:lnSpc>
-                          <a:spcPct val="115000"/>
-                        </a:lnSpc>
-                      </a:pPr>
-                      <a:r>
-                        <a:rPr sz="950" b="0">
-                          <a:solidFill>
-                            <a:srgbClr val="565C66"/>
-                          </a:solidFill>
-                          <a:latin typeface="Malgun Gothic"/>
-                          <a:ea typeface="Malgun Gothic"/>
-                          <a:cs typeface="Malgun Gothic"/>
-                        </a:rPr>
-                        <a:t>0.286</a:t>
-                      </a:r>
-                    </a:p>
-                  </a:txBody>
-                  <a:tcPr marL="82296" marR="82296" marT="41148" marB="41148" anchor="ctr">
-                    <a:solidFill>
-                      <a:srgbClr val="FFFFFF"/>
-                    </a:solidFill>
-                  </a:tcPr>
-                </a:tc>
-                <a:tc>
-                  <a:txBody>
-                    <a:bodyPr wrap="square"/>
-                    <a:lstStyle/>
-                    <a:p>
-                      <a:pPr algn="ctr">
-                        <a:lnSpc>
-                          <a:spcPct val="115000"/>
-                        </a:lnSpc>
-                      </a:pPr>
-                      <a:r>
-                        <a:rPr sz="1000" b="1">
-                          <a:solidFill>
-                            <a:srgbClr val="C1442A"/>
-                          </a:solidFill>
-                          <a:latin typeface="Malgun Gothic"/>
-                          <a:ea typeface="Malgun Gothic"/>
-                          <a:cs typeface="Malgun Gothic"/>
-                        </a:rPr>
-                        <a:t>1</a:t>
-                      </a:r>
-                    </a:p>
-                  </a:txBody>
-                  <a:tcPr marL="82296" marR="82296" marT="41148" marB="41148" anchor="ctr">
-                    <a:solidFill>
-                      <a:srgbClr val="FFFFFF"/>
-                    </a:solidFill>
-                  </a:tcPr>
-                </a:tc>
-                <a:tc>
-                  <a:txBody>
-                    <a:bodyPr wrap="square"/>
-                    <a:lstStyle/>
-                    <a:p>
-                      <a:pPr algn="ctr">
-                        <a:lnSpc>
-                          <a:spcPct val="115000"/>
-                        </a:lnSpc>
-                      </a:pPr>
-                      <a:r>
-                        <a:rPr sz="1000" b="0">
-                          <a:solidFill>
-                            <a:srgbClr val="565C66"/>
-                          </a:solidFill>
-                          <a:latin typeface="Malgun Gothic"/>
-                          <a:ea typeface="Malgun Gothic"/>
-                          <a:cs typeface="Malgun Gothic"/>
-                        </a:rPr>
-                        <a:t>4</a:t>
-                      </a:r>
-                    </a:p>
-                  </a:txBody>
-                  <a:tcPr marL="82296" marR="82296" marT="41148" marB="41148" anchor="ctr">
-                    <a:solidFill>
-                      <a:srgbClr val="FFFFFF"/>
-                    </a:solidFill>
-                  </a:tcPr>
-                </a:tc>
-              </a:tr>
-              <a:tr h="420624">
-                <a:tc>
-                  <a:txBody>
-                    <a:bodyPr wrap="square"/>
-                    <a:lstStyle/>
-                    <a:p>
-                      <a:pPr algn="l">
-                        <a:lnSpc>
-                          <a:spcPct val="115000"/>
-                        </a:lnSpc>
-                      </a:pPr>
-                      <a:r>
-                        <a:rPr sz="950" b="0">
-                          <a:solidFill>
-                            <a:srgbClr val="565C66"/>
-                          </a:solidFill>
-                          <a:latin typeface="Malgun Gothic"/>
-                          <a:ea typeface="Malgun Gothic"/>
-                          <a:cs typeface="Malgun Gothic"/>
-                        </a:rPr>
-                        <a:t>(대조) 7B·8B bf16</a:t>
-                      </a:r>
-                    </a:p>
-                  </a:txBody>
-                  <a:tcPr marL="82296" marR="82296" marT="41148" marB="41148" anchor="ctr">
-                    <a:solidFill>
-                      <a:srgbClr val="F7F7F9"/>
-                    </a:solidFill>
-                  </a:tcPr>
-                </a:tc>
-                <a:tc>
-                  <a:txBody>
-                    <a:bodyPr wrap="square"/>
-                    <a:lstStyle/>
-                    <a:p>
-                      <a:pPr algn="l">
-                        <a:lnSpc>
-                          <a:spcPct val="115000"/>
-                        </a:lnSpc>
-                      </a:pPr>
-                      <a:r>
-                        <a:rPr sz="900" b="0">
-                          <a:solidFill>
-                            <a:srgbClr val="565C66"/>
-                          </a:solidFill>
-                          <a:latin typeface="Malgun Gothic"/>
-                          <a:ea typeface="Malgun Gothic"/>
-                          <a:cs typeface="Malgun Gothic"/>
-                        </a:rPr>
-                        <a:t>4090 / bf16</a:t>
-                      </a:r>
-                    </a:p>
-                  </a:txBody>
-                  <a:tcPr marL="82296" marR="82296" marT="41148" marB="41148" anchor="ctr">
-                    <a:solidFill>
-                      <a:srgbClr val="F7F7F9"/>
-                    </a:solidFill>
-                  </a:tcPr>
-                </a:tc>
-                <a:tc>
-                  <a:txBody>
-                    <a:bodyPr wrap="square"/>
-                    <a:lstStyle/>
-                    <a:p>
-                      <a:pPr algn="r">
-                        <a:lnSpc>
-                          <a:spcPct val="115000"/>
-                        </a:lnSpc>
-                      </a:pPr>
-                      <a:r>
-                        <a:rPr sz="1000" b="0">
-                          <a:solidFill>
-                            <a:srgbClr val="565C66"/>
-                          </a:solidFill>
-                          <a:latin typeface="Malgun Gothic"/>
-                          <a:ea typeface="Malgun Gothic"/>
-                          <a:cs typeface="Malgun Gothic"/>
-                        </a:rPr>
-                        <a:t>~0.18</a:t>
-                      </a:r>
-                    </a:p>
-                  </a:txBody>
-                  <a:tcPr marL="82296" marR="82296" marT="41148" marB="41148" anchor="ctr">
-                    <a:solidFill>
-                      <a:srgbClr val="F7F7F9"/>
-                    </a:solidFill>
-                  </a:tcPr>
-                </a:tc>
-                <a:tc>
-                  <a:txBody>
-                    <a:bodyPr wrap="square"/>
-                    <a:lstStyle/>
-                    <a:p>
-                      <a:pPr algn="r">
-                        <a:lnSpc>
-                          <a:spcPct val="115000"/>
-                        </a:lnSpc>
-                      </a:pPr>
-                      <a:r>
-                        <a:rPr sz="1000" b="1">
-                          <a:solidFill>
-                            <a:srgbClr val="2F6FCE"/>
-                          </a:solidFill>
-                          <a:latin typeface="Malgun Gothic"/>
-                          <a:ea typeface="Malgun Gothic"/>
-                          <a:cs typeface="Malgun Gothic"/>
-                        </a:rPr>
-                        <a:t>0.000</a:t>
-                      </a:r>
-                    </a:p>
-                  </a:txBody>
-                  <a:tcPr marL="82296" marR="82296" marT="41148" marB="41148" anchor="ctr">
-                    <a:solidFill>
-                      <a:srgbClr val="F7F7F9"/>
-                    </a:solidFill>
-                  </a:tcPr>
-                </a:tc>
-                <a:tc>
-                  <a:txBody>
-                    <a:bodyPr wrap="square"/>
-                    <a:lstStyle/>
-                    <a:p>
-                      <a:pPr algn="r">
-                        <a:lnSpc>
-                          <a:spcPct val="115000"/>
-                        </a:lnSpc>
-                      </a:pPr>
-                      <a:r>
-                        <a:rPr sz="950" b="0">
-                          <a:solidFill>
-                            <a:srgbClr val="565C66"/>
-                          </a:solidFill>
-                          <a:latin typeface="Malgun Gothic"/>
-                          <a:ea typeface="Malgun Gothic"/>
-                          <a:cs typeface="Malgun Gothic"/>
-                        </a:rPr>
-                        <a:t>0.31</a:t>
-                      </a:r>
-                    </a:p>
-                  </a:txBody>
-                  <a:tcPr marL="82296" marR="82296" marT="41148" marB="41148" anchor="ctr">
-                    <a:solidFill>
-                      <a:srgbClr val="F7F7F9"/>
-                    </a:solidFill>
-                  </a:tcPr>
-                </a:tc>
-                <a:tc>
-                  <a:txBody>
-                    <a:bodyPr wrap="square"/>
-                    <a:lstStyle/>
-                    <a:p>
-                      <a:pPr algn="ctr">
-                        <a:lnSpc>
-                          <a:spcPct val="115000"/>
-                        </a:lnSpc>
-                      </a:pPr>
-                      <a:r>
-                        <a:rPr sz="1000" b="1">
-                          <a:solidFill>
-                            <a:srgbClr val="2F6FCE"/>
-                          </a:solidFill>
-                          <a:latin typeface="Malgun Gothic"/>
-                          <a:ea typeface="Malgun Gothic"/>
-                          <a:cs typeface="Malgun Gothic"/>
-                        </a:rPr>
-                        <a:t>0</a:t>
-                      </a:r>
-                    </a:p>
-                  </a:txBody>
-                  <a:tcPr marL="82296" marR="82296" marT="41148" marB="41148" anchor="ctr">
-                    <a:solidFill>
-                      <a:srgbClr val="F7F7F9"/>
-                    </a:solidFill>
-                  </a:tcPr>
-                </a:tc>
-                <a:tc>
-                  <a:txBody>
-                    <a:bodyPr wrap="square"/>
-                    <a:lstStyle/>
-                    <a:p>
-                      <a:pPr algn="ctr">
-                        <a:lnSpc>
-                          <a:spcPct val="115000"/>
-                        </a:lnSpc>
-                      </a:pPr>
-                      <a:r>
-                        <a:rPr sz="1000" b="0">
-                          <a:solidFill>
-                            <a:srgbClr val="565C66"/>
-                          </a:solidFill>
-                          <a:latin typeface="Malgun Gothic"/>
-                          <a:ea typeface="Malgun Gothic"/>
-                          <a:cs typeface="Malgun Gothic"/>
-                        </a:rPr>
-                        <a:t>0</a:t>
-                      </a:r>
-                    </a:p>
-                  </a:txBody>
-                  <a:tcPr marL="82296" marR="82296" marT="41148" marB="41148" anchor="ctr">
-                    <a:solidFill>
-                      <a:srgbClr val="F7F7F9"/>
                     </a:solidFill>
                   </a:tcPr>
                 </a:tc>
@@ -5599,14 +6020,14 @@
       </p:graphicFrame>
       <p:sp>
         <p:nvSpPr>
-          <p:cNvPr id="6" name="Rounded Rectangle 5"/>
+          <p:cNvPr id="7" name="Rounded Rectangle 6"/>
           <p:cNvSpPr/>
           <p:nvPr/>
         </p:nvSpPr>
         <p:spPr>
           <a:xfrm>
-            <a:off x="640080" y="3931920"/>
-            <a:ext cx="10908792" cy="2148840"/>
+            <a:off x="640080" y="4526280"/>
+            <a:ext cx="10908792" cy="1783080"/>
           </a:xfrm>
           <a:prstGeom prst="roundRect">
             <a:avLst>
@@ -5643,14 +6064,14 @@
       </p:sp>
       <p:sp>
         <p:nvSpPr>
-          <p:cNvPr id="7" name="TextBox 6"/>
+          <p:cNvPr id="8" name="TextBox 7"/>
           <p:cNvSpPr txBox="1"/>
           <p:nvPr/>
         </p:nvSpPr>
         <p:spPr>
           <a:xfrm>
-            <a:off x="914400" y="4096512"/>
-            <a:ext cx="10360152" cy="1828800"/>
+            <a:off x="914400" y="4672584"/>
+            <a:ext cx="10360152" cy="1554480"/>
           </a:xfrm>
           <a:prstGeom prst="rect">
             <a:avLst/>
@@ -5669,7 +6090,7 @@
               </a:lnSpc>
             </a:pPr>
             <a:r>
-              <a:rPr sz="1150" b="1">
+              <a:rPr sz="1100" b="1">
                 <a:solidFill>
                   <a:srgbClr val="2F6FCE"/>
                 </a:solidFill>
@@ -5680,7 +6101,7 @@
               <a:t>4bit는 GPU 고정 시 결정론적</a:t>
             </a:r>
             <a:r>
-              <a:rPr sz="1150" b="0">
+              <a:rPr sz="1100" b="0">
                 <a:solidFill>
                   <a:srgbClr val="565C66"/>
                 </a:solidFill>
@@ -5688,10 +6109,10 @@
                 <a:ea typeface="Malgun Gothic"/>
                 <a:cs typeface="Malgun Gothic"/>
               </a:rPr>
-              <a:t> (7B와 동일) — A6000 3회·Blackwell 5회 각각 slack 35쌍 전부 일치. 이전에 본 "nf4dq 실행 간 12/35 불일치"는 run-to-run 노이즈가 아니라 </a:t>
-            </a:r>
-            <a:r>
-              <a:rPr sz="1150" b="1">
+              <a:t> (7B와 동일) — A6000 3회·Blackwell 5회 각각 35쌍 일치. 기존 "12/35 불일치"는 run-to-run 노이즈가 아니라 </a:t>
+            </a:r>
+            <a:r>
+              <a:rPr sz="1100" b="1">
                 <a:solidFill>
                   <a:srgbClr val="C1442A"/>
                 </a:solidFill>
@@ -5702,7 +6123,7 @@
               <a:t>A6000 ↔ Blackwell 아키텍처 차이</a:t>
             </a:r>
             <a:r>
-              <a:rPr sz="1150" b="0">
+              <a:rPr sz="1100" b="0">
                 <a:solidFill>
                   <a:srgbClr val="565C66"/>
                 </a:solidFill>
@@ -5719,11 +6140,11 @@
                 <a:spcPct val="125000"/>
               </a:lnSpc>
               <a:spcBef>
-                <a:spcPts val="700"/>
+                <a:spcPts val="600"/>
               </a:spcBef>
             </a:pPr>
             <a:r>
-              <a:rPr sz="1150" b="1">
+              <a:rPr sz="1100" b="1">
                 <a:solidFill>
                   <a:srgbClr val="C1442A"/>
                 </a:solidFill>
@@ -5734,7 +6155,7 @@
               <a:t>원인: Blackwell sm_120의 bnb nf4 커널이 32B 손상</a:t>
             </a:r>
             <a:r>
-              <a:rPr sz="1150" b="0">
+              <a:rPr sz="1100" b="0">
                 <a:solidFill>
                   <a:srgbClr val="565C66"/>
                 </a:solidFill>
@@ -5742,10 +6163,10 @@
                 <a:ea typeface="Malgun Gothic"/>
                 <a:cs typeface="Malgun Gothic"/>
               </a:rPr>
-              <a:t> — slack k0_util 0.286(=bf16) → 0.09 붕괴. → </a:t>
-            </a:r>
-            <a:r>
-              <a:rPr sz="1150" b="1">
+              <a:t> — slack k0_util 0.286(=bf16) → 0.086 붕괴. → </a:t>
+            </a:r>
+            <a:r>
+              <a:rPr sz="1100" b="1">
                 <a:solidFill>
                   <a:srgbClr val="16181D"/>
                 </a:solidFill>
@@ -5762,11 +6183,11 @@
                 <a:spcPct val="125000"/>
               </a:lnSpc>
               <a:spcBef>
-                <a:spcPts val="700"/>
+                <a:spcPts val="600"/>
               </a:spcBef>
             </a:pPr>
             <a:r>
-              <a:rPr sz="1150" b="1">
+              <a:rPr sz="1100" b="1">
                 <a:solidFill>
                   <a:srgbClr val="2F6FCE"/>
                 </a:solidFill>
@@ -5777,7 +6198,7 @@
               <a:t>스케일 효과 확정</a:t>
             </a:r>
             <a:r>
-              <a:rPr sz="1150" b="0">
+              <a:rPr sz="1100" b="0">
                 <a:solidFill>
                   <a:srgbClr val="565C66"/>
                 </a:solidFill>
@@ -5785,7 +6206,7 @@
                 <a:ea typeface="Malgun Gothic"/>
                 <a:cs typeface="Malgun Gothic"/>
               </a:rPr>
-              <a:t>: bf16(양자화 배제)에서 kN 0.143(≠0) + backfire 1 vs 7B·8B bf16 전량 억제. A6000에서 nf4dq·bf16 둘 다 8B에 못 미침.</a:t>
+              <a:t>: bf16에서 kN 0.143(≠0) + backfire 1 vs 8B 전량 억제. A6000에서 nf4dq·bf16 둘 다 8B에 못 미침.</a:t>
             </a:r>
           </a:p>
         </p:txBody>
